--- a/docs/presentation/CodemixSkill-Final-10-Slides.pptx
+++ b/docs/presentation/CodemixSkill-Final-10-Slides.pptx
@@ -3087,7 +3087,7 @@
                 <a:ea typeface="Cambria" pitchFamily="34" charset="-122"/>
                 <a:cs typeface="Cambria" pitchFamily="34" charset="-120"/>
               </a:rPr>
-              <a:t>Costs, Success Metrics, Risks &amp; The Ask</a:t>
+              <a:t>Costs, Success Metrics &amp; Risks</a:t>
             </a:r>
             <a:endParaRPr lang="en-US" sz="3000" dirty="0"/>
           </a:p>
@@ -5739,25 +5739,11 @@
           <a:bodyPr wrap="square" lIns="0" tIns="0" rIns="0" bIns="0" rtlCol="0" anchor="ctr"/>
           <a:lstStyle/>
           <a:p>
-            <a:pPr indent="0" marL="0">
-              <a:buNone/>
-            </a:pPr>
-            <a:r>
-              <a:rPr lang="en-US" sz="1300" b="1" dirty="0">
-                <a:solidFill>
-                  <a:srgbClr val="F4A300"/>
-                </a:solidFill>
-                <a:latin typeface="Calibri" pitchFamily="34" charset="0"/>
-                <a:ea typeface="Calibri" pitchFamily="34" charset="-122"/>
-                <a:cs typeface="Calibri" pitchFamily="34" charset="-120"/>
-              </a:rPr>
-              <a:t>OUR ASK  </a:t>
-            </a:r>
-            <a:pPr indent="0" marL="0">
-              <a:buNone/>
-            </a:pPr>
-            <a:r>
-              <a:rPr lang="en-US" sz="1300" b="1" dirty="0">
+            <a:pPr algn="ctr" indent="0" marL="0">
+              <a:buNone/>
+            </a:pPr>
+            <a:r>
+              <a:rPr lang="en-US" sz="1400" b="1" dirty="0">
                 <a:solidFill>
                   <a:srgbClr val="FFFFFF"/>
                 </a:solidFill>
@@ -5765,13 +5751,13 @@
                 <a:ea typeface="Calibri" pitchFamily="34" charset="-122"/>
                 <a:cs typeface="Calibri" pitchFamily="34" charset="-120"/>
               </a:rPr>
-              <a:t>Freshdesk sandbox + Marketplace listing path for a 3-brand pilot.   </a:t>
-            </a:r>
-            <a:pPr indent="0" marL="0">
-              <a:buNone/>
-            </a:pPr>
-            <a:r>
-              <a:rPr lang="en-US" sz="1300" i="1" dirty="0">
+              <a:t>“Don't cancel” should mean don't cancel.</a:t>
+            </a:r>
+            <a:pPr algn="ctr" indent="0" marL="0">
+              <a:buNone/>
+            </a:pPr>
+            <a:r>
+              <a:rPr lang="en-US" sz="1400" dirty="0">
                 <a:solidFill>
                   <a:srgbClr val="CADCFC"/>
                 </a:solidFill>
@@ -5779,9 +5765,9 @@
                 <a:ea typeface="Calibri" pitchFamily="34" charset="-122"/>
                 <a:cs typeface="Calibri" pitchFamily="34" charset="-120"/>
               </a:rPr>
-              <a:t>“Don't cancel” should mean don't cancel.</a:t>
-            </a:r>
-            <a:endParaRPr lang="en-US" sz="1300" dirty="0"/>
+              <a:t>   Codemix Skill  ·  Understand → Decide → Act → Audit</a:t>
+            </a:r>
+            <a:endParaRPr lang="en-US" sz="1400" dirty="0"/>
           </a:p>
         </p:txBody>
       </p:sp>

--- a/docs/presentation/CodemixSkill-Final-10-Slides.pptx
+++ b/docs/presentation/CodemixSkill-Final-10-Slides.pptx
@@ -2984,7 +2984,7 @@
                 <a:ea typeface="Calibri" pitchFamily="34" charset="-122"/>
                 <a:cs typeface="Calibri" pitchFamily="34" charset="-120"/>
               </a:rPr>
-              <a:t>SECTIONS 10–12 OF 12  ·  COSTS  ·  METRICS  ·  RISKS &amp; ASSUMPTIONS</a:t>
+              <a:t>SECTIONS 10–12 OF 12  ·  COSTS &amp; ROI  ·  METRICS  ·  RISKS &amp; ASSUMPTIONS</a:t>
             </a:r>
             <a:endParaRPr lang="en-US" sz="900" dirty="0"/>
           </a:p>
@@ -3087,7 +3087,7 @@
                 <a:ea typeface="Cambria" pitchFamily="34" charset="-122"/>
                 <a:cs typeface="Cambria" pitchFamily="34" charset="-120"/>
               </a:rPr>
-              <a:t>Costs, Success Metrics &amp; Risks</a:t>
+              <a:t>Costs, ROI, Success Metrics &amp; Risks</a:t>
             </a:r>
             <a:endParaRPr lang="en-US" sz="3000" dirty="0"/>
           </a:p>
@@ -3126,7 +3126,7 @@
                 <a:ea typeface="Calibri" pitchFamily="34" charset="-122"/>
                 <a:cs typeface="Calibri" pitchFamily="34" charset="-120"/>
               </a:rPr>
-              <a:t>Estimates and targets are labelled; two baselines are already measured</a:t>
+              <a:t>What it costs, what it returns, how we measure it, and what could go wrong</a:t>
             </a:r>
             <a:endParaRPr lang="en-US" sz="1350" dirty="0"/>
           </a:p>
@@ -3141,11 +3141,11 @@
         <p:spPr>
           <a:xfrm>
             <a:off x="548640" y="1572768"/>
-            <a:ext cx="3566160" cy="3931920"/>
+            <a:ext cx="3566160" cy="3456432"/>
           </a:xfrm>
           <a:prstGeom prst="roundRect">
             <a:avLst>
-              <a:gd name="adj" fmla="val 2564"/>
+              <a:gd name="adj" fmla="val 2646"/>
             </a:avLst>
           </a:prstGeom>
           <a:solidFill>
@@ -3863,8 +3863,8 @@
         </p:nvSpPr>
         <p:spPr>
           <a:xfrm>
-            <a:off x="731520" y="4434840"/>
-            <a:ext cx="3337560" cy="1005840"/>
+            <a:off x="731520" y="4389120"/>
+            <a:ext cx="3337560" cy="548640"/>
           </a:xfrm>
           <a:prstGeom prst="rect">
             <a:avLst/>
@@ -3877,9 +3877,6 @@
           <a:lstStyle/>
           <a:p>
             <a:pPr indent="0" marL="0">
-              <a:spcAft>
-                <a:spcPts val="400"/>
-              </a:spcAft>
               <a:buNone/>
             </a:pPr>
             <a:r>
@@ -3894,9 +3891,6 @@
               <a:t>Timeline: </a:t>
             </a:r>
             <a:pPr indent="0" marL="0">
-              <a:spcAft>
-                <a:spcPts val="400"/>
-              </a:spcAft>
               <a:buNone/>
             </a:pPr>
             <a:r>
@@ -3909,77 +3903,6 @@
                 <a:cs typeface="Calibri" pitchFamily="34" charset="-120"/>
               </a:rPr>
               <a:t>M1 negation data · M2 Claude gate, Dodo, voice path · M3 Freshdesk, audit, pilot</a:t>
-            </a:r>
-            <a:endParaRPr lang="en-US" sz="1000" dirty="0"/>
-          </a:p>
-          <a:p>
-            <a:pPr indent="0" marL="0">
-              <a:spcAft>
-                <a:spcPts val="400"/>
-              </a:spcAft>
-              <a:buNone/>
-            </a:pPr>
-            <a:r>
-              <a:rPr lang="en-US" sz="1000" b="1" dirty="0">
-                <a:solidFill>
-                  <a:srgbClr val="14213D"/>
-                </a:solidFill>
-                <a:latin typeface="Calibri" pitchFamily="34" charset="0"/>
-                <a:ea typeface="Calibri" pitchFamily="34" charset="-122"/>
-                <a:cs typeface="Calibri" pitchFamily="34" charset="-120"/>
-              </a:rPr>
-              <a:t>Optional: </a:t>
-            </a:r>
-            <a:pPr indent="0" marL="0">
-              <a:spcAft>
-                <a:spcPts val="400"/>
-              </a:spcAft>
-              <a:buNone/>
-            </a:pPr>
-            <a:r>
-              <a:rPr lang="en-US" sz="1000" dirty="0">
-                <a:solidFill>
-                  <a:srgbClr val="1F2937"/>
-                </a:solidFill>
-                <a:latin typeface="Calibri" pitchFamily="34" charset="0"/>
-                <a:ea typeface="Calibri" pitchFamily="34" charset="-122"/>
-                <a:cs typeface="Calibri" pitchFamily="34" charset="-120"/>
-              </a:rPr>
-              <a:t>100 customers × 20K actions/mo × $5/1K ≈ </a:t>
-            </a:r>
-            <a:pPr indent="0" marL="0">
-              <a:spcAft>
-                <a:spcPts val="400"/>
-              </a:spcAft>
-              <a:buNone/>
-            </a:pPr>
-            <a:r>
-              <a:rPr lang="en-US" sz="1000" b="1" dirty="0">
-                <a:solidFill>
-                  <a:srgbClr val="1F8A63"/>
-                </a:solidFill>
-                <a:latin typeface="Calibri" pitchFamily="34" charset="0"/>
-                <a:ea typeface="Calibri" pitchFamily="34" charset="-122"/>
-                <a:cs typeface="Calibri" pitchFamily="34" charset="-120"/>
-              </a:rPr>
-              <a:t>$120K ARR</a:t>
-            </a:r>
-            <a:pPr indent="0" marL="0">
-              <a:spcAft>
-                <a:spcPts val="400"/>
-              </a:spcAft>
-              <a:buNone/>
-            </a:pPr>
-            <a:r>
-              <a:rPr lang="en-US" sz="1000" dirty="0">
-                <a:solidFill>
-                  <a:srgbClr val="5B6475"/>
-                </a:solidFill>
-                <a:latin typeface="Calibri" pitchFamily="34" charset="0"/>
-                <a:ea typeface="Calibri" pitchFamily="34" charset="-122"/>
-                <a:cs typeface="Calibri" pitchFamily="34" charset="-120"/>
-              </a:rPr>
-              <a:t> (assumption)</a:t>
             </a:r>
             <a:endParaRPr lang="en-US" sz="1000" dirty="0"/>
           </a:p>
@@ -3994,11 +3917,11 @@
         <p:spPr>
           <a:xfrm>
             <a:off x="4361688" y="1572768"/>
-            <a:ext cx="3566160" cy="3931920"/>
+            <a:ext cx="3566160" cy="3456432"/>
           </a:xfrm>
           <a:prstGeom prst="roundRect">
             <a:avLst>
-              <a:gd name="adj" fmla="val 2564"/>
+              <a:gd name="adj" fmla="val 2646"/>
             </a:avLst>
           </a:prstGeom>
           <a:solidFill>
@@ -4191,8 +4114,8 @@
         </p:nvSpPr>
         <p:spPr>
           <a:xfrm>
-            <a:off x="4453128" y="2331720"/>
-            <a:ext cx="3337560" cy="347472"/>
+            <a:off x="4453128" y="2304288"/>
+            <a:ext cx="3337560" cy="310896"/>
           </a:xfrm>
           <a:prstGeom prst="rect">
             <a:avLst/>
@@ -4216,8 +4139,8 @@
         </p:nvSpPr>
         <p:spPr>
           <a:xfrm>
-            <a:off x="4526280" y="2331720"/>
-            <a:ext cx="1828800" cy="347472"/>
+            <a:off x="4526280" y="2304288"/>
+            <a:ext cx="1828800" cy="310896"/>
           </a:xfrm>
           <a:prstGeom prst="rect">
             <a:avLst/>
@@ -4255,8 +4178,8 @@
         </p:nvSpPr>
         <p:spPr>
           <a:xfrm>
-            <a:off x="6355080" y="2331720"/>
-            <a:ext cx="731520" cy="347472"/>
+            <a:off x="6355080" y="2304288"/>
+            <a:ext cx="731520" cy="310896"/>
           </a:xfrm>
           <a:prstGeom prst="rect">
             <a:avLst/>
@@ -4294,8 +4217,8 @@
         </p:nvSpPr>
         <p:spPr>
           <a:xfrm>
-            <a:off x="7059168" y="2331720"/>
-            <a:ext cx="731520" cy="347472"/>
+            <a:off x="7059168" y="2304288"/>
+            <a:ext cx="731520" cy="310896"/>
           </a:xfrm>
           <a:prstGeom prst="rect">
             <a:avLst/>
@@ -4333,8 +4256,8 @@
         </p:nvSpPr>
         <p:spPr>
           <a:xfrm>
-            <a:off x="4453128" y="2715768"/>
-            <a:ext cx="3337560" cy="347472"/>
+            <a:off x="4453128" y="2642616"/>
+            <a:ext cx="3337560" cy="310896"/>
           </a:xfrm>
           <a:prstGeom prst="rect">
             <a:avLst/>
@@ -4358,8 +4281,8 @@
         </p:nvSpPr>
         <p:spPr>
           <a:xfrm>
-            <a:off x="4526280" y="2715768"/>
-            <a:ext cx="1828800" cy="347472"/>
+            <a:off x="4526280" y="2642616"/>
+            <a:ext cx="1828800" cy="310896"/>
           </a:xfrm>
           <a:prstGeom prst="rect">
             <a:avLst/>
@@ -4397,8 +4320,8 @@
         </p:nvSpPr>
         <p:spPr>
           <a:xfrm>
-            <a:off x="6355080" y="2715768"/>
-            <a:ext cx="731520" cy="347472"/>
+            <a:off x="6355080" y="2642616"/>
+            <a:ext cx="731520" cy="310896"/>
           </a:xfrm>
           <a:prstGeom prst="rect">
             <a:avLst/>
@@ -4436,8 +4359,8 @@
         </p:nvSpPr>
         <p:spPr>
           <a:xfrm>
-            <a:off x="7059168" y="2715768"/>
-            <a:ext cx="731520" cy="347472"/>
+            <a:off x="7059168" y="2642616"/>
+            <a:ext cx="731520" cy="310896"/>
           </a:xfrm>
           <a:prstGeom prst="rect">
             <a:avLst/>
@@ -4475,8 +4398,8 @@
         </p:nvSpPr>
         <p:spPr>
           <a:xfrm>
-            <a:off x="4453128" y="3099816"/>
-            <a:ext cx="3337560" cy="347472"/>
+            <a:off x="4453128" y="2980944"/>
+            <a:ext cx="3337560" cy="310896"/>
           </a:xfrm>
           <a:prstGeom prst="rect">
             <a:avLst/>
@@ -4500,8 +4423,8 @@
         </p:nvSpPr>
         <p:spPr>
           <a:xfrm>
-            <a:off x="4526280" y="3099816"/>
-            <a:ext cx="1828800" cy="347472"/>
+            <a:off x="4526280" y="2980944"/>
+            <a:ext cx="1828800" cy="310896"/>
           </a:xfrm>
           <a:prstGeom prst="rect">
             <a:avLst/>
@@ -4539,8 +4462,8 @@
         </p:nvSpPr>
         <p:spPr>
           <a:xfrm>
-            <a:off x="6355080" y="3099816"/>
-            <a:ext cx="731520" cy="347472"/>
+            <a:off x="6355080" y="2980944"/>
+            <a:ext cx="731520" cy="310896"/>
           </a:xfrm>
           <a:prstGeom prst="rect">
             <a:avLst/>
@@ -4578,8 +4501,8 @@
         </p:nvSpPr>
         <p:spPr>
           <a:xfrm>
-            <a:off x="7059168" y="3099816"/>
-            <a:ext cx="731520" cy="347472"/>
+            <a:off x="7059168" y="2980944"/>
+            <a:ext cx="731520" cy="310896"/>
           </a:xfrm>
           <a:prstGeom prst="rect">
             <a:avLst/>
@@ -4617,8 +4540,8 @@
         </p:nvSpPr>
         <p:spPr>
           <a:xfrm>
-            <a:off x="4453128" y="3483864"/>
-            <a:ext cx="3337560" cy="347472"/>
+            <a:off x="4453128" y="3319272"/>
+            <a:ext cx="3337560" cy="310896"/>
           </a:xfrm>
           <a:prstGeom prst="rect">
             <a:avLst/>
@@ -4642,8 +4565,8 @@
         </p:nvSpPr>
         <p:spPr>
           <a:xfrm>
-            <a:off x="4526280" y="3483864"/>
-            <a:ext cx="1828800" cy="347472"/>
+            <a:off x="4526280" y="3319272"/>
+            <a:ext cx="1828800" cy="310896"/>
           </a:xfrm>
           <a:prstGeom prst="rect">
             <a:avLst/>
@@ -4681,8 +4604,8 @@
         </p:nvSpPr>
         <p:spPr>
           <a:xfrm>
-            <a:off x="6355080" y="3483864"/>
-            <a:ext cx="731520" cy="347472"/>
+            <a:off x="6355080" y="3319272"/>
+            <a:ext cx="731520" cy="310896"/>
           </a:xfrm>
           <a:prstGeom prst="rect">
             <a:avLst/>
@@ -4720,8 +4643,8 @@
         </p:nvSpPr>
         <p:spPr>
           <a:xfrm>
-            <a:off x="7059168" y="3483864"/>
-            <a:ext cx="731520" cy="347472"/>
+            <a:off x="7059168" y="3319272"/>
+            <a:ext cx="731520" cy="310896"/>
           </a:xfrm>
           <a:prstGeom prst="rect">
             <a:avLst/>
@@ -4759,8 +4682,8 @@
         </p:nvSpPr>
         <p:spPr>
           <a:xfrm>
-            <a:off x="4453128" y="3867912"/>
-            <a:ext cx="3337560" cy="347472"/>
+            <a:off x="4453128" y="3657600"/>
+            <a:ext cx="3337560" cy="310896"/>
           </a:xfrm>
           <a:prstGeom prst="rect">
             <a:avLst/>
@@ -4784,8 +4707,8 @@
         </p:nvSpPr>
         <p:spPr>
           <a:xfrm>
-            <a:off x="4526280" y="3867912"/>
-            <a:ext cx="1828800" cy="347472"/>
+            <a:off x="4526280" y="3657600"/>
+            <a:ext cx="1828800" cy="310896"/>
           </a:xfrm>
           <a:prstGeom prst="rect">
             <a:avLst/>
@@ -4823,8 +4746,8 @@
         </p:nvSpPr>
         <p:spPr>
           <a:xfrm>
-            <a:off x="6355080" y="3867912"/>
-            <a:ext cx="731520" cy="347472"/>
+            <a:off x="6355080" y="3657600"/>
+            <a:ext cx="731520" cy="310896"/>
           </a:xfrm>
           <a:prstGeom prst="rect">
             <a:avLst/>
@@ -4862,8 +4785,8 @@
         </p:nvSpPr>
         <p:spPr>
           <a:xfrm>
-            <a:off x="7059168" y="3867912"/>
-            <a:ext cx="731520" cy="347472"/>
+            <a:off x="7059168" y="3657600"/>
+            <a:ext cx="731520" cy="310896"/>
           </a:xfrm>
           <a:prstGeom prst="rect">
             <a:avLst/>
@@ -4901,8 +4824,8 @@
         </p:nvSpPr>
         <p:spPr>
           <a:xfrm>
-            <a:off x="4453128" y="4251960"/>
-            <a:ext cx="3337560" cy="347472"/>
+            <a:off x="4453128" y="3995928"/>
+            <a:ext cx="3337560" cy="310896"/>
           </a:xfrm>
           <a:prstGeom prst="rect">
             <a:avLst/>
@@ -4926,8 +4849,8 @@
         </p:nvSpPr>
         <p:spPr>
           <a:xfrm>
-            <a:off x="4526280" y="4251960"/>
-            <a:ext cx="1828800" cy="347472"/>
+            <a:off x="4526280" y="3995928"/>
+            <a:ext cx="1828800" cy="310896"/>
           </a:xfrm>
           <a:prstGeom prst="rect">
             <a:avLst/>
@@ -4965,8 +4888,8 @@
         </p:nvSpPr>
         <p:spPr>
           <a:xfrm>
-            <a:off x="6355080" y="4251960"/>
-            <a:ext cx="731520" cy="347472"/>
+            <a:off x="6355080" y="3995928"/>
+            <a:ext cx="731520" cy="310896"/>
           </a:xfrm>
           <a:prstGeom prst="rect">
             <a:avLst/>
@@ -5004,8 +4927,8 @@
         </p:nvSpPr>
         <p:spPr>
           <a:xfrm>
-            <a:off x="7059168" y="4251960"/>
-            <a:ext cx="731520" cy="347472"/>
+            <a:off x="7059168" y="3995928"/>
+            <a:ext cx="731520" cy="310896"/>
           </a:xfrm>
           <a:prstGeom prst="rect">
             <a:avLst/>
@@ -5043,8 +4966,8 @@
         </p:nvSpPr>
         <p:spPr>
           <a:xfrm>
-            <a:off x="4453128" y="4636008"/>
-            <a:ext cx="3337560" cy="347472"/>
+            <a:off x="4453128" y="4334256"/>
+            <a:ext cx="3337560" cy="310896"/>
           </a:xfrm>
           <a:prstGeom prst="rect">
             <a:avLst/>
@@ -5068,8 +4991,8 @@
         </p:nvSpPr>
         <p:spPr>
           <a:xfrm>
-            <a:off x="4526280" y="4636008"/>
-            <a:ext cx="1828800" cy="347472"/>
+            <a:off x="4526280" y="4334256"/>
+            <a:ext cx="1828800" cy="310896"/>
           </a:xfrm>
           <a:prstGeom prst="rect">
             <a:avLst/>
@@ -5107,8 +5030,8 @@
         </p:nvSpPr>
         <p:spPr>
           <a:xfrm>
-            <a:off x="6355080" y="4636008"/>
-            <a:ext cx="731520" cy="347472"/>
+            <a:off x="6355080" y="4334256"/>
+            <a:ext cx="731520" cy="310896"/>
           </a:xfrm>
           <a:prstGeom prst="rect">
             <a:avLst/>
@@ -5146,8 +5069,8 @@
         </p:nvSpPr>
         <p:spPr>
           <a:xfrm>
-            <a:off x="7059168" y="4636008"/>
-            <a:ext cx="731520" cy="347472"/>
+            <a:off x="7059168" y="4334256"/>
+            <a:ext cx="731520" cy="310896"/>
           </a:xfrm>
           <a:prstGeom prst="rect">
             <a:avLst/>
@@ -5185,8 +5108,8 @@
         </p:nvSpPr>
         <p:spPr>
           <a:xfrm>
-            <a:off x="4498848" y="5029200"/>
-            <a:ext cx="3291840" cy="365760"/>
+            <a:off x="4498848" y="4663440"/>
+            <a:ext cx="3291840" cy="320040"/>
           </a:xfrm>
           <a:prstGeom prst="rect">
             <a:avLst/>
@@ -5225,11 +5148,11 @@
         <p:spPr>
           <a:xfrm>
             <a:off x="8092440" y="1572768"/>
-            <a:ext cx="3566160" cy="3931920"/>
+            <a:ext cx="3566160" cy="3456432"/>
           </a:xfrm>
           <a:prstGeom prst="roundRect">
             <a:avLst>
-              <a:gd name="adj" fmla="val 2564"/>
+              <a:gd name="adj" fmla="val 2646"/>
             </a:avLst>
           </a:prstGeom>
           <a:solidFill>
@@ -5344,7 +5267,7 @@
         </p:nvSpPr>
         <p:spPr>
           <a:xfrm>
-            <a:off x="8247888" y="2121408"/>
+            <a:off x="8247888" y="2103120"/>
             <a:ext cx="3291840" cy="457200"/>
           </a:xfrm>
           <a:prstGeom prst="rect">
@@ -5400,7 +5323,7 @@
         </p:nvSpPr>
         <p:spPr>
           <a:xfrm>
-            <a:off x="8247888" y="2596896"/>
+            <a:off x="8247888" y="2532888"/>
             <a:ext cx="3291840" cy="457200"/>
           </a:xfrm>
           <a:prstGeom prst="rect">
@@ -5456,7 +5379,7 @@
         </p:nvSpPr>
         <p:spPr>
           <a:xfrm>
-            <a:off x="8247888" y="3072384"/>
+            <a:off x="8247888" y="2962656"/>
             <a:ext cx="3291840" cy="457200"/>
           </a:xfrm>
           <a:prstGeom prst="rect">
@@ -5512,7 +5435,7 @@
         </p:nvSpPr>
         <p:spPr>
           <a:xfrm>
-            <a:off x="8247888" y="3547872"/>
+            <a:off x="8247888" y="3392424"/>
             <a:ext cx="3291840" cy="457200"/>
           </a:xfrm>
           <a:prstGeom prst="rect">
@@ -5568,47 +5491,47 @@
         </p:nvSpPr>
         <p:spPr>
           <a:xfrm>
+            <a:off x="8247888" y="3840480"/>
+            <a:ext cx="2743200" cy="228600"/>
+          </a:xfrm>
+          <a:prstGeom prst="rect">
+            <a:avLst/>
+          </a:prstGeom>
+          <a:noFill/>
+          <a:ln/>
+        </p:spPr>
+        <p:txBody>
+          <a:bodyPr wrap="square" lIns="0" tIns="0" rIns="0" bIns="0" rtlCol="0" anchor="t"/>
+          <a:lstStyle/>
+          <a:p>
+            <a:pPr indent="0" marL="0">
+              <a:buNone/>
+            </a:pPr>
+            <a:r>
+              <a:rPr lang="en-US" sz="900" b="1" spc="100" kern="0" dirty="0">
+                <a:solidFill>
+                  <a:srgbClr val="F4A300"/>
+                </a:solidFill>
+                <a:latin typeface="Calibri" pitchFamily="34" charset="0"/>
+                <a:ea typeface="Calibri" pitchFamily="34" charset="-122"/>
+                <a:cs typeface="Calibri" pitchFamily="34" charset="-120"/>
+              </a:rPr>
+              <a:t>ASSUMPTIONS</a:t>
+            </a:r>
+            <a:endParaRPr lang="en-US" sz="900" dirty="0"/>
+          </a:p>
+        </p:txBody>
+      </p:sp>
+      <p:sp>
+        <p:nvSpPr>
+          <p:cNvPr id="70" name="Text 68"/>
+          <p:cNvSpPr txBox="1"/>
+          <p:nvPr/>
+        </p:nvSpPr>
+        <p:spPr>
+          <a:xfrm>
             <a:off x="8247888" y="4069080"/>
-            <a:ext cx="2743200" cy="228600"/>
-          </a:xfrm>
-          <a:prstGeom prst="rect">
-            <a:avLst/>
-          </a:prstGeom>
-          <a:noFill/>
-          <a:ln/>
-        </p:spPr>
-        <p:txBody>
-          <a:bodyPr wrap="square" lIns="0" tIns="0" rIns="0" bIns="0" rtlCol="0" anchor="t"/>
-          <a:lstStyle/>
-          <a:p>
-            <a:pPr indent="0" marL="0">
-              <a:buNone/>
-            </a:pPr>
-            <a:r>
-              <a:rPr lang="en-US" sz="900" b="1" spc="100" kern="0" dirty="0">
-                <a:solidFill>
-                  <a:srgbClr val="F4A300"/>
-                </a:solidFill>
-                <a:latin typeface="Calibri" pitchFamily="34" charset="0"/>
-                <a:ea typeface="Calibri" pitchFamily="34" charset="-122"/>
-                <a:cs typeface="Calibri" pitchFamily="34" charset="-120"/>
-              </a:rPr>
-              <a:t>ASSUMPTIONS</a:t>
-            </a:r>
-            <a:endParaRPr lang="en-US" sz="900" dirty="0"/>
-          </a:p>
-        </p:txBody>
-      </p:sp>
-      <p:sp>
-        <p:nvSpPr>
-          <p:cNvPr id="70" name="Text 68"/>
-          <p:cNvSpPr txBox="1"/>
-          <p:nvPr/>
-        </p:nvSpPr>
-        <p:spPr>
-          <a:xfrm>
-            <a:off x="8247888" y="4315968"/>
-            <a:ext cx="3291840" cy="1097280"/>
+            <a:ext cx="3291840" cy="914400"/>
           </a:xfrm>
           <a:prstGeom prst="rect">
             <a:avLst/>
@@ -5692,12 +5615,12 @@
         </p:nvSpPr>
         <p:spPr>
           <a:xfrm>
-            <a:off x="548640" y="5623560"/>
-            <a:ext cx="11109960" cy="566928"/>
+            <a:off x="548640" y="5166360"/>
+            <a:ext cx="11109960" cy="1051560"/>
           </a:xfrm>
           <a:prstGeom prst="roundRect">
             <a:avLst>
-              <a:gd name="adj" fmla="val 16129"/>
+              <a:gd name="adj" fmla="val 8696"/>
             </a:avLst>
           </a:prstGeom>
           <a:solidFill>
@@ -5726,8 +5649,86 @@
         </p:nvSpPr>
         <p:spPr>
           <a:xfrm>
-            <a:off x="777240" y="5623560"/>
-            <a:ext cx="10698480" cy="566928"/>
+            <a:off x="777240" y="5230368"/>
+            <a:ext cx="2743200" cy="237744"/>
+          </a:xfrm>
+          <a:prstGeom prst="rect">
+            <a:avLst/>
+          </a:prstGeom>
+          <a:noFill/>
+          <a:ln/>
+        </p:spPr>
+        <p:txBody>
+          <a:bodyPr wrap="square" lIns="0" tIns="0" rIns="0" bIns="0" rtlCol="0" anchor="t"/>
+          <a:lstStyle/>
+          <a:p>
+            <a:pPr indent="0" marL="0">
+              <a:buNone/>
+            </a:pPr>
+            <a:r>
+              <a:rPr lang="en-US" sz="1050" b="1" spc="100" kern="0" dirty="0">
+                <a:solidFill>
+                  <a:srgbClr val="F4A300"/>
+                </a:solidFill>
+                <a:latin typeface="Calibri" pitchFamily="34" charset="0"/>
+                <a:ea typeface="Calibri" pitchFamily="34" charset="-122"/>
+                <a:cs typeface="Calibri" pitchFamily="34" charset="-120"/>
+              </a:rPr>
+              <a:t>RETURN ON INVESTMENT</a:t>
+            </a:r>
+            <a:endParaRPr lang="en-US" sz="1050" dirty="0"/>
+          </a:p>
+        </p:txBody>
+      </p:sp>
+      <p:sp>
+        <p:nvSpPr>
+          <p:cNvPr id="73" name="Text 71"/>
+          <p:cNvSpPr txBox="1"/>
+          <p:nvPr/>
+        </p:nvSpPr>
+        <p:spPr>
+          <a:xfrm>
+            <a:off x="3291840" y="5230368"/>
+            <a:ext cx="8138160" cy="237744"/>
+          </a:xfrm>
+          <a:prstGeom prst="rect">
+            <a:avLst/>
+          </a:prstGeom>
+          <a:noFill/>
+          <a:ln/>
+        </p:spPr>
+        <p:txBody>
+          <a:bodyPr wrap="square" lIns="0" tIns="0" rIns="0" bIns="0" rtlCol="0" anchor="t"/>
+          <a:lstStyle/>
+          <a:p>
+            <a:pPr algn="r" indent="0" marL="0">
+              <a:buNone/>
+            </a:pPr>
+            <a:r>
+              <a:rPr lang="en-US" sz="900" i="1" dirty="0">
+                <a:solidFill>
+                  <a:srgbClr val="8FA0BF"/>
+                </a:solidFill>
+                <a:latin typeface="Calibri" pitchFamily="34" charset="0"/>
+                <a:ea typeface="Calibri" pitchFamily="34" charset="-122"/>
+                <a:cs typeface="Calibri" pitchFamily="34" charset="-120"/>
+              </a:rPr>
+              <a:t>illustrative · built on the deck's pricing assumptions · validated in the pilot</a:t>
+            </a:r>
+            <a:endParaRPr lang="en-US" sz="900" dirty="0"/>
+          </a:p>
+        </p:txBody>
+      </p:sp>
+      <p:sp>
+        <p:nvSpPr>
+          <p:cNvPr id="74" name="Text 72"/>
+          <p:cNvSpPr txBox="1"/>
+          <p:nvPr/>
+        </p:nvSpPr>
+        <p:spPr>
+          <a:xfrm>
+            <a:off x="777240" y="5486400"/>
+            <a:ext cx="1234440" cy="658368"/>
           </a:xfrm>
           <a:prstGeom prst="rect">
             <a:avLst/>
@@ -5739,11 +5740,50 @@
           <a:bodyPr wrap="square" lIns="0" tIns="0" rIns="0" bIns="0" rtlCol="0" anchor="ctr"/>
           <a:lstStyle/>
           <a:p>
-            <a:pPr algn="ctr" indent="0" marL="0">
-              <a:buNone/>
-            </a:pPr>
-            <a:r>
-              <a:rPr lang="en-US" sz="1400" b="1" dirty="0">
+            <a:pPr indent="0" marL="0">
+              <a:buNone/>
+            </a:pPr>
+            <a:r>
+              <a:rPr lang="en-US" sz="2200" b="1" dirty="0">
+                <a:solidFill>
+                  <a:srgbClr val="F4A300"/>
+                </a:solidFill>
+                <a:latin typeface="Cambria" pitchFamily="34" charset="0"/>
+                <a:ea typeface="Cambria" pitchFamily="34" charset="-122"/>
+                <a:cs typeface="Cambria" pitchFamily="34" charset="-120"/>
+              </a:rPr>
+              <a:t>~2.3×</a:t>
+            </a:r>
+            <a:endParaRPr lang="en-US" sz="2200" dirty="0"/>
+          </a:p>
+        </p:txBody>
+      </p:sp>
+      <p:sp>
+        <p:nvSpPr>
+          <p:cNvPr id="75" name="Text 73"/>
+          <p:cNvSpPr txBox="1"/>
+          <p:nvPr/>
+        </p:nvSpPr>
+        <p:spPr>
+          <a:xfrm>
+            <a:off x="2039112" y="5486400"/>
+            <a:ext cx="1417320" cy="658368"/>
+          </a:xfrm>
+          <a:prstGeom prst="rect">
+            <a:avLst/>
+          </a:prstGeom>
+          <a:noFill/>
+          <a:ln/>
+        </p:spPr>
+        <p:txBody>
+          <a:bodyPr wrap="square" lIns="0" tIns="0" rIns="0" bIns="0" rtlCol="0" anchor="ctr"/>
+          <a:lstStyle/>
+          <a:p>
+            <a:pPr indent="0" marL="0">
+              <a:buNone/>
+            </a:pPr>
+            <a:r>
+              <a:rPr lang="en-US" sz="950" b="1" dirty="0">
                 <a:solidFill>
                   <a:srgbClr val="FFFFFF"/>
                 </a:solidFill>
@@ -5751,13 +5791,16 @@
                 <a:ea typeface="Calibri" pitchFamily="34" charset="-122"/>
                 <a:cs typeface="Calibri" pitchFamily="34" charset="-120"/>
               </a:rPr>
-              <a:t>“Don't cancel” should mean don't cancel.</a:t>
-            </a:r>
-            <a:pPr algn="ctr" indent="0" marL="0">
-              <a:buNone/>
-            </a:pPr>
-            <a:r>
-              <a:rPr lang="en-US" sz="1400" dirty="0">
+              <a:t>Customer ROI</a:t>
+            </a:r>
+            <a:endParaRPr lang="en-US" sz="950" dirty="0"/>
+          </a:p>
+          <a:p>
+            <a:pPr indent="0" marL="0">
+              <a:buNone/>
+            </a:pPr>
+            <a:r>
+              <a:rPr lang="en-US" sz="950" dirty="0">
                 <a:solidFill>
                   <a:srgbClr val="CADCFC"/>
                 </a:solidFill>
@@ -5765,15 +5808,300 @@
                 <a:ea typeface="Calibri" pitchFamily="34" charset="-122"/>
                 <a:cs typeface="Calibri" pitchFamily="34" charset="-120"/>
               </a:rPr>
-              <a:t>   Codemix Skill  ·  Understand → Decide → Act → Audit</a:t>
-            </a:r>
-            <a:endParaRPr lang="en-US" sz="1400" dirty="0"/>
-          </a:p>
-        </p:txBody>
-      </p:sp>
-      <p:sp>
-        <p:nvSpPr>
-          <p:cNvPr id="73" name="Text 71"/>
+              <a:t>₹20K saved vs ₹8.5K fee per month</a:t>
+            </a:r>
+            <a:endParaRPr lang="en-US" sz="950" dirty="0"/>
+          </a:p>
+        </p:txBody>
+      </p:sp>
+      <p:sp>
+        <p:nvSpPr>
+          <p:cNvPr id="76" name="Text 74"/>
+          <p:cNvSpPr txBox="1"/>
+          <p:nvPr/>
+        </p:nvSpPr>
+        <p:spPr>
+          <a:xfrm>
+            <a:off x="3520440" y="5486400"/>
+            <a:ext cx="1234440" cy="658368"/>
+          </a:xfrm>
+          <a:prstGeom prst="rect">
+            <a:avLst/>
+          </a:prstGeom>
+          <a:noFill/>
+          <a:ln/>
+        </p:spPr>
+        <p:txBody>
+          <a:bodyPr wrap="square" lIns="0" tIns="0" rIns="0" bIns="0" rtlCol="0" anchor="ctr"/>
+          <a:lstStyle/>
+          <a:p>
+            <a:pPr indent="0" marL="0">
+              <a:buNone/>
+            </a:pPr>
+            <a:r>
+              <a:rPr lang="en-US" sz="2200" b="1" dirty="0">
+                <a:solidFill>
+                  <a:srgbClr val="F4A300"/>
+                </a:solidFill>
+                <a:latin typeface="Cambria" pitchFamily="34" charset="0"/>
+                <a:ea typeface="Cambria" pitchFamily="34" charset="-122"/>
+                <a:cs typeface="Cambria" pitchFamily="34" charset="-120"/>
+              </a:rPr>
+              <a:t>9</a:t>
+            </a:r>
+            <a:endParaRPr lang="en-US" sz="2200" dirty="0"/>
+          </a:p>
+        </p:txBody>
+      </p:sp>
+      <p:sp>
+        <p:nvSpPr>
+          <p:cNvPr id="77" name="Text 75"/>
+          <p:cNvSpPr txBox="1"/>
+          <p:nvPr/>
+        </p:nvSpPr>
+        <p:spPr>
+          <a:xfrm>
+            <a:off x="4782312" y="5486400"/>
+            <a:ext cx="1417320" cy="658368"/>
+          </a:xfrm>
+          <a:prstGeom prst="rect">
+            <a:avLst/>
+          </a:prstGeom>
+          <a:noFill/>
+          <a:ln/>
+        </p:spPr>
+        <p:txBody>
+          <a:bodyPr wrap="square" lIns="0" tIns="0" rIns="0" bIns="0" rtlCol="0" anchor="ctr"/>
+          <a:lstStyle/>
+          <a:p>
+            <a:pPr indent="0" marL="0">
+              <a:buNone/>
+            </a:pPr>
+            <a:r>
+              <a:rPr lang="en-US" sz="950" b="1" dirty="0">
+                <a:solidFill>
+                  <a:srgbClr val="FFFFFF"/>
+                </a:solidFill>
+                <a:latin typeface="Calibri" pitchFamily="34" charset="0"/>
+                <a:ea typeface="Calibri" pitchFamily="34" charset="-122"/>
+                <a:cs typeface="Calibri" pitchFamily="34" charset="-120"/>
+              </a:rPr>
+              <a:t>Break-even</a:t>
+            </a:r>
+            <a:endParaRPr lang="en-US" sz="950" dirty="0"/>
+          </a:p>
+          <a:p>
+            <a:pPr indent="0" marL="0">
+              <a:buNone/>
+            </a:pPr>
+            <a:r>
+              <a:rPr lang="en-US" sz="950" dirty="0">
+                <a:solidFill>
+                  <a:srgbClr val="CADCFC"/>
+                </a:solidFill>
+                <a:latin typeface="Calibri" pitchFamily="34" charset="0"/>
+                <a:ea typeface="Calibri" pitchFamily="34" charset="-122"/>
+                <a:cs typeface="Calibri" pitchFamily="34" charset="-120"/>
+              </a:rPr>
+              <a:t>wrong ₹1,000 refunds prevented per month</a:t>
+            </a:r>
+            <a:endParaRPr lang="en-US" sz="950" dirty="0"/>
+          </a:p>
+        </p:txBody>
+      </p:sp>
+      <p:sp>
+        <p:nvSpPr>
+          <p:cNvPr id="78" name="Text 76"/>
+          <p:cNvSpPr txBox="1"/>
+          <p:nvPr/>
+        </p:nvSpPr>
+        <p:spPr>
+          <a:xfrm>
+            <a:off x="6263640" y="5486400"/>
+            <a:ext cx="1234440" cy="658368"/>
+          </a:xfrm>
+          <a:prstGeom prst="rect">
+            <a:avLst/>
+          </a:prstGeom>
+          <a:noFill/>
+          <a:ln/>
+        </p:spPr>
+        <p:txBody>
+          <a:bodyPr wrap="square" lIns="0" tIns="0" rIns="0" bIns="0" rtlCol="0" anchor="ctr"/>
+          <a:lstStyle/>
+          <a:p>
+            <a:pPr indent="0" marL="0">
+              <a:buNone/>
+            </a:pPr>
+            <a:r>
+              <a:rPr lang="en-US" sz="2200" b="1" dirty="0">
+                <a:solidFill>
+                  <a:srgbClr val="F4A300"/>
+                </a:solidFill>
+                <a:latin typeface="Cambria" pitchFamily="34" charset="0"/>
+                <a:ea typeface="Cambria" pitchFamily="34" charset="-122"/>
+                <a:cs typeface="Cambria" pitchFamily="34" charset="-120"/>
+              </a:rPr>
+              <a:t>~1.3×</a:t>
+            </a:r>
+            <a:endParaRPr lang="en-US" sz="2200" dirty="0"/>
+          </a:p>
+        </p:txBody>
+      </p:sp>
+      <p:sp>
+        <p:nvSpPr>
+          <p:cNvPr id="79" name="Text 77"/>
+          <p:cNvSpPr txBox="1"/>
+          <p:nvPr/>
+        </p:nvSpPr>
+        <p:spPr>
+          <a:xfrm>
+            <a:off x="7525512" y="5486400"/>
+            <a:ext cx="1417320" cy="658368"/>
+          </a:xfrm>
+          <a:prstGeom prst="rect">
+            <a:avLst/>
+          </a:prstGeom>
+          <a:noFill/>
+          <a:ln/>
+        </p:spPr>
+        <p:txBody>
+          <a:bodyPr wrap="square" lIns="0" tIns="0" rIns="0" bIns="0" rtlCol="0" anchor="ctr"/>
+          <a:lstStyle/>
+          <a:p>
+            <a:pPr indent="0" marL="0">
+              <a:buNone/>
+            </a:pPr>
+            <a:r>
+              <a:rPr lang="en-US" sz="950" b="1" dirty="0">
+                <a:solidFill>
+                  <a:srgbClr val="FFFFFF"/>
+                </a:solidFill>
+                <a:latin typeface="Calibri" pitchFamily="34" charset="0"/>
+                <a:ea typeface="Calibri" pitchFamily="34" charset="-122"/>
+                <a:cs typeface="Calibri" pitchFamily="34" charset="-120"/>
+              </a:rPr>
+              <a:t>Year-1 ROI (Freshworks)</a:t>
+            </a:r>
+            <a:endParaRPr lang="en-US" sz="950" dirty="0"/>
+          </a:p>
+          <a:p>
+            <a:pPr indent="0" marL="0">
+              <a:buNone/>
+            </a:pPr>
+            <a:r>
+              <a:rPr lang="en-US" sz="950" dirty="0">
+                <a:solidFill>
+                  <a:srgbClr val="CADCFC"/>
+                </a:solidFill>
+                <a:latin typeface="Calibri" pitchFamily="34" charset="0"/>
+                <a:ea typeface="Calibri" pitchFamily="34" charset="-122"/>
+                <a:cs typeface="Calibri" pitchFamily="34" charset="-120"/>
+              </a:rPr>
+              <a:t>~$120K ARR on a ~$90K build</a:t>
+            </a:r>
+            <a:endParaRPr lang="en-US" sz="950" dirty="0"/>
+          </a:p>
+        </p:txBody>
+      </p:sp>
+      <p:sp>
+        <p:nvSpPr>
+          <p:cNvPr id="80" name="Text 78"/>
+          <p:cNvSpPr txBox="1"/>
+          <p:nvPr/>
+        </p:nvSpPr>
+        <p:spPr>
+          <a:xfrm>
+            <a:off x="9006840" y="5486400"/>
+            <a:ext cx="1234440" cy="658368"/>
+          </a:xfrm>
+          <a:prstGeom prst="rect">
+            <a:avLst/>
+          </a:prstGeom>
+          <a:noFill/>
+          <a:ln/>
+        </p:spPr>
+        <p:txBody>
+          <a:bodyPr wrap="square" lIns="0" tIns="0" rIns="0" bIns="0" rtlCol="0" anchor="ctr"/>
+          <a:lstStyle/>
+          <a:p>
+            <a:pPr indent="0" marL="0">
+              <a:buNone/>
+            </a:pPr>
+            <a:r>
+              <a:rPr lang="en-US" sz="2200" b="1" dirty="0">
+                <a:solidFill>
+                  <a:srgbClr val="F4A300"/>
+                </a:solidFill>
+                <a:latin typeface="Cambria" pitchFamily="34" charset="0"/>
+                <a:ea typeface="Cambria" pitchFamily="34" charset="-122"/>
+                <a:cs typeface="Cambria" pitchFamily="34" charset="-120"/>
+              </a:rPr>
+              <a:t>~9 mo</a:t>
+            </a:r>
+            <a:endParaRPr lang="en-US" sz="2200" dirty="0"/>
+          </a:p>
+        </p:txBody>
+      </p:sp>
+      <p:sp>
+        <p:nvSpPr>
+          <p:cNvPr id="81" name="Text 79"/>
+          <p:cNvSpPr txBox="1"/>
+          <p:nvPr/>
+        </p:nvSpPr>
+        <p:spPr>
+          <a:xfrm>
+            <a:off x="10268712" y="5486400"/>
+            <a:ext cx="1417320" cy="658368"/>
+          </a:xfrm>
+          <a:prstGeom prst="rect">
+            <a:avLst/>
+          </a:prstGeom>
+          <a:noFill/>
+          <a:ln/>
+        </p:spPr>
+        <p:txBody>
+          <a:bodyPr wrap="square" lIns="0" tIns="0" rIns="0" bIns="0" rtlCol="0" anchor="ctr"/>
+          <a:lstStyle/>
+          <a:p>
+            <a:pPr indent="0" marL="0">
+              <a:buNone/>
+            </a:pPr>
+            <a:r>
+              <a:rPr lang="en-US" sz="950" b="1" dirty="0">
+                <a:solidFill>
+                  <a:srgbClr val="FFFFFF"/>
+                </a:solidFill>
+                <a:latin typeface="Calibri" pitchFamily="34" charset="0"/>
+                <a:ea typeface="Calibri" pitchFamily="34" charset="-122"/>
+                <a:cs typeface="Calibri" pitchFamily="34" charset="-120"/>
+              </a:rPr>
+              <a:t>Payback</a:t>
+            </a:r>
+            <a:endParaRPr lang="en-US" sz="950" dirty="0"/>
+          </a:p>
+          <a:p>
+            <a:pPr indent="0" marL="0">
+              <a:buNone/>
+            </a:pPr>
+            <a:r>
+              <a:rPr lang="en-US" sz="950" dirty="0">
+                <a:solidFill>
+                  <a:srgbClr val="CADCFC"/>
+                </a:solidFill>
+                <a:latin typeface="Calibri" pitchFamily="34" charset="0"/>
+                <a:ea typeface="Calibri" pitchFamily="34" charset="-122"/>
+                <a:cs typeface="Calibri" pitchFamily="34" charset="-120"/>
+              </a:rPr>
+              <a:t>at ~$10K MRR</a:t>
+            </a:r>
+            <a:endParaRPr lang="en-US" sz="950" dirty="0"/>
+          </a:p>
+        </p:txBody>
+      </p:sp>
+      <p:sp>
+        <p:nvSpPr>
+          <p:cNvPr id="82" name="Text 80"/>
           <p:cNvSpPr txBox="1"/>
           <p:nvPr/>
         </p:nvSpPr>
@@ -19212,7 +19540,7 @@
                 <a:ea typeface="Calibri" pitchFamily="34" charset="-122"/>
                 <a:cs typeface="Calibri" pitchFamily="34" charset="-120"/>
               </a:rPr>
-              <a:t>Only sensitive actions are metered: one prevented ₹1,000 wrong refund pays for 2,000+ guarded actions.</a:t>
+              <a:t>Only sensitive actions are metered: one prevented ₹1,000 wrong refund pays for 2,000+ guarded actions (~2.3× customer ROI, slide 10).</a:t>
             </a:r>
             <a:endParaRPr lang="en-US" sz="1000" dirty="0"/>
           </a:p>

--- a/docs/presentation/CodemixSkill-Final-10-Slides.pptx
+++ b/docs/presentation/CodemixSkill-Final-10-Slides.pptx
@@ -932,7 +932,7 @@
           <a:p>
             <a:r>
               <a:rPr lang="en-US" dirty="0"/>
-              <a:t/>
+              <a:t>ROI assumptions. Unit costs (Sep 2026 list prices, ₹85/$): VoBiz ₹0.45/min; Sarvam STT ₹30/hr; ElevenLabs Flash $0.05 per 1K chars (~1,500 agent chars per 3-min call); Claude checks ~2 per call, Haiku 4.5 ($1/$5 per M tokens) for routine and Sonnet 5 ($2/$10) for ~20% ambiguous cases, ~2K in / 300 out tokens each; hosting + storage ~$0.005. Voice call cost ~₹10.4 per 3 min (~₹3.5/min) vs ₹8/min price (~56% margin). Plug-in cost ~₹1.1 per guarded action vs $0.03 (₹2.55) price (~55% margin). Dodo Payments fees (4% + $0.15 per INR transaction, $1 per refund) and Freshdesk plans are paid by the customer on their own accounts. Year 1: plug-in ramps to 50 customers (avg 25) at 20K guarded actions/month = $180K; voice ramps to 10 brands (avg 5) at 30K minutes/month = $169K; total $349K revenue, ~$195K gross profit; cumulative gross profit passes the $90K build around month 8. Customer ROI: brand with 20K guarded actions pays $600 (₹51K)/month; if 2% of requests contain a negation and 48% of those misfire (our measured rate), ~192 wrong ₹1,000 actions are prevented = ₹1.92L/month, ~3.8x; break-even at 51 prevented actions = 0.26%.</a:t>
             </a:r>
             <a:endParaRPr lang="en-US" dirty="0"/>
           </a:p>
@@ -3126,7 +3126,7 @@
                 <a:ea typeface="Calibri" pitchFamily="34" charset="-122"/>
                 <a:cs typeface="Calibri" pitchFamily="34" charset="-120"/>
               </a:rPr>
-              <a:t>What it costs, what it returns, how we measure it, and what could go wrong</a:t>
+              <a:t>What it costs to build and run, what it returns, how we measure it, and what could go wrong</a:t>
             </a:r>
             <a:endParaRPr lang="en-US" sz="1350" dirty="0"/>
           </a:p>
@@ -3246,7 +3246,7 @@
                 <a:ea typeface="Cambria" pitchFamily="34" charset="-122"/>
                 <a:cs typeface="Cambria" pitchFamily="34" charset="-120"/>
               </a:rPr>
-              <a:t>Costs &amp; Resources</a:t>
+              <a:t>Costs &amp; Unit Economics</a:t>
             </a:r>
             <a:endParaRPr lang="en-US" sz="1400" dirty="0"/>
           </a:p>
@@ -3260,8 +3260,8 @@
         </p:nvSpPr>
         <p:spPr>
           <a:xfrm>
-            <a:off x="731520" y="2103120"/>
-            <a:ext cx="1828800" cy="502920"/>
+            <a:off x="731520" y="2084832"/>
+            <a:ext cx="1600200" cy="457200"/>
           </a:xfrm>
           <a:prstGeom prst="rect">
             <a:avLst/>
@@ -3277,7 +3277,7 @@
               <a:buNone/>
             </a:pPr>
             <a:r>
-              <a:rPr lang="en-US" sz="2600" b="1" dirty="0">
+              <a:rPr lang="en-US" sz="2400" b="1" dirty="0">
                 <a:solidFill>
                   <a:srgbClr val="14213D"/>
                 </a:solidFill>
@@ -3287,7 +3287,7 @@
               </a:rPr>
               <a:t>~$90K</a:t>
             </a:r>
-            <a:endParaRPr lang="en-US" sz="2600" dirty="0"/>
+            <a:endParaRPr lang="en-US" sz="2400" dirty="0"/>
           </a:p>
         </p:txBody>
       </p:sp>
@@ -3299,8 +3299,8 @@
         </p:nvSpPr>
         <p:spPr>
           <a:xfrm>
-            <a:off x="2377440" y="2103120"/>
-            <a:ext cx="1737360" cy="502920"/>
+            <a:off x="2286000" y="2084832"/>
+            <a:ext cx="1828800" cy="457200"/>
           </a:xfrm>
           <a:prstGeom prst="rect">
             <a:avLst/>
@@ -3316,7 +3316,7 @@
               <a:buNone/>
             </a:pPr>
             <a:r>
-              <a:rPr lang="en-US" sz="1050" dirty="0">
+              <a:rPr lang="en-US" sz="850" dirty="0">
                 <a:solidFill>
                   <a:srgbClr val="5B6475"/>
                 </a:solidFill>
@@ -3324,9 +3324,9 @@
                 <a:ea typeface="Calibri" pitchFamily="34" charset="-122"/>
                 <a:cs typeface="Calibri" pitchFamily="34" charset="-120"/>
               </a:rPr>
-              <a:t>3-month MVP (estimate)</a:t>
-            </a:r>
-            <a:endParaRPr lang="en-US" sz="1050" dirty="0"/>
+              <a:t>3-month MVP build: M1 data · M2 gate + voice · M3 Freshdesk + pilot</a:t>
+            </a:r>
+            <a:endParaRPr lang="en-US" sz="850" dirty="0"/>
           </a:p>
         </p:txBody>
       </p:sp>
@@ -3338,8 +3338,8 @@
         </p:nvSpPr>
         <p:spPr>
           <a:xfrm>
-            <a:off x="731520" y="2697480"/>
-            <a:ext cx="1508760" cy="274320"/>
+            <a:off x="731520" y="2542032"/>
+            <a:ext cx="3337560" cy="329184"/>
           </a:xfrm>
           <a:prstGeom prst="rect">
             <a:avLst/>
@@ -3355,7 +3355,7 @@
               <a:buNone/>
             </a:pPr>
             <a:r>
-              <a:rPr lang="en-US" sz="1050" dirty="0">
+              <a:rPr lang="en-US" sz="850" dirty="0">
                 <a:solidFill>
                   <a:srgbClr val="1F2937"/>
                 </a:solidFill>
@@ -3363,34 +3363,71 @@
                 <a:ea typeface="Calibri" pitchFamily="34" charset="-122"/>
                 <a:cs typeface="Calibri" pitchFamily="34" charset="-120"/>
               </a:rPr>
-              <a:t>3 engineers</a:t>
-            </a:r>
-            <a:endParaRPr lang="en-US" sz="1050" dirty="0"/>
-          </a:p>
-        </p:txBody>
-      </p:sp>
-      <p:sp>
-        <p:nvSpPr>
-          <p:cNvPr id="13" name="Shape 11"/>
+              <a:t>Engineers $60K · linguist $10K · PM $8K · APIs $7K · buffer $5K</a:t>
+            </a:r>
+            <a:endParaRPr lang="en-US" sz="850" dirty="0"/>
+          </a:p>
+        </p:txBody>
+      </p:sp>
+      <p:sp>
+        <p:nvSpPr>
+          <p:cNvPr id="13" name="Text 11"/>
+          <p:cNvSpPr txBox="1"/>
+          <p:nvPr/>
+        </p:nvSpPr>
+        <p:spPr>
+          <a:xfrm>
+            <a:off x="731520" y="2907792"/>
+            <a:ext cx="3291840" cy="228600"/>
+          </a:xfrm>
+          <a:prstGeom prst="rect">
+            <a:avLst/>
+          </a:prstGeom>
+          <a:noFill/>
+          <a:ln/>
+        </p:spPr>
+        <p:txBody>
+          <a:bodyPr wrap="square" lIns="0" tIns="0" rIns="0" bIns="0" rtlCol="0" anchor="t"/>
+          <a:lstStyle/>
+          <a:p>
+            <a:pPr indent="0" marL="0">
+              <a:buNone/>
+            </a:pPr>
+            <a:r>
+              <a:rPr lang="en-US" sz="900" b="1" spc="100" kern="0" dirty="0">
+                <a:solidFill>
+                  <a:srgbClr val="F4A300"/>
+                </a:solidFill>
+                <a:latin typeface="Calibri" pitchFamily="34" charset="0"/>
+                <a:ea typeface="Calibri" pitchFamily="34" charset="-122"/>
+                <a:cs typeface="Calibri" pitchFamily="34" charset="-120"/>
+              </a:rPr>
+              <a:t>RUN COST PER 3-MIN VOICE CALL</a:t>
+            </a:r>
+            <a:endParaRPr lang="en-US" sz="900" dirty="0"/>
+          </a:p>
+        </p:txBody>
+      </p:sp>
+      <p:sp>
+        <p:nvSpPr>
+          <p:cNvPr id="14" name="Shape 12"/>
           <p:cNvSpPr/>
           <p:nvPr/>
         </p:nvSpPr>
         <p:spPr>
           <a:xfrm>
-            <a:off x="2240280" y="2743200"/>
-            <a:ext cx="1234440" cy="182880"/>
-          </a:xfrm>
-          <a:prstGeom prst="roundRect">
-            <a:avLst>
-              <a:gd name="adj" fmla="val 25000"/>
-            </a:avLst>
+            <a:off x="658368" y="3145536"/>
+            <a:ext cx="3383280" cy="228600"/>
+          </a:xfrm>
+          <a:prstGeom prst="rect">
+            <a:avLst/>
           </a:prstGeom>
           <a:solidFill>
-            <a:srgbClr val="14213D"/>
+            <a:srgbClr val="F4F6F9"/>
           </a:solidFill>
           <a:ln w="12700">
             <a:solidFill>
-              <a:srgbClr val="14213D"/>
+              <a:srgbClr val="F4F6F9"/>
             </a:solidFill>
             <a:prstDash val="solid"/>
           </a:ln>
@@ -3398,14 +3435,14 @@
       </p:sp>
       <p:sp>
         <p:nvSpPr>
-          <p:cNvPr id="14" name="Text 12"/>
-          <p:cNvSpPr txBox="1"/>
-          <p:nvPr/>
-        </p:nvSpPr>
-        <p:spPr>
-          <a:xfrm>
-            <a:off x="3520440" y="2697480"/>
-            <a:ext cx="548640" cy="274320"/>
+          <p:cNvPr id="15" name="Text 13"/>
+          <p:cNvSpPr txBox="1"/>
+          <p:nvPr/>
+        </p:nvSpPr>
+        <p:spPr>
+          <a:xfrm>
+            <a:off x="731520" y="3145536"/>
+            <a:ext cx="2651760" cy="228600"/>
           </a:xfrm>
           <a:prstGeom prst="rect">
             <a:avLst/>
@@ -3421,7 +3458,46 @@
               <a:buNone/>
             </a:pPr>
             <a:r>
-              <a:rPr lang="en-US" sz="1000" b="1" dirty="0">
+              <a:rPr lang="en-US" sz="900" dirty="0">
+                <a:solidFill>
+                  <a:srgbClr val="1F2937"/>
+                </a:solidFill>
+                <a:latin typeface="Calibri" pitchFamily="34" charset="0"/>
+                <a:ea typeface="Calibri" pitchFamily="34" charset="-122"/>
+                <a:cs typeface="Calibri" pitchFamily="34" charset="-120"/>
+              </a:rPr>
+              <a:t>VoBiz telephony (₹0.45/min)</a:t>
+            </a:r>
+            <a:endParaRPr lang="en-US" sz="900" dirty="0"/>
+          </a:p>
+        </p:txBody>
+      </p:sp>
+      <p:sp>
+        <p:nvSpPr>
+          <p:cNvPr id="16" name="Text 14"/>
+          <p:cNvSpPr txBox="1"/>
+          <p:nvPr/>
+        </p:nvSpPr>
+        <p:spPr>
+          <a:xfrm>
+            <a:off x="3337560" y="3145536"/>
+            <a:ext cx="658368" cy="228600"/>
+          </a:xfrm>
+          <a:prstGeom prst="rect">
+            <a:avLst/>
+          </a:prstGeom>
+          <a:noFill/>
+          <a:ln/>
+        </p:spPr>
+        <p:txBody>
+          <a:bodyPr wrap="square" lIns="0" tIns="0" rIns="0" bIns="0" rtlCol="0" anchor="ctr"/>
+          <a:lstStyle/>
+          <a:p>
+            <a:pPr algn="r" indent="0" marL="0">
+              <a:buNone/>
+            </a:pPr>
+            <a:r>
+              <a:rPr lang="en-US" sz="900" b="1" dirty="0">
                 <a:solidFill>
                   <a:srgbClr val="14213D"/>
                 </a:solidFill>
@@ -3429,73 +3505,32 @@
                 <a:ea typeface="Calibri" pitchFamily="34" charset="-122"/>
                 <a:cs typeface="Calibri" pitchFamily="34" charset="-120"/>
               </a:rPr>
-              <a:t>$60K</a:t>
-            </a:r>
-            <a:endParaRPr lang="en-US" sz="1000" dirty="0"/>
-          </a:p>
-        </p:txBody>
-      </p:sp>
-      <p:sp>
-        <p:nvSpPr>
-          <p:cNvPr id="15" name="Text 13"/>
-          <p:cNvSpPr txBox="1"/>
-          <p:nvPr/>
-        </p:nvSpPr>
-        <p:spPr>
-          <a:xfrm>
-            <a:off x="731520" y="3026664"/>
-            <a:ext cx="1508760" cy="274320"/>
-          </a:xfrm>
-          <a:prstGeom prst="rect">
-            <a:avLst/>
-          </a:prstGeom>
-          <a:noFill/>
-          <a:ln/>
-        </p:spPr>
-        <p:txBody>
-          <a:bodyPr wrap="square" lIns="0" tIns="0" rIns="0" bIns="0" rtlCol="0" anchor="ctr"/>
-          <a:lstStyle/>
-          <a:p>
-            <a:pPr indent="0" marL="0">
-              <a:buNone/>
-            </a:pPr>
-            <a:r>
-              <a:rPr lang="en-US" sz="1050" dirty="0">
-                <a:solidFill>
-                  <a:srgbClr val="1F2937"/>
-                </a:solidFill>
-                <a:latin typeface="Calibri" pitchFamily="34" charset="0"/>
-                <a:ea typeface="Calibri" pitchFamily="34" charset="-122"/>
-                <a:cs typeface="Calibri" pitchFamily="34" charset="-120"/>
-              </a:rPr>
-              <a:t>Linguist + labelling</a:t>
-            </a:r>
-            <a:endParaRPr lang="en-US" sz="1050" dirty="0"/>
-          </a:p>
-        </p:txBody>
-      </p:sp>
-      <p:sp>
-        <p:nvSpPr>
-          <p:cNvPr id="16" name="Shape 14"/>
+              <a:t>₹1.35</a:t>
+            </a:r>
+            <a:endParaRPr lang="en-US" sz="900" dirty="0"/>
+          </a:p>
+        </p:txBody>
+      </p:sp>
+      <p:sp>
+        <p:nvSpPr>
+          <p:cNvPr id="17" name="Shape 15"/>
           <p:cNvSpPr/>
           <p:nvPr/>
         </p:nvSpPr>
         <p:spPr>
           <a:xfrm>
-            <a:off x="2240280" y="3072384"/>
-            <a:ext cx="205740" cy="182880"/>
-          </a:xfrm>
-          <a:prstGeom prst="roundRect">
-            <a:avLst>
-              <a:gd name="adj" fmla="val 25000"/>
-            </a:avLst>
+            <a:off x="658368" y="3383280"/>
+            <a:ext cx="3383280" cy="228600"/>
+          </a:xfrm>
+          <a:prstGeom prst="rect">
+            <a:avLst/>
           </a:prstGeom>
           <a:solidFill>
-            <a:srgbClr val="2A5C8A"/>
+            <a:srgbClr val="FFFFFF"/>
           </a:solidFill>
           <a:ln w="12700">
             <a:solidFill>
-              <a:srgbClr val="2A5C8A"/>
+              <a:srgbClr val="FFFFFF"/>
             </a:solidFill>
             <a:prstDash val="solid"/>
           </a:ln>
@@ -3503,14 +3538,14 @@
       </p:sp>
       <p:sp>
         <p:nvSpPr>
-          <p:cNvPr id="17" name="Text 15"/>
-          <p:cNvSpPr txBox="1"/>
-          <p:nvPr/>
-        </p:nvSpPr>
-        <p:spPr>
-          <a:xfrm>
-            <a:off x="2491740" y="3026664"/>
-            <a:ext cx="548640" cy="274320"/>
+          <p:cNvPr id="18" name="Text 16"/>
+          <p:cNvSpPr txBox="1"/>
+          <p:nvPr/>
+        </p:nvSpPr>
+        <p:spPr>
+          <a:xfrm>
+            <a:off x="731520" y="3383280"/>
+            <a:ext cx="2651760" cy="228600"/>
           </a:xfrm>
           <a:prstGeom prst="rect">
             <a:avLst/>
@@ -3526,7 +3561,46 @@
               <a:buNone/>
             </a:pPr>
             <a:r>
-              <a:rPr lang="en-US" sz="1000" b="1" dirty="0">
+              <a:rPr lang="en-US" sz="900" dirty="0">
+                <a:solidFill>
+                  <a:srgbClr val="1F2937"/>
+                </a:solidFill>
+                <a:latin typeface="Calibri" pitchFamily="34" charset="0"/>
+                <a:ea typeface="Calibri" pitchFamily="34" charset="-122"/>
+                <a:cs typeface="Calibri" pitchFamily="34" charset="-120"/>
+              </a:rPr>
+              <a:t>Sarvam STT (₹30/hr)</a:t>
+            </a:r>
+            <a:endParaRPr lang="en-US" sz="900" dirty="0"/>
+          </a:p>
+        </p:txBody>
+      </p:sp>
+      <p:sp>
+        <p:nvSpPr>
+          <p:cNvPr id="19" name="Text 17"/>
+          <p:cNvSpPr txBox="1"/>
+          <p:nvPr/>
+        </p:nvSpPr>
+        <p:spPr>
+          <a:xfrm>
+            <a:off x="3337560" y="3383280"/>
+            <a:ext cx="658368" cy="228600"/>
+          </a:xfrm>
+          <a:prstGeom prst="rect">
+            <a:avLst/>
+          </a:prstGeom>
+          <a:noFill/>
+          <a:ln/>
+        </p:spPr>
+        <p:txBody>
+          <a:bodyPr wrap="square" lIns="0" tIns="0" rIns="0" bIns="0" rtlCol="0" anchor="ctr"/>
+          <a:lstStyle/>
+          <a:p>
+            <a:pPr algn="r" indent="0" marL="0">
+              <a:buNone/>
+            </a:pPr>
+            <a:r>
+              <a:rPr lang="en-US" sz="900" b="1" dirty="0">
                 <a:solidFill>
                   <a:srgbClr val="14213D"/>
                 </a:solidFill>
@@ -3534,73 +3608,32 @@
                 <a:ea typeface="Calibri" pitchFamily="34" charset="-122"/>
                 <a:cs typeface="Calibri" pitchFamily="34" charset="-120"/>
               </a:rPr>
-              <a:t>$10K</a:t>
-            </a:r>
-            <a:endParaRPr lang="en-US" sz="1000" dirty="0"/>
-          </a:p>
-        </p:txBody>
-      </p:sp>
-      <p:sp>
-        <p:nvSpPr>
-          <p:cNvPr id="18" name="Text 16"/>
-          <p:cNvSpPr txBox="1"/>
-          <p:nvPr/>
-        </p:nvSpPr>
-        <p:spPr>
-          <a:xfrm>
-            <a:off x="731520" y="3355848"/>
-            <a:ext cx="1508760" cy="274320"/>
-          </a:xfrm>
-          <a:prstGeom prst="rect">
-            <a:avLst/>
-          </a:prstGeom>
-          <a:noFill/>
-          <a:ln/>
-        </p:spPr>
-        <p:txBody>
-          <a:bodyPr wrap="square" lIns="0" tIns="0" rIns="0" bIns="0" rtlCol="0" anchor="ctr"/>
-          <a:lstStyle/>
-          <a:p>
-            <a:pPr indent="0" marL="0">
-              <a:buNone/>
-            </a:pPr>
-            <a:r>
-              <a:rPr lang="en-US" sz="1050" dirty="0">
-                <a:solidFill>
-                  <a:srgbClr val="1F2937"/>
-                </a:solidFill>
-                <a:latin typeface="Calibri" pitchFamily="34" charset="0"/>
-                <a:ea typeface="Calibri" pitchFamily="34" charset="-122"/>
-                <a:cs typeface="Calibri" pitchFamily="34" charset="-120"/>
-              </a:rPr>
-              <a:t>Part-time PM</a:t>
-            </a:r>
-            <a:endParaRPr lang="en-US" sz="1050" dirty="0"/>
-          </a:p>
-        </p:txBody>
-      </p:sp>
-      <p:sp>
-        <p:nvSpPr>
-          <p:cNvPr id="19" name="Shape 17"/>
+              <a:t>₹1.50</a:t>
+            </a:r>
+            <a:endParaRPr lang="en-US" sz="900" dirty="0"/>
+          </a:p>
+        </p:txBody>
+      </p:sp>
+      <p:sp>
+        <p:nvSpPr>
+          <p:cNvPr id="20" name="Shape 18"/>
           <p:cNvSpPr/>
           <p:nvPr/>
         </p:nvSpPr>
         <p:spPr>
           <a:xfrm>
-            <a:off x="2240280" y="3401568"/>
-            <a:ext cx="164592" cy="182880"/>
-          </a:xfrm>
-          <a:prstGeom prst="roundRect">
-            <a:avLst>
-              <a:gd name="adj" fmla="val 27778"/>
-            </a:avLst>
+            <a:off x="658368" y="3621024"/>
+            <a:ext cx="3383280" cy="228600"/>
+          </a:xfrm>
+          <a:prstGeom prst="rect">
+            <a:avLst/>
           </a:prstGeom>
           <a:solidFill>
-            <a:srgbClr val="2A5C8A"/>
+            <a:srgbClr val="F4F6F9"/>
           </a:solidFill>
           <a:ln w="12700">
             <a:solidFill>
-              <a:srgbClr val="2A5C8A"/>
+              <a:srgbClr val="F4F6F9"/>
             </a:solidFill>
             <a:prstDash val="solid"/>
           </a:ln>
@@ -3608,14 +3641,14 @@
       </p:sp>
       <p:sp>
         <p:nvSpPr>
-          <p:cNvPr id="20" name="Text 18"/>
-          <p:cNvSpPr txBox="1"/>
-          <p:nvPr/>
-        </p:nvSpPr>
-        <p:spPr>
-          <a:xfrm>
-            <a:off x="2450592" y="3355848"/>
-            <a:ext cx="548640" cy="274320"/>
+          <p:cNvPr id="21" name="Text 19"/>
+          <p:cNvSpPr txBox="1"/>
+          <p:nvPr/>
+        </p:nvSpPr>
+        <p:spPr>
+          <a:xfrm>
+            <a:off x="731520" y="3621024"/>
+            <a:ext cx="2651760" cy="228600"/>
           </a:xfrm>
           <a:prstGeom prst="rect">
             <a:avLst/>
@@ -3631,7 +3664,46 @@
               <a:buNone/>
             </a:pPr>
             <a:r>
-              <a:rPr lang="en-US" sz="1000" b="1" dirty="0">
+              <a:rPr lang="en-US" sz="900" dirty="0">
+                <a:solidFill>
+                  <a:srgbClr val="1F2937"/>
+                </a:solidFill>
+                <a:latin typeface="Calibri" pitchFamily="34" charset="0"/>
+                <a:ea typeface="Calibri" pitchFamily="34" charset="-122"/>
+                <a:cs typeface="Calibri" pitchFamily="34" charset="-120"/>
+              </a:rPr>
+              <a:t>ElevenLabs Flash ($0.05/1K chars)</a:t>
+            </a:r>
+            <a:endParaRPr lang="en-US" sz="900" dirty="0"/>
+          </a:p>
+        </p:txBody>
+      </p:sp>
+      <p:sp>
+        <p:nvSpPr>
+          <p:cNvPr id="22" name="Text 20"/>
+          <p:cNvSpPr txBox="1"/>
+          <p:nvPr/>
+        </p:nvSpPr>
+        <p:spPr>
+          <a:xfrm>
+            <a:off x="3337560" y="3621024"/>
+            <a:ext cx="658368" cy="228600"/>
+          </a:xfrm>
+          <a:prstGeom prst="rect">
+            <a:avLst/>
+          </a:prstGeom>
+          <a:noFill/>
+          <a:ln/>
+        </p:spPr>
+        <p:txBody>
+          <a:bodyPr wrap="square" lIns="0" tIns="0" rIns="0" bIns="0" rtlCol="0" anchor="ctr"/>
+          <a:lstStyle/>
+          <a:p>
+            <a:pPr algn="r" indent="0" marL="0">
+              <a:buNone/>
+            </a:pPr>
+            <a:r>
+              <a:rPr lang="en-US" sz="900" b="1" dirty="0">
                 <a:solidFill>
                   <a:srgbClr val="14213D"/>
                 </a:solidFill>
@@ -3639,73 +3711,32 @@
                 <a:ea typeface="Calibri" pitchFamily="34" charset="-122"/>
                 <a:cs typeface="Calibri" pitchFamily="34" charset="-120"/>
               </a:rPr>
-              <a:t>$8K</a:t>
-            </a:r>
-            <a:endParaRPr lang="en-US" sz="1000" dirty="0"/>
-          </a:p>
-        </p:txBody>
-      </p:sp>
-      <p:sp>
-        <p:nvSpPr>
-          <p:cNvPr id="21" name="Text 19"/>
-          <p:cNvSpPr txBox="1"/>
-          <p:nvPr/>
-        </p:nvSpPr>
-        <p:spPr>
-          <a:xfrm>
-            <a:off x="731520" y="3685032"/>
-            <a:ext cx="1508760" cy="274320"/>
-          </a:xfrm>
-          <a:prstGeom prst="rect">
-            <a:avLst/>
-          </a:prstGeom>
-          <a:noFill/>
-          <a:ln/>
-        </p:spPr>
-        <p:txBody>
-          <a:bodyPr wrap="square" lIns="0" tIns="0" rIns="0" bIns="0" rtlCol="0" anchor="ctr"/>
-          <a:lstStyle/>
-          <a:p>
-            <a:pPr indent="0" marL="0">
-              <a:buNone/>
-            </a:pPr>
-            <a:r>
-              <a:rPr lang="en-US" sz="1050" dirty="0">
-                <a:solidFill>
-                  <a:srgbClr val="1F2937"/>
-                </a:solidFill>
-                <a:latin typeface="Calibri" pitchFamily="34" charset="0"/>
-                <a:ea typeface="Calibri" pitchFamily="34" charset="-122"/>
-                <a:cs typeface="Calibri" pitchFamily="34" charset="-120"/>
-              </a:rPr>
-              <a:t>APIs + telephony</a:t>
-            </a:r>
-            <a:endParaRPr lang="en-US" sz="1050" dirty="0"/>
-          </a:p>
-        </p:txBody>
-      </p:sp>
-      <p:sp>
-        <p:nvSpPr>
-          <p:cNvPr id="22" name="Shape 20"/>
+              <a:t>₹6.40</a:t>
+            </a:r>
+            <a:endParaRPr lang="en-US" sz="900" dirty="0"/>
+          </a:p>
+        </p:txBody>
+      </p:sp>
+      <p:sp>
+        <p:nvSpPr>
+          <p:cNvPr id="23" name="Shape 21"/>
           <p:cNvSpPr/>
           <p:nvPr/>
         </p:nvSpPr>
         <p:spPr>
           <a:xfrm>
-            <a:off x="2240280" y="3730752"/>
-            <a:ext cx="144018" cy="182880"/>
-          </a:xfrm>
-          <a:prstGeom prst="roundRect">
-            <a:avLst>
-              <a:gd name="adj" fmla="val 31746"/>
-            </a:avLst>
+            <a:off x="658368" y="3858768"/>
+            <a:ext cx="3383280" cy="228600"/>
+          </a:xfrm>
+          <a:prstGeom prst="rect">
+            <a:avLst/>
           </a:prstGeom>
           <a:solidFill>
-            <a:srgbClr val="2A5C8A"/>
+            <a:srgbClr val="FFFFFF"/>
           </a:solidFill>
           <a:ln w="12700">
             <a:solidFill>
-              <a:srgbClr val="2A5C8A"/>
+              <a:srgbClr val="FFFFFF"/>
             </a:solidFill>
             <a:prstDash val="solid"/>
           </a:ln>
@@ -3713,14 +3744,14 @@
       </p:sp>
       <p:sp>
         <p:nvSpPr>
-          <p:cNvPr id="23" name="Text 21"/>
-          <p:cNvSpPr txBox="1"/>
-          <p:nvPr/>
-        </p:nvSpPr>
-        <p:spPr>
-          <a:xfrm>
-            <a:off x="2430018" y="3685032"/>
-            <a:ext cx="548640" cy="274320"/>
+          <p:cNvPr id="24" name="Text 22"/>
+          <p:cNvSpPr txBox="1"/>
+          <p:nvPr/>
+        </p:nvSpPr>
+        <p:spPr>
+          <a:xfrm>
+            <a:off x="731520" y="3858768"/>
+            <a:ext cx="2651760" cy="228600"/>
           </a:xfrm>
           <a:prstGeom prst="rect">
             <a:avLst/>
@@ -3736,7 +3767,46 @@
               <a:buNone/>
             </a:pPr>
             <a:r>
-              <a:rPr lang="en-US" sz="1000" b="1" dirty="0">
+              <a:rPr lang="en-US" sz="900" dirty="0">
+                <a:solidFill>
+                  <a:srgbClr val="1F2937"/>
+                </a:solidFill>
+                <a:latin typeface="Calibri" pitchFamily="34" charset="0"/>
+                <a:ea typeface="Calibri" pitchFamily="34" charset="-122"/>
+                <a:cs typeface="Calibri" pitchFamily="34" charset="-120"/>
+              </a:rPr>
+              <a:t>Claude checks (Haiku 4.5 / Sonnet 5)</a:t>
+            </a:r>
+            <a:endParaRPr lang="en-US" sz="900" dirty="0"/>
+          </a:p>
+        </p:txBody>
+      </p:sp>
+      <p:sp>
+        <p:nvSpPr>
+          <p:cNvPr id="25" name="Text 23"/>
+          <p:cNvSpPr txBox="1"/>
+          <p:nvPr/>
+        </p:nvSpPr>
+        <p:spPr>
+          <a:xfrm>
+            <a:off x="3337560" y="3858768"/>
+            <a:ext cx="658368" cy="228600"/>
+          </a:xfrm>
+          <a:prstGeom prst="rect">
+            <a:avLst/>
+          </a:prstGeom>
+          <a:noFill/>
+          <a:ln/>
+        </p:spPr>
+        <p:txBody>
+          <a:bodyPr wrap="square" lIns="0" tIns="0" rIns="0" bIns="0" rtlCol="0" anchor="ctr"/>
+          <a:lstStyle/>
+          <a:p>
+            <a:pPr algn="r" indent="0" marL="0">
+              <a:buNone/>
+            </a:pPr>
+            <a:r>
+              <a:rPr lang="en-US" sz="900" b="1" dirty="0">
                 <a:solidFill>
                   <a:srgbClr val="14213D"/>
                 </a:solidFill>
@@ -3744,73 +3814,32 @@
                 <a:ea typeface="Calibri" pitchFamily="34" charset="-122"/>
                 <a:cs typeface="Calibri" pitchFamily="34" charset="-120"/>
               </a:rPr>
-              <a:t>$7K</a:t>
-            </a:r>
-            <a:endParaRPr lang="en-US" sz="1000" dirty="0"/>
-          </a:p>
-        </p:txBody>
-      </p:sp>
-      <p:sp>
-        <p:nvSpPr>
-          <p:cNvPr id="24" name="Text 22"/>
-          <p:cNvSpPr txBox="1"/>
-          <p:nvPr/>
-        </p:nvSpPr>
-        <p:spPr>
-          <a:xfrm>
-            <a:off x="731520" y="4014216"/>
-            <a:ext cx="1508760" cy="274320"/>
-          </a:xfrm>
-          <a:prstGeom prst="rect">
-            <a:avLst/>
-          </a:prstGeom>
-          <a:noFill/>
-          <a:ln/>
-        </p:spPr>
-        <p:txBody>
-          <a:bodyPr wrap="square" lIns="0" tIns="0" rIns="0" bIns="0" rtlCol="0" anchor="ctr"/>
-          <a:lstStyle/>
-          <a:p>
-            <a:pPr indent="0" marL="0">
-              <a:buNone/>
-            </a:pPr>
-            <a:r>
-              <a:rPr lang="en-US" sz="1050" dirty="0">
-                <a:solidFill>
-                  <a:srgbClr val="1F2937"/>
-                </a:solidFill>
-                <a:latin typeface="Calibri" pitchFamily="34" charset="0"/>
-                <a:ea typeface="Calibri" pitchFamily="34" charset="-122"/>
-                <a:cs typeface="Calibri" pitchFamily="34" charset="-120"/>
-              </a:rPr>
-              <a:t>Contingency</a:t>
-            </a:r>
-            <a:endParaRPr lang="en-US" sz="1050" dirty="0"/>
-          </a:p>
-        </p:txBody>
-      </p:sp>
-      <p:sp>
-        <p:nvSpPr>
-          <p:cNvPr id="25" name="Shape 23"/>
+              <a:t>₹0.71</a:t>
+            </a:r>
+            <a:endParaRPr lang="en-US" sz="900" dirty="0"/>
+          </a:p>
+        </p:txBody>
+      </p:sp>
+      <p:sp>
+        <p:nvSpPr>
+          <p:cNvPr id="26" name="Shape 24"/>
           <p:cNvSpPr/>
           <p:nvPr/>
         </p:nvSpPr>
         <p:spPr>
           <a:xfrm>
-            <a:off x="2240280" y="4059936"/>
-            <a:ext cx="102870" cy="182880"/>
-          </a:xfrm>
-          <a:prstGeom prst="roundRect">
-            <a:avLst>
-              <a:gd name="adj" fmla="val 44444"/>
-            </a:avLst>
+            <a:off x="658368" y="4096512"/>
+            <a:ext cx="3383280" cy="228600"/>
+          </a:xfrm>
+          <a:prstGeom prst="rect">
+            <a:avLst/>
           </a:prstGeom>
           <a:solidFill>
-            <a:srgbClr val="2A5C8A"/>
+            <a:srgbClr val="F4F6F9"/>
           </a:solidFill>
           <a:ln w="12700">
             <a:solidFill>
-              <a:srgbClr val="2A5C8A"/>
+              <a:srgbClr val="F4F6F9"/>
             </a:solidFill>
             <a:prstDash val="solid"/>
           </a:ln>
@@ -3818,14 +3847,14 @@
       </p:sp>
       <p:sp>
         <p:nvSpPr>
-          <p:cNvPr id="26" name="Text 24"/>
-          <p:cNvSpPr txBox="1"/>
-          <p:nvPr/>
-        </p:nvSpPr>
-        <p:spPr>
-          <a:xfrm>
-            <a:off x="2388870" y="4014216"/>
-            <a:ext cx="548640" cy="274320"/>
+          <p:cNvPr id="27" name="Text 25"/>
+          <p:cNvSpPr txBox="1"/>
+          <p:nvPr/>
+        </p:nvSpPr>
+        <p:spPr>
+          <a:xfrm>
+            <a:off x="731520" y="4096512"/>
+            <a:ext cx="2651760" cy="228600"/>
           </a:xfrm>
           <a:prstGeom prst="rect">
             <a:avLst/>
@@ -3841,7 +3870,46 @@
               <a:buNone/>
             </a:pPr>
             <a:r>
-              <a:rPr lang="en-US" sz="1000" b="1" dirty="0">
+              <a:rPr lang="en-US" sz="900" dirty="0">
+                <a:solidFill>
+                  <a:srgbClr val="1F2937"/>
+                </a:solidFill>
+                <a:latin typeface="Calibri" pitchFamily="34" charset="0"/>
+                <a:ea typeface="Calibri" pitchFamily="34" charset="-122"/>
+                <a:cs typeface="Calibri" pitchFamily="34" charset="-120"/>
+              </a:rPr>
+              <a:t>Hosting + transcript storage</a:t>
+            </a:r>
+            <a:endParaRPr lang="en-US" sz="900" dirty="0"/>
+          </a:p>
+        </p:txBody>
+      </p:sp>
+      <p:sp>
+        <p:nvSpPr>
+          <p:cNvPr id="28" name="Text 26"/>
+          <p:cNvSpPr txBox="1"/>
+          <p:nvPr/>
+        </p:nvSpPr>
+        <p:spPr>
+          <a:xfrm>
+            <a:off x="3337560" y="4096512"/>
+            <a:ext cx="658368" cy="228600"/>
+          </a:xfrm>
+          <a:prstGeom prst="rect">
+            <a:avLst/>
+          </a:prstGeom>
+          <a:noFill/>
+          <a:ln/>
+        </p:spPr>
+        <p:txBody>
+          <a:bodyPr wrap="square" lIns="0" tIns="0" rIns="0" bIns="0" rtlCol="0" anchor="ctr"/>
+          <a:lstStyle/>
+          <a:p>
+            <a:pPr algn="r" indent="0" marL="0">
+              <a:buNone/>
+            </a:pPr>
+            <a:r>
+              <a:rPr lang="en-US" sz="900" b="1" dirty="0">
                 <a:solidFill>
                   <a:srgbClr val="14213D"/>
                 </a:solidFill>
@@ -3849,22 +3917,125 @@
                 <a:ea typeface="Calibri" pitchFamily="34" charset="-122"/>
                 <a:cs typeface="Calibri" pitchFamily="34" charset="-120"/>
               </a:rPr>
-              <a:t>$5K</a:t>
-            </a:r>
-            <a:endParaRPr lang="en-US" sz="1000" dirty="0"/>
-          </a:p>
-        </p:txBody>
-      </p:sp>
-      <p:sp>
-        <p:nvSpPr>
-          <p:cNvPr id="27" name="Text 25"/>
-          <p:cNvSpPr txBox="1"/>
-          <p:nvPr/>
-        </p:nvSpPr>
-        <p:spPr>
-          <a:xfrm>
-            <a:off x="731520" y="4389120"/>
-            <a:ext cx="3337560" cy="548640"/>
+              <a:t>₹0.43</a:t>
+            </a:r>
+            <a:endParaRPr lang="en-US" sz="900" dirty="0"/>
+          </a:p>
+        </p:txBody>
+      </p:sp>
+      <p:sp>
+        <p:nvSpPr>
+          <p:cNvPr id="29" name="Shape 27"/>
+          <p:cNvSpPr/>
+          <p:nvPr/>
+        </p:nvSpPr>
+        <p:spPr>
+          <a:xfrm>
+            <a:off x="658368" y="4334256"/>
+            <a:ext cx="3383280" cy="228600"/>
+          </a:xfrm>
+          <a:prstGeom prst="rect">
+            <a:avLst/>
+          </a:prstGeom>
+          <a:solidFill>
+            <a:srgbClr val="E1F3EC"/>
+          </a:solidFill>
+          <a:ln w="12700">
+            <a:solidFill>
+              <a:srgbClr val="E1F3EC"/>
+            </a:solidFill>
+            <a:prstDash val="solid"/>
+          </a:ln>
+        </p:spPr>
+      </p:sp>
+      <p:sp>
+        <p:nvSpPr>
+          <p:cNvPr id="30" name="Text 28"/>
+          <p:cNvSpPr txBox="1"/>
+          <p:nvPr/>
+        </p:nvSpPr>
+        <p:spPr>
+          <a:xfrm>
+            <a:off x="731520" y="4334256"/>
+            <a:ext cx="2651760" cy="228600"/>
+          </a:xfrm>
+          <a:prstGeom prst="rect">
+            <a:avLst/>
+          </a:prstGeom>
+          <a:noFill/>
+          <a:ln/>
+        </p:spPr>
+        <p:txBody>
+          <a:bodyPr wrap="square" lIns="0" tIns="0" rIns="0" bIns="0" rtlCol="0" anchor="ctr"/>
+          <a:lstStyle/>
+          <a:p>
+            <a:pPr indent="0" marL="0">
+              <a:buNone/>
+            </a:pPr>
+            <a:r>
+              <a:rPr lang="en-US" sz="900" b="1" dirty="0">
+                <a:solidFill>
+                  <a:srgbClr val="1F8A63"/>
+                </a:solidFill>
+                <a:latin typeface="Calibri" pitchFamily="34" charset="0"/>
+                <a:ea typeface="Calibri" pitchFamily="34" charset="-122"/>
+                <a:cs typeface="Calibri" pitchFamily="34" charset="-120"/>
+              </a:rPr>
+              <a:t>Total ≈ ₹3.5/min vs ₹8 price</a:t>
+            </a:r>
+            <a:endParaRPr lang="en-US" sz="900" dirty="0"/>
+          </a:p>
+        </p:txBody>
+      </p:sp>
+      <p:sp>
+        <p:nvSpPr>
+          <p:cNvPr id="31" name="Text 29"/>
+          <p:cNvSpPr txBox="1"/>
+          <p:nvPr/>
+        </p:nvSpPr>
+        <p:spPr>
+          <a:xfrm>
+            <a:off x="3337560" y="4334256"/>
+            <a:ext cx="658368" cy="228600"/>
+          </a:xfrm>
+          <a:prstGeom prst="rect">
+            <a:avLst/>
+          </a:prstGeom>
+          <a:noFill/>
+          <a:ln/>
+        </p:spPr>
+        <p:txBody>
+          <a:bodyPr wrap="square" lIns="0" tIns="0" rIns="0" bIns="0" rtlCol="0" anchor="ctr"/>
+          <a:lstStyle/>
+          <a:p>
+            <a:pPr algn="r" indent="0" marL="0">
+              <a:buNone/>
+            </a:pPr>
+            <a:r>
+              <a:rPr lang="en-US" sz="900" b="1" dirty="0">
+                <a:solidFill>
+                  <a:srgbClr val="1F8A63"/>
+                </a:solidFill>
+                <a:latin typeface="Calibri" pitchFamily="34" charset="0"/>
+                <a:ea typeface="Calibri" pitchFamily="34" charset="-122"/>
+                <a:cs typeface="Calibri" pitchFamily="34" charset="-120"/>
+              </a:rPr>
+              <a:t>₹10.4</a:t>
+            </a:r>
+            <a:endParaRPr lang="en-US" sz="900" dirty="0"/>
+          </a:p>
+        </p:txBody>
+      </p:sp>
+      <p:sp>
+        <p:nvSpPr>
+          <p:cNvPr id="32" name="Text 30"/>
+          <p:cNvSpPr txBox="1"/>
+          <p:nvPr/>
+        </p:nvSpPr>
+        <p:spPr>
+          <a:xfrm>
+            <a:off x="731520" y="4617720"/>
+            <a:ext cx="3337560" cy="393192"/>
           </a:xfrm>
           <a:prstGeom prst="rect">
             <a:avLst/>
@@ -3880,37 +4051,23 @@
               <a:buNone/>
             </a:pPr>
             <a:r>
-              <a:rPr lang="en-US" sz="1000" b="1" dirty="0">
-                <a:solidFill>
-                  <a:srgbClr val="14213D"/>
-                </a:solidFill>
-                <a:latin typeface="Calibri" pitchFamily="34" charset="0"/>
-                <a:ea typeface="Calibri" pitchFamily="34" charset="-122"/>
-                <a:cs typeface="Calibri" pitchFamily="34" charset="-120"/>
-              </a:rPr>
-              <a:t>Timeline: </a:t>
-            </a:r>
-            <a:pPr indent="0" marL="0">
-              <a:buNone/>
-            </a:pPr>
-            <a:r>
-              <a:rPr lang="en-US" sz="1000" dirty="0">
-                <a:solidFill>
-                  <a:srgbClr val="1F2937"/>
-                </a:solidFill>
-                <a:latin typeface="Calibri" pitchFamily="34" charset="0"/>
-                <a:ea typeface="Calibri" pitchFamily="34" charset="-122"/>
-                <a:cs typeface="Calibri" pitchFamily="34" charset="-120"/>
-              </a:rPr>
-              <a:t>M1 negation data · M2 Claude gate, Dodo, voice path · M3 Freshdesk, audit, pilot</a:t>
-            </a:r>
-            <a:endParaRPr lang="en-US" sz="1000" dirty="0"/>
-          </a:p>
-        </p:txBody>
-      </p:sp>
-      <p:sp>
-        <p:nvSpPr>
-          <p:cNvPr id="28" name="Shape 26"/>
+              <a:rPr lang="en-US" sz="850" i="1" dirty="0">
+                <a:solidFill>
+                  <a:srgbClr val="5B6475"/>
+                </a:solidFill>
+                <a:latin typeface="Calibri" pitchFamily="34" charset="0"/>
+                <a:ea typeface="Calibri" pitchFamily="34" charset="-122"/>
+                <a:cs typeface="Calibri" pitchFamily="34" charset="-120"/>
+              </a:rPr>
+              <a:t>Plug-in only: ₹1.1 cost vs ₹2.55 price per action. Dodo and Freshdesk fees stay on the customer's own plans.</a:t>
+            </a:r>
+            <a:endParaRPr lang="en-US" sz="850" dirty="0"/>
+          </a:p>
+        </p:txBody>
+      </p:sp>
+      <p:sp>
+        <p:nvSpPr>
+          <p:cNvPr id="33" name="Shape 31"/>
           <p:cNvSpPr/>
           <p:nvPr/>
         </p:nvSpPr>
@@ -3944,7 +4101,7 @@
       </p:sp>
       <p:sp>
         <p:nvSpPr>
-          <p:cNvPr id="29" name="Text 27"/>
+          <p:cNvPr id="34" name="Text 32"/>
           <p:cNvSpPr txBox="1"/>
           <p:nvPr/>
         </p:nvSpPr>
@@ -3991,7 +4148,7 @@
       </p:sp>
       <p:sp>
         <p:nvSpPr>
-          <p:cNvPr id="30" name="Text 28"/>
+          <p:cNvPr id="35" name="Text 33"/>
           <p:cNvSpPr txBox="1"/>
           <p:nvPr/>
         </p:nvSpPr>
@@ -4030,7 +4187,7 @@
       </p:sp>
       <p:sp>
         <p:nvSpPr>
-          <p:cNvPr id="31" name="Text 29"/>
+          <p:cNvPr id="36" name="Text 34"/>
           <p:cNvSpPr txBox="1"/>
           <p:nvPr/>
         </p:nvSpPr>
@@ -4069,7 +4226,7 @@
       </p:sp>
       <p:sp>
         <p:nvSpPr>
-          <p:cNvPr id="32" name="Text 30"/>
+          <p:cNvPr id="37" name="Text 35"/>
           <p:cNvSpPr txBox="1"/>
           <p:nvPr/>
         </p:nvSpPr>
@@ -4108,7 +4265,7 @@
       </p:sp>
       <p:sp>
         <p:nvSpPr>
-          <p:cNvPr id="33" name="Shape 31"/>
+          <p:cNvPr id="38" name="Shape 36"/>
           <p:cNvSpPr/>
           <p:nvPr/>
         </p:nvSpPr>
@@ -4133,7 +4290,7 @@
       </p:sp>
       <p:sp>
         <p:nvSpPr>
-          <p:cNvPr id="34" name="Text 32"/>
+          <p:cNvPr id="39" name="Text 37"/>
           <p:cNvSpPr txBox="1"/>
           <p:nvPr/>
         </p:nvSpPr>
@@ -4172,7 +4329,7 @@
       </p:sp>
       <p:sp>
         <p:nvSpPr>
-          <p:cNvPr id="35" name="Text 33"/>
+          <p:cNvPr id="40" name="Text 38"/>
           <p:cNvSpPr txBox="1"/>
           <p:nvPr/>
         </p:nvSpPr>
@@ -4211,7 +4368,7 @@
       </p:sp>
       <p:sp>
         <p:nvSpPr>
-          <p:cNvPr id="36" name="Text 34"/>
+          <p:cNvPr id="41" name="Text 39"/>
           <p:cNvSpPr txBox="1"/>
           <p:nvPr/>
         </p:nvSpPr>
@@ -4250,7 +4407,7 @@
       </p:sp>
       <p:sp>
         <p:nvSpPr>
-          <p:cNvPr id="37" name="Shape 35"/>
+          <p:cNvPr id="42" name="Shape 40"/>
           <p:cNvSpPr/>
           <p:nvPr/>
         </p:nvSpPr>
@@ -4275,7 +4432,7 @@
       </p:sp>
       <p:sp>
         <p:nvSpPr>
-          <p:cNvPr id="38" name="Text 36"/>
+          <p:cNvPr id="43" name="Text 41"/>
           <p:cNvSpPr txBox="1"/>
           <p:nvPr/>
         </p:nvSpPr>
@@ -4314,7 +4471,7 @@
       </p:sp>
       <p:sp>
         <p:nvSpPr>
-          <p:cNvPr id="39" name="Text 37"/>
+          <p:cNvPr id="44" name="Text 42"/>
           <p:cNvSpPr txBox="1"/>
           <p:nvPr/>
         </p:nvSpPr>
@@ -4353,7 +4510,7 @@
       </p:sp>
       <p:sp>
         <p:nvSpPr>
-          <p:cNvPr id="40" name="Text 38"/>
+          <p:cNvPr id="45" name="Text 43"/>
           <p:cNvSpPr txBox="1"/>
           <p:nvPr/>
         </p:nvSpPr>
@@ -4392,7 +4549,7 @@
       </p:sp>
       <p:sp>
         <p:nvSpPr>
-          <p:cNvPr id="41" name="Shape 39"/>
+          <p:cNvPr id="46" name="Shape 44"/>
           <p:cNvSpPr/>
           <p:nvPr/>
         </p:nvSpPr>
@@ -4417,7 +4574,7 @@
       </p:sp>
       <p:sp>
         <p:nvSpPr>
-          <p:cNvPr id="42" name="Text 40"/>
+          <p:cNvPr id="47" name="Text 45"/>
           <p:cNvSpPr txBox="1"/>
           <p:nvPr/>
         </p:nvSpPr>
@@ -4456,7 +4613,7 @@
       </p:sp>
       <p:sp>
         <p:nvSpPr>
-          <p:cNvPr id="43" name="Text 41"/>
+          <p:cNvPr id="48" name="Text 46"/>
           <p:cNvSpPr txBox="1"/>
           <p:nvPr/>
         </p:nvSpPr>
@@ -4495,7 +4652,7 @@
       </p:sp>
       <p:sp>
         <p:nvSpPr>
-          <p:cNvPr id="44" name="Text 42"/>
+          <p:cNvPr id="49" name="Text 47"/>
           <p:cNvSpPr txBox="1"/>
           <p:nvPr/>
         </p:nvSpPr>
@@ -4534,7 +4691,7 @@
       </p:sp>
       <p:sp>
         <p:nvSpPr>
-          <p:cNvPr id="45" name="Shape 43"/>
+          <p:cNvPr id="50" name="Shape 48"/>
           <p:cNvSpPr/>
           <p:nvPr/>
         </p:nvSpPr>
@@ -4559,7 +4716,7 @@
       </p:sp>
       <p:sp>
         <p:nvSpPr>
-          <p:cNvPr id="46" name="Text 44"/>
+          <p:cNvPr id="51" name="Text 49"/>
           <p:cNvSpPr txBox="1"/>
           <p:nvPr/>
         </p:nvSpPr>
@@ -4598,7 +4755,7 @@
       </p:sp>
       <p:sp>
         <p:nvSpPr>
-          <p:cNvPr id="47" name="Text 45"/>
+          <p:cNvPr id="52" name="Text 50"/>
           <p:cNvSpPr txBox="1"/>
           <p:nvPr/>
         </p:nvSpPr>
@@ -4637,7 +4794,7 @@
       </p:sp>
       <p:sp>
         <p:nvSpPr>
-          <p:cNvPr id="48" name="Text 46"/>
+          <p:cNvPr id="53" name="Text 51"/>
           <p:cNvSpPr txBox="1"/>
           <p:nvPr/>
         </p:nvSpPr>
@@ -4676,7 +4833,7 @@
       </p:sp>
       <p:sp>
         <p:nvSpPr>
-          <p:cNvPr id="49" name="Shape 47"/>
+          <p:cNvPr id="54" name="Shape 52"/>
           <p:cNvSpPr/>
           <p:nvPr/>
         </p:nvSpPr>
@@ -4701,7 +4858,7 @@
       </p:sp>
       <p:sp>
         <p:nvSpPr>
-          <p:cNvPr id="50" name="Text 48"/>
+          <p:cNvPr id="55" name="Text 53"/>
           <p:cNvSpPr txBox="1"/>
           <p:nvPr/>
         </p:nvSpPr>
@@ -4740,7 +4897,7 @@
       </p:sp>
       <p:sp>
         <p:nvSpPr>
-          <p:cNvPr id="51" name="Text 49"/>
+          <p:cNvPr id="56" name="Text 54"/>
           <p:cNvSpPr txBox="1"/>
           <p:nvPr/>
         </p:nvSpPr>
@@ -4779,7 +4936,7 @@
       </p:sp>
       <p:sp>
         <p:nvSpPr>
-          <p:cNvPr id="52" name="Text 50"/>
+          <p:cNvPr id="57" name="Text 55"/>
           <p:cNvSpPr txBox="1"/>
           <p:nvPr/>
         </p:nvSpPr>
@@ -4818,7 +4975,7 @@
       </p:sp>
       <p:sp>
         <p:nvSpPr>
-          <p:cNvPr id="53" name="Shape 51"/>
+          <p:cNvPr id="58" name="Shape 56"/>
           <p:cNvSpPr/>
           <p:nvPr/>
         </p:nvSpPr>
@@ -4843,7 +5000,7 @@
       </p:sp>
       <p:sp>
         <p:nvSpPr>
-          <p:cNvPr id="54" name="Text 52"/>
+          <p:cNvPr id="59" name="Text 57"/>
           <p:cNvSpPr txBox="1"/>
           <p:nvPr/>
         </p:nvSpPr>
@@ -4882,7 +5039,7 @@
       </p:sp>
       <p:sp>
         <p:nvSpPr>
-          <p:cNvPr id="55" name="Text 53"/>
+          <p:cNvPr id="60" name="Text 58"/>
           <p:cNvSpPr txBox="1"/>
           <p:nvPr/>
         </p:nvSpPr>
@@ -4921,7 +5078,7 @@
       </p:sp>
       <p:sp>
         <p:nvSpPr>
-          <p:cNvPr id="56" name="Text 54"/>
+          <p:cNvPr id="61" name="Text 59"/>
           <p:cNvSpPr txBox="1"/>
           <p:nvPr/>
         </p:nvSpPr>
@@ -4960,7 +5117,7 @@
       </p:sp>
       <p:sp>
         <p:nvSpPr>
-          <p:cNvPr id="57" name="Shape 55"/>
+          <p:cNvPr id="62" name="Shape 60"/>
           <p:cNvSpPr/>
           <p:nvPr/>
         </p:nvSpPr>
@@ -4985,7 +5142,7 @@
       </p:sp>
       <p:sp>
         <p:nvSpPr>
-          <p:cNvPr id="58" name="Text 56"/>
+          <p:cNvPr id="63" name="Text 61"/>
           <p:cNvSpPr txBox="1"/>
           <p:nvPr/>
         </p:nvSpPr>
@@ -5024,7 +5181,7 @@
       </p:sp>
       <p:sp>
         <p:nvSpPr>
-          <p:cNvPr id="59" name="Text 57"/>
+          <p:cNvPr id="64" name="Text 62"/>
           <p:cNvSpPr txBox="1"/>
           <p:nvPr/>
         </p:nvSpPr>
@@ -5063,7 +5220,7 @@
       </p:sp>
       <p:sp>
         <p:nvSpPr>
-          <p:cNvPr id="60" name="Text 58"/>
+          <p:cNvPr id="65" name="Text 63"/>
           <p:cNvSpPr txBox="1"/>
           <p:nvPr/>
         </p:nvSpPr>
@@ -5102,7 +5259,7 @@
       </p:sp>
       <p:sp>
         <p:nvSpPr>
-          <p:cNvPr id="61" name="Text 59"/>
+          <p:cNvPr id="66" name="Text 64"/>
           <p:cNvSpPr txBox="1"/>
           <p:nvPr/>
         </p:nvSpPr>
@@ -5141,7 +5298,7 @@
       </p:sp>
       <p:sp>
         <p:nvSpPr>
-          <p:cNvPr id="62" name="Shape 60"/>
+          <p:cNvPr id="67" name="Shape 65"/>
           <p:cNvSpPr/>
           <p:nvPr/>
         </p:nvSpPr>
@@ -5175,7 +5332,7 @@
       </p:sp>
       <p:sp>
         <p:nvSpPr>
-          <p:cNvPr id="63" name="Text 61"/>
+          <p:cNvPr id="68" name="Text 66"/>
           <p:cNvSpPr txBox="1"/>
           <p:nvPr/>
         </p:nvSpPr>
@@ -5222,7 +5379,7 @@
       </p:sp>
       <p:sp>
         <p:nvSpPr>
-          <p:cNvPr id="64" name="Text 62"/>
+          <p:cNvPr id="69" name="Text 67"/>
           <p:cNvSpPr txBox="1"/>
           <p:nvPr/>
         </p:nvSpPr>
@@ -5261,7 +5418,7 @@
       </p:sp>
       <p:sp>
         <p:nvSpPr>
-          <p:cNvPr id="65" name="Text 63"/>
+          <p:cNvPr id="70" name="Text 68"/>
           <p:cNvSpPr txBox="1"/>
           <p:nvPr/>
         </p:nvSpPr>
@@ -5317,7 +5474,7 @@
       </p:sp>
       <p:sp>
         <p:nvSpPr>
-          <p:cNvPr id="66" name="Text 64"/>
+          <p:cNvPr id="71" name="Text 69"/>
           <p:cNvSpPr txBox="1"/>
           <p:nvPr/>
         </p:nvSpPr>
@@ -5373,7 +5530,7 @@
       </p:sp>
       <p:sp>
         <p:nvSpPr>
-          <p:cNvPr id="67" name="Text 65"/>
+          <p:cNvPr id="72" name="Text 70"/>
           <p:cNvSpPr txBox="1"/>
           <p:nvPr/>
         </p:nvSpPr>
@@ -5429,7 +5586,7 @@
       </p:sp>
       <p:sp>
         <p:nvSpPr>
-          <p:cNvPr id="68" name="Text 66"/>
+          <p:cNvPr id="73" name="Text 71"/>
           <p:cNvSpPr txBox="1"/>
           <p:nvPr/>
         </p:nvSpPr>
@@ -5485,7 +5642,7 @@
       </p:sp>
       <p:sp>
         <p:nvSpPr>
-          <p:cNvPr id="69" name="Text 67"/>
+          <p:cNvPr id="74" name="Text 72"/>
           <p:cNvSpPr txBox="1"/>
           <p:nvPr/>
         </p:nvSpPr>
@@ -5524,7 +5681,7 @@
       </p:sp>
       <p:sp>
         <p:nvSpPr>
-          <p:cNvPr id="70" name="Text 68"/>
+          <p:cNvPr id="75" name="Text 73"/>
           <p:cNvSpPr txBox="1"/>
           <p:nvPr/>
         </p:nvSpPr>
@@ -5609,7 +5766,7 @@
       </p:sp>
       <p:sp>
         <p:nvSpPr>
-          <p:cNvPr id="71" name="Shape 69"/>
+          <p:cNvPr id="76" name="Shape 74"/>
           <p:cNvSpPr/>
           <p:nvPr/>
         </p:nvSpPr>
@@ -5643,7 +5800,7 @@
       </p:sp>
       <p:sp>
         <p:nvSpPr>
-          <p:cNvPr id="72" name="Text 70"/>
+          <p:cNvPr id="77" name="Text 75"/>
           <p:cNvSpPr txBox="1"/>
           <p:nvPr/>
         </p:nvSpPr>
@@ -5682,7 +5839,7 @@
       </p:sp>
       <p:sp>
         <p:nvSpPr>
-          <p:cNvPr id="73" name="Text 71"/>
+          <p:cNvPr id="78" name="Text 76"/>
           <p:cNvSpPr txBox="1"/>
           <p:nvPr/>
         </p:nvSpPr>
@@ -5713,7 +5870,7 @@
                 <a:ea typeface="Calibri" pitchFamily="34" charset="-122"/>
                 <a:cs typeface="Calibri" pitchFamily="34" charset="-120"/>
               </a:rPr>
-              <a:t>illustrative · built on the deck's pricing assumptions · validated in the pilot</a:t>
+              <a:t>illustrative · full assumptions in speaker notes · validated in the pilot</a:t>
             </a:r>
             <a:endParaRPr lang="en-US" sz="900" dirty="0"/>
           </a:p>
@@ -5721,7 +5878,7 @@
       </p:sp>
       <p:sp>
         <p:nvSpPr>
-          <p:cNvPr id="74" name="Text 72"/>
+          <p:cNvPr id="79" name="Text 77"/>
           <p:cNvSpPr txBox="1"/>
           <p:nvPr/>
         </p:nvSpPr>
@@ -5752,7 +5909,7 @@
                 <a:ea typeface="Cambria" pitchFamily="34" charset="-122"/>
                 <a:cs typeface="Cambria" pitchFamily="34" charset="-120"/>
               </a:rPr>
-              <a:t>~2.3×</a:t>
+              <a:t>~3.8×</a:t>
             </a:r>
             <a:endParaRPr lang="en-US" sz="2200" dirty="0"/>
           </a:p>
@@ -5760,7 +5917,7 @@
       </p:sp>
       <p:sp>
         <p:nvSpPr>
-          <p:cNvPr id="75" name="Text 73"/>
+          <p:cNvPr id="80" name="Text 78"/>
           <p:cNvSpPr txBox="1"/>
           <p:nvPr/>
         </p:nvSpPr>
@@ -5808,7 +5965,7 @@
                 <a:ea typeface="Calibri" pitchFamily="34" charset="-122"/>
                 <a:cs typeface="Calibri" pitchFamily="34" charset="-120"/>
               </a:rPr>
-              <a:t>₹20K saved vs ₹8.5K fee per month</a:t>
+              <a:t>₹1.9L saved vs ₹51K fee / month</a:t>
             </a:r>
             <a:endParaRPr lang="en-US" sz="950" dirty="0"/>
           </a:p>
@@ -5816,7 +5973,7 @@
       </p:sp>
       <p:sp>
         <p:nvSpPr>
-          <p:cNvPr id="76" name="Text 74"/>
+          <p:cNvPr id="81" name="Text 79"/>
           <p:cNvSpPr txBox="1"/>
           <p:nvPr/>
         </p:nvSpPr>
@@ -5847,7 +6004,7 @@
                 <a:ea typeface="Cambria" pitchFamily="34" charset="-122"/>
                 <a:cs typeface="Cambria" pitchFamily="34" charset="-120"/>
               </a:rPr>
-              <a:t>9</a:t>
+              <a:t>0.26%</a:t>
             </a:r>
             <a:endParaRPr lang="en-US" sz="2200" dirty="0"/>
           </a:p>
@@ -5855,7 +6012,7 @@
       </p:sp>
       <p:sp>
         <p:nvSpPr>
-          <p:cNvPr id="77" name="Text 75"/>
+          <p:cNvPr id="82" name="Text 80"/>
           <p:cNvSpPr txBox="1"/>
           <p:nvPr/>
         </p:nvSpPr>
@@ -5903,7 +6060,7 @@
                 <a:ea typeface="Calibri" pitchFamily="34" charset="-122"/>
                 <a:cs typeface="Calibri" pitchFamily="34" charset="-120"/>
               </a:rPr>
-              <a:t>wrong ₹1,000 refunds prevented per month</a:t>
+              <a:t>of guarded actions going wrong</a:t>
             </a:r>
             <a:endParaRPr lang="en-US" sz="950" dirty="0"/>
           </a:p>
@@ -5911,7 +6068,7 @@
       </p:sp>
       <p:sp>
         <p:nvSpPr>
-          <p:cNvPr id="78" name="Text 76"/>
+          <p:cNvPr id="83" name="Text 81"/>
           <p:cNvSpPr txBox="1"/>
           <p:nvPr/>
         </p:nvSpPr>
@@ -5942,7 +6099,7 @@
                 <a:ea typeface="Cambria" pitchFamily="34" charset="-122"/>
                 <a:cs typeface="Cambria" pitchFamily="34" charset="-120"/>
               </a:rPr>
-              <a:t>~1.3×</a:t>
+              <a:t>$349K</a:t>
             </a:r>
             <a:endParaRPr lang="en-US" sz="2200" dirty="0"/>
           </a:p>
@@ -5950,7 +6107,7 @@
       </p:sp>
       <p:sp>
         <p:nvSpPr>
-          <p:cNvPr id="79" name="Text 77"/>
+          <p:cNvPr id="84" name="Text 82"/>
           <p:cNvSpPr txBox="1"/>
           <p:nvPr/>
         </p:nvSpPr>
@@ -5981,7 +6138,7 @@
                 <a:ea typeface="Calibri" pitchFamily="34" charset="-122"/>
                 <a:cs typeface="Calibri" pitchFamily="34" charset="-120"/>
               </a:rPr>
-              <a:t>Year-1 ROI (Freshworks)</a:t>
+              <a:t>Year-1 revenue</a:t>
             </a:r>
             <a:endParaRPr lang="en-US" sz="950" dirty="0"/>
           </a:p>
@@ -5998,7 +6155,7 @@
                 <a:ea typeface="Calibri" pitchFamily="34" charset="-122"/>
                 <a:cs typeface="Calibri" pitchFamily="34" charset="-120"/>
               </a:rPr>
-              <a:t>~$120K ARR on a ~$90K build</a:t>
+              <a:t>vs $90K build · ~$195K gross profit</a:t>
             </a:r>
             <a:endParaRPr lang="en-US" sz="950" dirty="0"/>
           </a:p>
@@ -6006,7 +6163,7 @@
       </p:sp>
       <p:sp>
         <p:nvSpPr>
-          <p:cNvPr id="80" name="Text 78"/>
+          <p:cNvPr id="85" name="Text 83"/>
           <p:cNvSpPr txBox="1"/>
           <p:nvPr/>
         </p:nvSpPr>
@@ -6037,7 +6194,7 @@
                 <a:ea typeface="Cambria" pitchFamily="34" charset="-122"/>
                 <a:cs typeface="Cambria" pitchFamily="34" charset="-120"/>
               </a:rPr>
-              <a:t>~9 mo</a:t>
+              <a:t>~8 mo</a:t>
             </a:r>
             <a:endParaRPr lang="en-US" sz="2200" dirty="0"/>
           </a:p>
@@ -6045,7 +6202,7 @@
       </p:sp>
       <p:sp>
         <p:nvSpPr>
-          <p:cNvPr id="81" name="Text 79"/>
+          <p:cNvPr id="86" name="Text 84"/>
           <p:cNvSpPr txBox="1"/>
           <p:nvPr/>
         </p:nvSpPr>
@@ -6093,7 +6250,7 @@
                 <a:ea typeface="Calibri" pitchFamily="34" charset="-122"/>
                 <a:cs typeface="Calibri" pitchFamily="34" charset="-120"/>
               </a:rPr>
-              <a:t>at ~$10K MRR</a:t>
+              <a:t>after launch, on gross profit</a:t>
             </a:r>
             <a:endParaRPr lang="en-US" sz="950" dirty="0"/>
           </a:p>
@@ -6101,7 +6258,7 @@
       </p:sp>
       <p:sp>
         <p:nvSpPr>
-          <p:cNvPr id="82" name="Text 80"/>
+          <p:cNvPr id="87" name="Text 85"/>
           <p:cNvSpPr txBox="1"/>
           <p:nvPr/>
         </p:nvSpPr>
@@ -19281,8 +19438,8 @@
         </p:nvSpPr>
         <p:spPr>
           <a:xfrm>
-            <a:off x="731520" y="4407408"/>
-            <a:ext cx="1234440" cy="365760"/>
+            <a:off x="731520" y="4370832"/>
+            <a:ext cx="1188720" cy="310896"/>
           </a:xfrm>
           <a:prstGeom prst="rect">
             <a:avLst/>
@@ -19298,7 +19455,7 @@
               <a:buNone/>
             </a:pPr>
             <a:r>
-              <a:rPr lang="en-US" sz="1350" b="1" dirty="0">
+              <a:rPr lang="en-US" sz="1300" b="1" dirty="0">
                 <a:solidFill>
                   <a:srgbClr val="14213D"/>
                 </a:solidFill>
@@ -19308,7 +19465,7 @@
               </a:rPr>
               <a:t>Free</a:t>
             </a:r>
-            <a:endParaRPr lang="en-US" sz="1350" dirty="0"/>
+            <a:endParaRPr lang="en-US" sz="1300" dirty="0"/>
           </a:p>
         </p:txBody>
       </p:sp>
@@ -19320,8 +19477,8 @@
         </p:nvSpPr>
         <p:spPr>
           <a:xfrm>
-            <a:off x="1965960" y="4407408"/>
-            <a:ext cx="3931920" cy="365760"/>
+            <a:off x="1920240" y="4370832"/>
+            <a:ext cx="3977640" cy="310896"/>
           </a:xfrm>
           <a:prstGeom prst="rect">
             <a:avLst/>
@@ -19337,7 +19494,7 @@
               <a:buNone/>
             </a:pPr>
             <a:r>
-              <a:rPr lang="en-US" sz="1050" dirty="0">
+              <a:rPr lang="en-US" sz="1000" dirty="0">
                 <a:solidFill>
                   <a:srgbClr val="1F2937"/>
                 </a:solidFill>
@@ -19347,7 +19504,7 @@
               </a:rPr>
               <a:t>Monitor mode: flags risky actions, never blocks</a:t>
             </a:r>
-            <a:endParaRPr lang="en-US" sz="1050" dirty="0"/>
+            <a:endParaRPr lang="en-US" sz="1000" dirty="0"/>
           </a:p>
         </p:txBody>
       </p:sp>
@@ -19359,8 +19516,8 @@
         </p:nvSpPr>
         <p:spPr>
           <a:xfrm>
-            <a:off x="731520" y="4809744"/>
-            <a:ext cx="1234440" cy="365760"/>
+            <a:off x="731520" y="4700016"/>
+            <a:ext cx="1188720" cy="310896"/>
           </a:xfrm>
           <a:prstGeom prst="rect">
             <a:avLst/>
@@ -19376,7 +19533,7 @@
               <a:buNone/>
             </a:pPr>
             <a:r>
-              <a:rPr lang="en-US" sz="1350" b="1" dirty="0">
+              <a:rPr lang="en-US" sz="1300" b="1" dirty="0">
                 <a:solidFill>
                   <a:srgbClr val="7A5000"/>
                 </a:solidFill>
@@ -19384,9 +19541,9 @@
                 <a:ea typeface="Cambria" pitchFamily="34" charset="-122"/>
                 <a:cs typeface="Cambria" pitchFamily="34" charset="-120"/>
               </a:rPr>
-              <a:t>$5 / 1,000</a:t>
-            </a:r>
-            <a:endParaRPr lang="en-US" sz="1350" dirty="0"/>
+              <a:t>$0.03</a:t>
+            </a:r>
+            <a:endParaRPr lang="en-US" sz="1300" dirty="0"/>
           </a:p>
         </p:txBody>
       </p:sp>
@@ -19398,8 +19555,8 @@
         </p:nvSpPr>
         <p:spPr>
           <a:xfrm>
-            <a:off x="1965960" y="4809744"/>
-            <a:ext cx="3931920" cy="365760"/>
+            <a:off x="1920240" y="4700016"/>
+            <a:ext cx="3977640" cy="310896"/>
           </a:xfrm>
           <a:prstGeom prst="rect">
             <a:avLst/>
@@ -19415,7 +19572,7 @@
               <a:buNone/>
             </a:pPr>
             <a:r>
-              <a:rPr lang="en-US" sz="1050" dirty="0">
+              <a:rPr lang="en-US" sz="1000" dirty="0">
                 <a:solidFill>
                   <a:srgbClr val="1F2937"/>
                 </a:solidFill>
@@ -19423,9 +19580,9 @@
                 <a:ea typeface="Calibri" pitchFamily="34" charset="-122"/>
                 <a:cs typeface="Calibri" pitchFamily="34" charset="-120"/>
               </a:rPr>
-              <a:t>guarded actions: full gate, DTMF, Freshdesk, audit · 30 days free</a:t>
-            </a:r>
-            <a:endParaRPr lang="en-US" sz="1050" dirty="0"/>
+              <a:t>per guarded action: plug-in on the customer's own agent</a:t>
+            </a:r>
+            <a:endParaRPr lang="en-US" sz="1000" dirty="0"/>
           </a:p>
         </p:txBody>
       </p:sp>
@@ -19437,8 +19594,8 @@
         </p:nvSpPr>
         <p:spPr>
           <a:xfrm>
-            <a:off x="731520" y="5212080"/>
-            <a:ext cx="1234440" cy="365760"/>
+            <a:off x="731520" y="5029200"/>
+            <a:ext cx="1188720" cy="310896"/>
           </a:xfrm>
           <a:prstGeom prst="rect">
             <a:avLst/>
@@ -19454,30 +19611,108 @@
               <a:buNone/>
             </a:pPr>
             <a:r>
-              <a:rPr lang="en-US" sz="1350" b="1" dirty="0">
-                <a:solidFill>
-                  <a:srgbClr val="14213D"/>
+              <a:rPr lang="en-US" sz="1300" b="1" dirty="0">
+                <a:solidFill>
+                  <a:srgbClr val="7A5000"/>
                 </a:solidFill>
                 <a:latin typeface="Cambria" pitchFamily="34" charset="0"/>
                 <a:ea typeface="Cambria" pitchFamily="34" charset="-122"/>
                 <a:cs typeface="Cambria" pitchFamily="34" charset="-120"/>
               </a:rPr>
+              <a:t>₹8 / min</a:t>
+            </a:r>
+            <a:endParaRPr lang="en-US" sz="1300" dirty="0"/>
+          </a:p>
+        </p:txBody>
+      </p:sp>
+      <p:sp>
+        <p:nvSpPr>
+          <p:cNvPr id="27" name="Text 25"/>
+          <p:cNvSpPr txBox="1"/>
+          <p:nvPr/>
+        </p:nvSpPr>
+        <p:spPr>
+          <a:xfrm>
+            <a:off x="1920240" y="5029200"/>
+            <a:ext cx="3977640" cy="310896"/>
+          </a:xfrm>
+          <a:prstGeom prst="rect">
+            <a:avLst/>
+          </a:prstGeom>
+          <a:noFill/>
+          <a:ln/>
+        </p:spPr>
+        <p:txBody>
+          <a:bodyPr wrap="square" lIns="0" tIns="0" rIns="0" bIns="0" rtlCol="0" anchor="ctr"/>
+          <a:lstStyle/>
+          <a:p>
+            <a:pPr indent="0" marL="0">
+              <a:buNone/>
+            </a:pPr>
+            <a:r>
+              <a:rPr lang="en-US" sz="1000" dirty="0">
+                <a:solidFill>
+                  <a:srgbClr val="1F2937"/>
+                </a:solidFill>
+                <a:latin typeface="Calibri" pitchFamily="34" charset="0"/>
+                <a:ea typeface="Calibri" pitchFamily="34" charset="-122"/>
+                <a:cs typeface="Calibri" pitchFamily="34" charset="-120"/>
+              </a:rPr>
+              <a:t>full voice agent: VoBiz + Sarvam + Claude + ElevenLabs + Freshdesk</a:t>
+            </a:r>
+            <a:endParaRPr lang="en-US" sz="1000" dirty="0"/>
+          </a:p>
+        </p:txBody>
+      </p:sp>
+      <p:sp>
+        <p:nvSpPr>
+          <p:cNvPr id="28" name="Text 26"/>
+          <p:cNvSpPr txBox="1"/>
+          <p:nvPr/>
+        </p:nvSpPr>
+        <p:spPr>
+          <a:xfrm>
+            <a:off x="731520" y="5358384"/>
+            <a:ext cx="1188720" cy="310896"/>
+          </a:xfrm>
+          <a:prstGeom prst="rect">
+            <a:avLst/>
+          </a:prstGeom>
+          <a:noFill/>
+          <a:ln/>
+        </p:spPr>
+        <p:txBody>
+          <a:bodyPr wrap="square" lIns="0" tIns="0" rIns="0" bIns="0" rtlCol="0" anchor="ctr"/>
+          <a:lstStyle/>
+          <a:p>
+            <a:pPr indent="0" marL="0">
+              <a:buNone/>
+            </a:pPr>
+            <a:r>
+              <a:rPr lang="en-US" sz="1300" b="1" dirty="0">
+                <a:solidFill>
+                  <a:srgbClr val="14213D"/>
+                </a:solidFill>
+                <a:latin typeface="Cambria" pitchFamily="34" charset="0"/>
+                <a:ea typeface="Cambria" pitchFamily="34" charset="-122"/>
+                <a:cs typeface="Cambria" pitchFamily="34" charset="-120"/>
+              </a:rPr>
               <a:t>Custom</a:t>
             </a:r>
-            <a:endParaRPr lang="en-US" sz="1350" dirty="0"/>
-          </a:p>
-        </p:txBody>
-      </p:sp>
-      <p:sp>
-        <p:nvSpPr>
-          <p:cNvPr id="27" name="Text 25"/>
-          <p:cNvSpPr txBox="1"/>
-          <p:nvPr/>
-        </p:nvSpPr>
-        <p:spPr>
-          <a:xfrm>
-            <a:off x="1965960" y="5212080"/>
-            <a:ext cx="3931920" cy="365760"/>
+            <a:endParaRPr lang="en-US" sz="1300" dirty="0"/>
+          </a:p>
+        </p:txBody>
+      </p:sp>
+      <p:sp>
+        <p:nvSpPr>
+          <p:cNvPr id="29" name="Text 27"/>
+          <p:cNvSpPr txBox="1"/>
+          <p:nvPr/>
+        </p:nvSpPr>
+        <p:spPr>
+          <a:xfrm>
+            <a:off x="1920240" y="5358384"/>
+            <a:ext cx="3977640" cy="310896"/>
           </a:xfrm>
           <a:prstGeom prst="rect">
             <a:avLst/>
@@ -19493,7 +19728,7 @@
               <a:buNone/>
             </a:pPr>
             <a:r>
-              <a:rPr lang="en-US" sz="1050" dirty="0">
+              <a:rPr lang="en-US" sz="1000" dirty="0">
                 <a:solidFill>
                   <a:srgbClr val="1F2937"/>
                 </a:solidFill>
@@ -19503,20 +19738,20 @@
               </a:rPr>
               <a:t>Enterprise: SOP rule packs, India data residency, SLA</a:t>
             </a:r>
-            <a:endParaRPr lang="en-US" sz="1050" dirty="0"/>
-          </a:p>
-        </p:txBody>
-      </p:sp>
-      <p:sp>
-        <p:nvSpPr>
-          <p:cNvPr id="28" name="Text 26"/>
-          <p:cNvSpPr txBox="1"/>
-          <p:nvPr/>
-        </p:nvSpPr>
-        <p:spPr>
-          <a:xfrm>
-            <a:off x="731520" y="5623560"/>
-            <a:ext cx="5120640" cy="457200"/>
+            <a:endParaRPr lang="en-US" sz="1000" dirty="0"/>
+          </a:p>
+        </p:txBody>
+      </p:sp>
+      <p:sp>
+        <p:nvSpPr>
+          <p:cNvPr id="30" name="Text 28"/>
+          <p:cNvSpPr txBox="1"/>
+          <p:nvPr/>
+        </p:nvSpPr>
+        <p:spPr>
+          <a:xfrm>
+            <a:off x="731520" y="5687568"/>
+            <a:ext cx="5120640" cy="411480"/>
           </a:xfrm>
           <a:prstGeom prst="rect">
             <a:avLst/>
@@ -19532,7 +19767,7 @@
               <a:buNone/>
             </a:pPr>
             <a:r>
-              <a:rPr lang="en-US" sz="1000" i="1" dirty="0">
+              <a:rPr lang="en-US" sz="950" i="1" dirty="0">
                 <a:solidFill>
                   <a:srgbClr val="5B6475"/>
                 </a:solidFill>
@@ -19540,15 +19775,15 @@
                 <a:ea typeface="Calibri" pitchFamily="34" charset="-122"/>
                 <a:cs typeface="Calibri" pitchFamily="34" charset="-120"/>
               </a:rPr>
-              <a:t>Only sensitive actions are metered: one prevented ₹1,000 wrong refund pays for 2,000+ guarded actions (~2.3× customer ROI, slide 10).</a:t>
-            </a:r>
-            <a:endParaRPr lang="en-US" sz="1000" dirty="0"/>
-          </a:p>
-        </p:txBody>
-      </p:sp>
-      <p:sp>
-        <p:nvSpPr>
-          <p:cNvPr id="29" name="Shape 27"/>
+              <a:t>Priced above run cost (~55% gross margin, slide 10). One prevented ₹1,000 wrong refund pays for ~390 guarded actions.</a:t>
+            </a:r>
+            <a:endParaRPr lang="en-US" sz="950" dirty="0"/>
+          </a:p>
+        </p:txBody>
+      </p:sp>
+      <p:sp>
+        <p:nvSpPr>
+          <p:cNvPr id="31" name="Shape 29"/>
           <p:cNvSpPr/>
           <p:nvPr/>
         </p:nvSpPr>
@@ -19582,7 +19817,7 @@
       </p:sp>
       <p:sp>
         <p:nvSpPr>
-          <p:cNvPr id="30" name="Text 28"/>
+          <p:cNvPr id="32" name="Text 30"/>
           <p:cNvSpPr txBox="1"/>
           <p:nvPr/>
         </p:nvSpPr>
@@ -19629,7 +19864,7 @@
       </p:sp>
       <p:sp>
         <p:nvSpPr>
-          <p:cNvPr id="31" name="Text 29"/>
+          <p:cNvPr id="33" name="Text 31"/>
           <p:cNvSpPr txBox="1"/>
           <p:nvPr/>
         </p:nvSpPr>
@@ -19668,7 +19903,7 @@
       </p:sp>
       <p:sp>
         <p:nvSpPr>
-          <p:cNvPr id="32" name="Shape 30"/>
+          <p:cNvPr id="34" name="Shape 32"/>
           <p:cNvSpPr/>
           <p:nvPr/>
         </p:nvSpPr>
@@ -19693,7 +19928,7 @@
       </p:sp>
       <p:sp>
         <p:nvSpPr>
-          <p:cNvPr id="33" name="Text 31"/>
+          <p:cNvPr id="35" name="Text 33"/>
           <p:cNvSpPr txBox="1"/>
           <p:nvPr/>
         </p:nvSpPr>
@@ -19732,7 +19967,7 @@
       </p:sp>
       <p:sp>
         <p:nvSpPr>
-          <p:cNvPr id="34" name="Text 32"/>
+          <p:cNvPr id="36" name="Text 34"/>
           <p:cNvSpPr txBox="1"/>
           <p:nvPr/>
         </p:nvSpPr>
@@ -19771,7 +20006,7 @@
       </p:sp>
       <p:sp>
         <p:nvSpPr>
-          <p:cNvPr id="35" name="Shape 33"/>
+          <p:cNvPr id="37" name="Shape 35"/>
           <p:cNvSpPr/>
           <p:nvPr/>
         </p:nvSpPr>
@@ -19796,7 +20031,7 @@
       </p:sp>
       <p:sp>
         <p:nvSpPr>
-          <p:cNvPr id="36" name="Text 34"/>
+          <p:cNvPr id="38" name="Text 36"/>
           <p:cNvSpPr txBox="1"/>
           <p:nvPr/>
         </p:nvSpPr>
@@ -19835,7 +20070,7 @@
       </p:sp>
       <p:sp>
         <p:nvSpPr>
-          <p:cNvPr id="37" name="Text 35"/>
+          <p:cNvPr id="39" name="Text 37"/>
           <p:cNvSpPr txBox="1"/>
           <p:nvPr/>
         </p:nvSpPr>
@@ -19874,7 +20109,7 @@
       </p:sp>
       <p:sp>
         <p:nvSpPr>
-          <p:cNvPr id="38" name="Shape 36"/>
+          <p:cNvPr id="40" name="Shape 38"/>
           <p:cNvSpPr/>
           <p:nvPr/>
         </p:nvSpPr>
@@ -19899,7 +20134,7 @@
       </p:sp>
       <p:sp>
         <p:nvSpPr>
-          <p:cNvPr id="39" name="Text 37"/>
+          <p:cNvPr id="41" name="Text 39"/>
           <p:cNvSpPr txBox="1"/>
           <p:nvPr/>
         </p:nvSpPr>
@@ -19938,7 +20173,7 @@
       </p:sp>
       <p:sp>
         <p:nvSpPr>
-          <p:cNvPr id="40" name="Text 38"/>
+          <p:cNvPr id="42" name="Text 40"/>
           <p:cNvSpPr txBox="1"/>
           <p:nvPr/>
         </p:nvSpPr>
@@ -19977,7 +20212,7 @@
       </p:sp>
       <p:sp>
         <p:nvSpPr>
-          <p:cNvPr id="41" name="Shape 39"/>
+          <p:cNvPr id="43" name="Shape 41"/>
           <p:cNvSpPr/>
           <p:nvPr/>
         </p:nvSpPr>
@@ -20002,7 +20237,7 @@
       </p:sp>
       <p:sp>
         <p:nvSpPr>
-          <p:cNvPr id="42" name="Text 40"/>
+          <p:cNvPr id="44" name="Text 42"/>
           <p:cNvSpPr txBox="1"/>
           <p:nvPr/>
         </p:nvSpPr>
@@ -20041,7 +20276,7 @@
       </p:sp>
       <p:sp>
         <p:nvSpPr>
-          <p:cNvPr id="43" name="Text 41"/>
+          <p:cNvPr id="45" name="Text 43"/>
           <p:cNvSpPr txBox="1"/>
           <p:nvPr/>
         </p:nvSpPr>
@@ -20080,7 +20315,7 @@
       </p:sp>
       <p:sp>
         <p:nvSpPr>
-          <p:cNvPr id="44" name="Shape 42"/>
+          <p:cNvPr id="46" name="Shape 44"/>
           <p:cNvSpPr/>
           <p:nvPr/>
         </p:nvSpPr>
@@ -20105,7 +20340,7 @@
       </p:sp>
       <p:sp>
         <p:nvSpPr>
-          <p:cNvPr id="45" name="Text 43"/>
+          <p:cNvPr id="47" name="Text 45"/>
           <p:cNvSpPr txBox="1"/>
           <p:nvPr/>
         </p:nvSpPr>
@@ -20144,7 +20379,7 @@
       </p:sp>
       <p:sp>
         <p:nvSpPr>
-          <p:cNvPr id="46" name="Text 44"/>
+          <p:cNvPr id="48" name="Text 46"/>
           <p:cNvSpPr txBox="1"/>
           <p:nvPr/>
         </p:nvSpPr>
@@ -20183,7 +20418,7 @@
       </p:sp>
       <p:sp>
         <p:nvSpPr>
-          <p:cNvPr id="47" name="Text 45"/>
+          <p:cNvPr id="49" name="Text 47"/>
           <p:cNvSpPr txBox="1"/>
           <p:nvPr/>
         </p:nvSpPr>

--- a/docs/presentation/CodemixSkill-Final-10-Slides.pptx
+++ b/docs/presentation/CodemixSkill-Final-10-Slides.pptx
@@ -5772,12 +5772,12 @@
         </p:nvSpPr>
         <p:spPr>
           <a:xfrm>
-            <a:off x="548640" y="5166360"/>
-            <a:ext cx="11109960" cy="1051560"/>
+            <a:off x="548640" y="5138928"/>
+            <a:ext cx="11109960" cy="1243584"/>
           </a:xfrm>
           <a:prstGeom prst="roundRect">
             <a:avLst>
-              <a:gd name="adj" fmla="val 8696"/>
+              <a:gd name="adj" fmla="val 7353"/>
             </a:avLst>
           </a:prstGeom>
           <a:solidFill>
@@ -5806,7 +5806,7 @@
         </p:nvSpPr>
         <p:spPr>
           <a:xfrm>
-            <a:off x="777240" y="5230368"/>
+            <a:off x="777240" y="5148072"/>
             <a:ext cx="2743200" cy="237744"/>
           </a:xfrm>
           <a:prstGeom prst="rect">
@@ -5845,7 +5845,7 @@
         </p:nvSpPr>
         <p:spPr>
           <a:xfrm>
-            <a:off x="3291840" y="5230368"/>
+            <a:off x="3291840" y="5148072"/>
             <a:ext cx="8138160" cy="237744"/>
           </a:xfrm>
           <a:prstGeom prst="rect">
@@ -5884,8 +5884,8 @@
         </p:nvSpPr>
         <p:spPr>
           <a:xfrm>
-            <a:off x="777240" y="5486400"/>
-            <a:ext cx="1234440" cy="658368"/>
+            <a:off x="777240" y="5376672"/>
+            <a:ext cx="1234440" cy="566928"/>
           </a:xfrm>
           <a:prstGeom prst="rect">
             <a:avLst/>
@@ -5923,8 +5923,8 @@
         </p:nvSpPr>
         <p:spPr>
           <a:xfrm>
-            <a:off x="2039112" y="5486400"/>
-            <a:ext cx="1417320" cy="658368"/>
+            <a:off x="2039112" y="5376672"/>
+            <a:ext cx="1417320" cy="566928"/>
           </a:xfrm>
           <a:prstGeom prst="rect">
             <a:avLst/>
@@ -5979,8 +5979,8 @@
         </p:nvSpPr>
         <p:spPr>
           <a:xfrm>
-            <a:off x="3520440" y="5486400"/>
-            <a:ext cx="1234440" cy="658368"/>
+            <a:off x="3520440" y="5376672"/>
+            <a:ext cx="1234440" cy="566928"/>
           </a:xfrm>
           <a:prstGeom prst="rect">
             <a:avLst/>
@@ -6018,8 +6018,8 @@
         </p:nvSpPr>
         <p:spPr>
           <a:xfrm>
-            <a:off x="4782312" y="5486400"/>
-            <a:ext cx="1417320" cy="658368"/>
+            <a:off x="4782312" y="5376672"/>
+            <a:ext cx="1417320" cy="566928"/>
           </a:xfrm>
           <a:prstGeom prst="rect">
             <a:avLst/>
@@ -6074,8 +6074,8 @@
         </p:nvSpPr>
         <p:spPr>
           <a:xfrm>
-            <a:off x="6263640" y="5486400"/>
-            <a:ext cx="1234440" cy="658368"/>
+            <a:off x="6263640" y="5376672"/>
+            <a:ext cx="1234440" cy="566928"/>
           </a:xfrm>
           <a:prstGeom prst="rect">
             <a:avLst/>
@@ -6113,8 +6113,8 @@
         </p:nvSpPr>
         <p:spPr>
           <a:xfrm>
-            <a:off x="7525512" y="5486400"/>
-            <a:ext cx="1417320" cy="658368"/>
+            <a:off x="7525512" y="5376672"/>
+            <a:ext cx="1417320" cy="566928"/>
           </a:xfrm>
           <a:prstGeom prst="rect">
             <a:avLst/>
@@ -6169,8 +6169,8 @@
         </p:nvSpPr>
         <p:spPr>
           <a:xfrm>
-            <a:off x="9006840" y="5486400"/>
-            <a:ext cx="1234440" cy="658368"/>
+            <a:off x="9006840" y="5376672"/>
+            <a:ext cx="1234440" cy="566928"/>
           </a:xfrm>
           <a:prstGeom prst="rect">
             <a:avLst/>
@@ -6208,8 +6208,8 @@
         </p:nvSpPr>
         <p:spPr>
           <a:xfrm>
-            <a:off x="10268712" y="5486400"/>
-            <a:ext cx="1417320" cy="658368"/>
+            <a:off x="10268712" y="5376672"/>
+            <a:ext cx="1417320" cy="566928"/>
           </a:xfrm>
           <a:prstGeom prst="rect">
             <a:avLst/>
@@ -6258,7 +6258,125 @@
       </p:sp>
       <p:sp>
         <p:nvSpPr>
-          <p:cNvPr id="87" name="Text 85"/>
+          <p:cNvPr id="87" name="Shape 85"/>
+          <p:cNvSpPr/>
+          <p:nvPr/>
+        </p:nvSpPr>
+        <p:spPr>
+          <a:xfrm>
+            <a:off x="777240" y="5989320"/>
+            <a:ext cx="10652760" cy="0"/>
+          </a:xfrm>
+          <a:prstGeom prst="line">
+            <a:avLst/>
+          </a:prstGeom>
+          <a:noFill/>
+          <a:ln w="12700">
+            <a:solidFill>
+              <a:srgbClr val="1F3057"/>
+            </a:solidFill>
+            <a:prstDash val="solid"/>
+          </a:ln>
+        </p:spPr>
+      </p:sp>
+      <p:sp>
+        <p:nvSpPr>
+          <p:cNvPr id="88" name="Text 86"/>
+          <p:cNvSpPr txBox="1"/>
+          <p:nvPr/>
+        </p:nvSpPr>
+        <p:spPr>
+          <a:xfrm>
+            <a:off x="777240" y="6035040"/>
+            <a:ext cx="10744200" cy="301752"/>
+          </a:xfrm>
+          <a:prstGeom prst="rect">
+            <a:avLst/>
+          </a:prstGeom>
+          <a:noFill/>
+          <a:ln/>
+        </p:spPr>
+        <p:txBody>
+          <a:bodyPr wrap="square" lIns="0" tIns="0" rIns="0" bIns="0" rtlCol="0" anchor="ctr"/>
+          <a:lstStyle/>
+          <a:p>
+            <a:pPr indent="0" marL="0">
+              <a:buNone/>
+            </a:pPr>
+            <a:r>
+              <a:rPr lang="en-US" sz="950" b="1" dirty="0">
+                <a:solidFill>
+                  <a:srgbClr val="F4A300"/>
+                </a:solidFill>
+                <a:latin typeface="Calibri" pitchFamily="34" charset="0"/>
+                <a:ea typeface="Calibri" pitchFamily="34" charset="-122"/>
+                <a:cs typeface="Calibri" pitchFamily="34" charset="-120"/>
+              </a:rPr>
+              <a:t>REVENUE SPLIT  </a:t>
+            </a:r>
+            <a:pPr indent="0" marL="0">
+              <a:buNone/>
+            </a:pPr>
+            <a:r>
+              <a:rPr lang="en-US" sz="1050" b="1" dirty="0">
+                <a:solidFill>
+                  <a:srgbClr val="FFFFFF"/>
+                </a:solidFill>
+                <a:latin typeface="Calibri" pitchFamily="34" charset="0"/>
+                <a:ea typeface="Calibri" pitchFamily="34" charset="-122"/>
+                <a:cs typeface="Calibri" pitchFamily="34" charset="-120"/>
+              </a:rPr>
+              <a:t>Plug-in: </a:t>
+            </a:r>
+            <a:pPr indent="0" marL="0">
+              <a:buNone/>
+            </a:pPr>
+            <a:r>
+              <a:rPr lang="en-US" sz="1050" dirty="0">
+                <a:solidFill>
+                  <a:srgbClr val="CADCFC"/>
+                </a:solidFill>
+                <a:latin typeface="Calibri" pitchFamily="34" charset="0"/>
+                <a:ea typeface="Calibri" pitchFamily="34" charset="-122"/>
+                <a:cs typeface="Calibri" pitchFamily="34" charset="-120"/>
+              </a:rPr>
+              <a:t>25 avg customers × $600/mo = $180K → $99K profit</a:t>
+            </a:r>
+            <a:pPr indent="0" marL="0">
+              <a:buNone/>
+            </a:pPr>
+            <a:r>
+              <a:rPr lang="en-US" sz="1050" b="1" dirty="0">
+                <a:solidFill>
+                  <a:srgbClr val="FFFFFF"/>
+                </a:solidFill>
+                <a:latin typeface="Calibri" pitchFamily="34" charset="0"/>
+                <a:ea typeface="Calibri" pitchFamily="34" charset="-122"/>
+                <a:cs typeface="Calibri" pitchFamily="34" charset="-120"/>
+              </a:rPr>
+              <a:t>   ·   Voice agent: </a:t>
+            </a:r>
+            <a:pPr indent="0" marL="0">
+              <a:buNone/>
+            </a:pPr>
+            <a:r>
+              <a:rPr lang="en-US" sz="1050" dirty="0">
+                <a:solidFill>
+                  <a:srgbClr val="CADCFC"/>
+                </a:solidFill>
+                <a:latin typeface="Calibri" pitchFamily="34" charset="0"/>
+                <a:ea typeface="Calibri" pitchFamily="34" charset="-122"/>
+                <a:cs typeface="Calibri" pitchFamily="34" charset="-120"/>
+              </a:rPr>
+              <a:t>5 avg brands × $2,824/mo = $169K → $96K profit</a:t>
+            </a:r>
+            <a:endParaRPr lang="en-US" sz="1050" dirty="0"/>
+          </a:p>
+        </p:txBody>
+      </p:sp>
+      <p:sp>
+        <p:nvSpPr>
+          <p:cNvPr id="89" name="Text 87"/>
           <p:cNvSpPr txBox="1"/>
           <p:nvPr/>
         </p:nvSpPr>

--- a/docs/presentation/CodemixSkill-Final-10-Slides.pptx
+++ b/docs/presentation/CodemixSkill-Final-10-Slides.pptx
@@ -932,7 +932,7 @@
           <a:p>
             <a:r>
               <a:rPr lang="en-US" dirty="0"/>
-              <a:t>ROI assumptions. Unit costs (Sep 2026 list prices, ₹85/$): VoBiz ₹0.45/min; Sarvam STT ₹30/hr; ElevenLabs Flash $0.05 per 1K chars (~1,500 agent chars per 3-min call); Claude checks ~2 per call, Haiku 4.5 ($1/$5 per M tokens) for routine and Sonnet 5 ($2/$10) for ~20% ambiguous cases, ~2K in / 300 out tokens each; hosting + storage ~$0.005. Voice call cost ~₹10.4 per 3 min (~₹3.5/min) vs ₹8/min price (~56% margin). Plug-in cost ~₹1.1 per guarded action vs $0.03 (₹2.55) price (~55% margin). Dodo Payments fees (4% + $0.15 per INR transaction, $1 per refund) and Freshdesk plans are paid by the customer on their own accounts. Year 1: plug-in ramps to 50 customers (avg 25) at 20K guarded actions/month = $180K; voice ramps to 10 brands (avg 5) at 30K minutes/month = $169K; total $349K revenue, ~$195K gross profit; cumulative gross profit passes the $90K build around month 8. Customer ROI: brand with 20K guarded actions pays $600 (₹51K)/month; if 2% of requests contain a negation and 48% of those misfire (our measured rate), ~192 wrong ₹1,000 actions are prevented = ₹1.92L/month, ~3.8x; break-even at 51 prevented actions = 0.26%.</a:t>
+              <a:t>Say it simply: brands save about ₹3.8 for every ₹1 they pay us, roughly ₹6 crore of wrong refunds avoided in Year 1, and Freshworks earns $349K. Savings: plug-in customer with 20K guarded actions/month, 2% negated, 48% misfire (measured) = 192 wrong ₹1,000 actions prevented = ₹1.92L/month vs ₹51K fee; 25 avg customers x 12 = ₹5.76 Cr; voice brands add ~₹23L. ROI assumptions. Unit costs (Sep 2026 list prices, ₹85/$): VoBiz ₹0.45/min; Sarvam STT ₹30/hr; ElevenLabs Flash $0.05 per 1K chars (~1,500 agent chars per 3-min call); Claude checks ~2 per call, Haiku 4.5 ($1/$5 per M tokens) for routine and Sonnet 5 ($2/$10) for ~20% ambiguous cases, ~2K in / 300 out tokens each; hosting + storage ~$0.005. Voice call cost ~₹10.4 per 3 min (~₹3.5/min) vs ₹8/min price (~56% margin). Plug-in cost ~₹1.1 per guarded action vs $0.03 (₹2.55) price (~55% margin). Dodo Payments fees (4% + $0.15 per INR transaction, $1 per refund) and Freshdesk plans are paid by the customer on their own accounts. Year 1: plug-in ramps to 50 customers (avg 25) at 20K guarded actions/month = $180K; voice ramps to 10 brands (avg 5) at 30K minutes/month = $169K; total $349K revenue, ~$195K gross profit; cumulative gross profit passes the $90K build around month 8. Customer ROI: brand with 20K guarded actions pays $600 (₹51K)/month; if 2% of requests contain a negation and 48% of those misfire (our measured rate), ~192 wrong ₹1,000 actions are prevented = ₹1.92L/month, ~3.8x; break-even at 51 prevented actions = 0.26%.</a:t>
             </a:r>
             <a:endParaRPr lang="en-US" dirty="0"/>
           </a:p>
@@ -2017,45 +2017,6 @@
         </p:nvSpPr>
         <p:spPr>
           <a:xfrm>
-            <a:off x="5760720" y="109728"/>
-            <a:ext cx="5897880" cy="256032"/>
-          </a:xfrm>
-          <a:prstGeom prst="rect">
-            <a:avLst/>
-          </a:prstGeom>
-          <a:noFill/>
-          <a:ln/>
-        </p:spPr>
-        <p:txBody>
-          <a:bodyPr wrap="square" lIns="0" tIns="0" rIns="0" bIns="0" rtlCol="0" anchor="t"/>
-          <a:lstStyle/>
-          <a:p>
-            <a:pPr algn="r" indent="0" marL="0">
-              <a:buNone/>
-            </a:pPr>
-            <a:r>
-              <a:rPr lang="en-US" sz="900" b="1" spc="100" kern="0" dirty="0">
-                <a:solidFill>
-                  <a:srgbClr val="8FA0BF"/>
-                </a:solidFill>
-                <a:latin typeface="Calibri" pitchFamily="34" charset="0"/>
-                <a:ea typeface="Calibri" pitchFamily="34" charset="-122"/>
-                <a:cs typeface="Calibri" pitchFamily="34" charset="-120"/>
-              </a:rPr>
-              <a:t>SECTION 1 OF 12  ·  INITIATIVE OVERVIEW</a:t>
-            </a:r>
-            <a:endParaRPr lang="en-US" sz="900" dirty="0"/>
-          </a:p>
-        </p:txBody>
-      </p:sp>
-      <p:sp>
-        <p:nvSpPr>
-          <p:cNvPr id="3" name="Text 1"/>
-          <p:cNvSpPr txBox="1"/>
-          <p:nvPr/>
-        </p:nvSpPr>
-        <p:spPr>
-          <a:xfrm>
             <a:off x="640080" y="502920"/>
             <a:ext cx="8229600" cy="320040"/>
           </a:xfrm>
@@ -2089,7 +2050,7 @@
       </p:sp>
       <p:sp>
         <p:nvSpPr>
-          <p:cNvPr id="4" name="Text 2"/>
+          <p:cNvPr id="3" name="Text 1"/>
           <p:cNvSpPr txBox="1"/>
           <p:nvPr/>
         </p:nvSpPr>
@@ -2128,7 +2089,7 @@
       </p:sp>
       <p:sp>
         <p:nvSpPr>
-          <p:cNvPr id="5" name="Text 3"/>
+          <p:cNvPr id="4" name="Text 2"/>
           <p:cNvSpPr txBox="1"/>
           <p:nvPr/>
         </p:nvSpPr>
@@ -2167,7 +2128,7 @@
       </p:sp>
       <p:sp>
         <p:nvSpPr>
-          <p:cNvPr id="6" name="Text 4"/>
+          <p:cNvPr id="5" name="Text 3"/>
           <p:cNvSpPr txBox="1"/>
           <p:nvPr/>
         </p:nvSpPr>
@@ -2206,7 +2167,7 @@
       </p:sp>
       <p:sp>
         <p:nvSpPr>
-          <p:cNvPr id="7" name="Text 5"/>
+          <p:cNvPr id="6" name="Text 4"/>
           <p:cNvSpPr txBox="1"/>
           <p:nvPr/>
         </p:nvSpPr>
@@ -2245,7 +2206,7 @@
       </p:sp>
       <p:sp>
         <p:nvSpPr>
-          <p:cNvPr id="8" name="Shape 6"/>
+          <p:cNvPr id="7" name="Shape 5"/>
           <p:cNvSpPr/>
           <p:nvPr/>
         </p:nvSpPr>
@@ -2272,7 +2233,7 @@
       </p:sp>
       <p:sp>
         <p:nvSpPr>
-          <p:cNvPr id="9" name="Shape 7"/>
+          <p:cNvPr id="8" name="Shape 6"/>
           <p:cNvSpPr/>
           <p:nvPr/>
         </p:nvSpPr>
@@ -2297,7 +2258,7 @@
       </p:sp>
       <p:sp>
         <p:nvSpPr>
-          <p:cNvPr id="10" name="Text 8"/>
+          <p:cNvPr id="9" name="Text 7"/>
           <p:cNvSpPr txBox="1"/>
           <p:nvPr/>
         </p:nvSpPr>
@@ -2336,7 +2297,7 @@
       </p:sp>
       <p:sp>
         <p:nvSpPr>
-          <p:cNvPr id="11" name="Text 9"/>
+          <p:cNvPr id="10" name="Text 8"/>
           <p:cNvSpPr txBox="1"/>
           <p:nvPr/>
         </p:nvSpPr>
@@ -2375,7 +2336,7 @@
       </p:sp>
       <p:sp>
         <p:nvSpPr>
-          <p:cNvPr id="12" name="Shape 10"/>
+          <p:cNvPr id="11" name="Shape 9"/>
           <p:cNvSpPr/>
           <p:nvPr/>
         </p:nvSpPr>
@@ -2402,7 +2363,7 @@
       </p:sp>
       <p:sp>
         <p:nvSpPr>
-          <p:cNvPr id="13" name="Shape 11"/>
+          <p:cNvPr id="12" name="Shape 10"/>
           <p:cNvSpPr/>
           <p:nvPr/>
         </p:nvSpPr>
@@ -2427,7 +2388,7 @@
       </p:sp>
       <p:sp>
         <p:nvSpPr>
-          <p:cNvPr id="14" name="Text 12"/>
+          <p:cNvPr id="13" name="Text 11"/>
           <p:cNvSpPr txBox="1"/>
           <p:nvPr/>
         </p:nvSpPr>
@@ -2466,7 +2427,7 @@
       </p:sp>
       <p:sp>
         <p:nvSpPr>
-          <p:cNvPr id="15" name="Text 13"/>
+          <p:cNvPr id="14" name="Text 12"/>
           <p:cNvSpPr txBox="1"/>
           <p:nvPr/>
         </p:nvSpPr>
@@ -2505,7 +2466,7 @@
       </p:sp>
       <p:sp>
         <p:nvSpPr>
-          <p:cNvPr id="16" name="Shape 14"/>
+          <p:cNvPr id="15" name="Shape 13"/>
           <p:cNvSpPr/>
           <p:nvPr/>
         </p:nvSpPr>
@@ -2532,7 +2493,7 @@
       </p:sp>
       <p:sp>
         <p:nvSpPr>
-          <p:cNvPr id="17" name="Shape 15"/>
+          <p:cNvPr id="16" name="Shape 14"/>
           <p:cNvSpPr/>
           <p:nvPr/>
         </p:nvSpPr>
@@ -2557,7 +2518,7 @@
       </p:sp>
       <p:sp>
         <p:nvSpPr>
-          <p:cNvPr id="18" name="Text 16"/>
+          <p:cNvPr id="17" name="Text 15"/>
           <p:cNvSpPr txBox="1"/>
           <p:nvPr/>
         </p:nvSpPr>
@@ -2596,7 +2557,7 @@
       </p:sp>
       <p:sp>
         <p:nvSpPr>
-          <p:cNvPr id="19" name="Text 17"/>
+          <p:cNvPr id="18" name="Text 16"/>
           <p:cNvSpPr txBox="1"/>
           <p:nvPr/>
         </p:nvSpPr>
@@ -2635,7 +2596,7 @@
       </p:sp>
       <p:sp>
         <p:nvSpPr>
-          <p:cNvPr id="20" name="Text 18"/>
+          <p:cNvPr id="19" name="Text 17"/>
           <p:cNvSpPr txBox="1"/>
           <p:nvPr/>
         </p:nvSpPr>
@@ -2680,7 +2641,7 @@
       </p:sp>
       <p:sp>
         <p:nvSpPr>
-          <p:cNvPr id="21" name="Text 19"/>
+          <p:cNvPr id="20" name="Text 18"/>
           <p:cNvSpPr txBox="1"/>
           <p:nvPr/>
         </p:nvSpPr>
@@ -2725,7 +2686,7 @@
       </p:sp>
       <p:sp>
         <p:nvSpPr>
-          <p:cNvPr id="22" name="Text 20"/>
+          <p:cNvPr id="21" name="Text 19"/>
           <p:cNvSpPr txBox="1"/>
           <p:nvPr/>
         </p:nvSpPr>
@@ -2770,7 +2731,7 @@
       </p:sp>
       <p:sp>
         <p:nvSpPr>
-          <p:cNvPr id="23" name="Text 21"/>
+          <p:cNvPr id="22" name="Text 20"/>
           <p:cNvSpPr txBox="1"/>
           <p:nvPr/>
         </p:nvSpPr>
@@ -2815,7 +2776,7 @@
       </p:sp>
       <p:sp>
         <p:nvSpPr>
-          <p:cNvPr id="24" name="Text 22"/>
+          <p:cNvPr id="23" name="Text 21"/>
           <p:cNvSpPr txBox="1"/>
           <p:nvPr/>
         </p:nvSpPr>
@@ -2882,7 +2843,7 @@
       </p:sp>
       <p:sp>
         <p:nvSpPr>
-          <p:cNvPr id="25" name="Text 23"/>
+          <p:cNvPr id="24" name="Text 22"/>
           <p:cNvSpPr txBox="1"/>
           <p:nvPr/>
         </p:nvSpPr>
@@ -2953,46 +2914,7 @@
       </p:grpSpPr>
       <p:sp>
         <p:nvSpPr>
-          <p:cNvPr id="2" name="Text 0"/>
-          <p:cNvSpPr txBox="1"/>
-          <p:nvPr/>
-        </p:nvSpPr>
-        <p:spPr>
-          <a:xfrm>
-            <a:off x="5760720" y="109728"/>
-            <a:ext cx="5897880" cy="256032"/>
-          </a:xfrm>
-          <a:prstGeom prst="rect">
-            <a:avLst/>
-          </a:prstGeom>
-          <a:noFill/>
-          <a:ln/>
-        </p:spPr>
-        <p:txBody>
-          <a:bodyPr wrap="square" lIns="0" tIns="0" rIns="0" bIns="0" rtlCol="0" anchor="t"/>
-          <a:lstStyle/>
-          <a:p>
-            <a:pPr algn="r" indent="0" marL="0">
-              <a:buNone/>
-            </a:pPr>
-            <a:r>
-              <a:rPr lang="en-US" sz="900" b="1" spc="100" kern="0" dirty="0">
-                <a:solidFill>
-                  <a:srgbClr val="8A93A3"/>
-                </a:solidFill>
-                <a:latin typeface="Calibri" pitchFamily="34" charset="0"/>
-                <a:ea typeface="Calibri" pitchFamily="34" charset="-122"/>
-                <a:cs typeface="Calibri" pitchFamily="34" charset="-120"/>
-              </a:rPr>
-              <a:t>SECTIONS 10–12 OF 12  ·  COSTS &amp; ROI  ·  METRICS  ·  RISKS &amp; ASSUMPTIONS</a:t>
-            </a:r>
-            <a:endParaRPr lang="en-US" sz="900" dirty="0"/>
-          </a:p>
-        </p:txBody>
-      </p:sp>
-      <p:sp>
-        <p:nvSpPr>
-          <p:cNvPr id="3" name="Shape 1"/>
+          <p:cNvPr id="2" name="Shape 0"/>
           <p:cNvSpPr/>
           <p:nvPr/>
         </p:nvSpPr>
@@ -3017,7 +2939,7 @@
       </p:sp>
       <p:sp>
         <p:nvSpPr>
-          <p:cNvPr id="4" name="Text 2"/>
+          <p:cNvPr id="3" name="Text 1"/>
           <p:cNvSpPr txBox="1"/>
           <p:nvPr/>
         </p:nvSpPr>
@@ -3056,7 +2978,7 @@
       </p:sp>
       <p:sp>
         <p:nvSpPr>
-          <p:cNvPr id="5" name="Text 3"/>
+          <p:cNvPr id="4" name="Text 2"/>
           <p:cNvSpPr txBox="1"/>
           <p:nvPr/>
         </p:nvSpPr>
@@ -3087,7 +3009,7 @@
                 <a:ea typeface="Cambria" pitchFamily="34" charset="-122"/>
                 <a:cs typeface="Cambria" pitchFamily="34" charset="-120"/>
               </a:rPr>
-              <a:t>Costs, ROI, Success Metrics &amp; Risks</a:t>
+              <a:t>Costs, Savings &amp; Revenue, Metrics &amp; Risks</a:t>
             </a:r>
             <a:endParaRPr lang="en-US" sz="3000" dirty="0"/>
           </a:p>
@@ -3095,7 +3017,7 @@
       </p:sp>
       <p:sp>
         <p:nvSpPr>
-          <p:cNvPr id="6" name="Text 4"/>
+          <p:cNvPr id="5" name="Text 3"/>
           <p:cNvSpPr txBox="1"/>
           <p:nvPr/>
         </p:nvSpPr>
@@ -3126,7 +3048,7 @@
                 <a:ea typeface="Calibri" pitchFamily="34" charset="-122"/>
                 <a:cs typeface="Calibri" pitchFamily="34" charset="-120"/>
               </a:rPr>
-              <a:t>What it costs to build and run, what it returns, how we measure it, and what could go wrong</a:t>
+              <a:t>What it costs, who gains what, how we measure it, and what could go wrong</a:t>
             </a:r>
             <a:endParaRPr lang="en-US" sz="1350" dirty="0"/>
           </a:p>
@@ -3134,7 +3056,7 @@
       </p:sp>
       <p:sp>
         <p:nvSpPr>
-          <p:cNvPr id="7" name="Shape 5"/>
+          <p:cNvPr id="6" name="Shape 4"/>
           <p:cNvSpPr/>
           <p:nvPr/>
         </p:nvSpPr>
@@ -3168,7 +3090,7 @@
       </p:sp>
       <p:sp>
         <p:nvSpPr>
-          <p:cNvPr id="8" name="Text 6"/>
+          <p:cNvPr id="7" name="Text 5"/>
           <p:cNvSpPr txBox="1"/>
           <p:nvPr/>
         </p:nvSpPr>
@@ -3215,7 +3137,7 @@
       </p:sp>
       <p:sp>
         <p:nvSpPr>
-          <p:cNvPr id="9" name="Text 7"/>
+          <p:cNvPr id="8" name="Text 6"/>
           <p:cNvSpPr txBox="1"/>
           <p:nvPr/>
         </p:nvSpPr>
@@ -3254,7 +3176,7 @@
       </p:sp>
       <p:sp>
         <p:nvSpPr>
-          <p:cNvPr id="10" name="Text 8"/>
+          <p:cNvPr id="9" name="Text 7"/>
           <p:cNvSpPr txBox="1"/>
           <p:nvPr/>
         </p:nvSpPr>
@@ -3293,7 +3215,7 @@
       </p:sp>
       <p:sp>
         <p:nvSpPr>
-          <p:cNvPr id="11" name="Text 9"/>
+          <p:cNvPr id="10" name="Text 8"/>
           <p:cNvSpPr txBox="1"/>
           <p:nvPr/>
         </p:nvSpPr>
@@ -3332,7 +3254,7 @@
       </p:sp>
       <p:sp>
         <p:nvSpPr>
-          <p:cNvPr id="12" name="Text 10"/>
+          <p:cNvPr id="11" name="Text 9"/>
           <p:cNvSpPr txBox="1"/>
           <p:nvPr/>
         </p:nvSpPr>
@@ -3371,7 +3293,7 @@
       </p:sp>
       <p:sp>
         <p:nvSpPr>
-          <p:cNvPr id="13" name="Text 11"/>
+          <p:cNvPr id="12" name="Text 10"/>
           <p:cNvSpPr txBox="1"/>
           <p:nvPr/>
         </p:nvSpPr>
@@ -3410,7 +3332,7 @@
       </p:sp>
       <p:sp>
         <p:nvSpPr>
-          <p:cNvPr id="14" name="Shape 12"/>
+          <p:cNvPr id="13" name="Shape 11"/>
           <p:cNvSpPr/>
           <p:nvPr/>
         </p:nvSpPr>
@@ -3435,7 +3357,7 @@
       </p:sp>
       <p:sp>
         <p:nvSpPr>
-          <p:cNvPr id="15" name="Text 13"/>
+          <p:cNvPr id="14" name="Text 12"/>
           <p:cNvSpPr txBox="1"/>
           <p:nvPr/>
         </p:nvSpPr>
@@ -3474,7 +3396,7 @@
       </p:sp>
       <p:sp>
         <p:nvSpPr>
-          <p:cNvPr id="16" name="Text 14"/>
+          <p:cNvPr id="15" name="Text 13"/>
           <p:cNvSpPr txBox="1"/>
           <p:nvPr/>
         </p:nvSpPr>
@@ -3513,7 +3435,7 @@
       </p:sp>
       <p:sp>
         <p:nvSpPr>
-          <p:cNvPr id="17" name="Shape 15"/>
+          <p:cNvPr id="16" name="Shape 14"/>
           <p:cNvSpPr/>
           <p:nvPr/>
         </p:nvSpPr>
@@ -3538,7 +3460,7 @@
       </p:sp>
       <p:sp>
         <p:nvSpPr>
-          <p:cNvPr id="18" name="Text 16"/>
+          <p:cNvPr id="17" name="Text 15"/>
           <p:cNvSpPr txBox="1"/>
           <p:nvPr/>
         </p:nvSpPr>
@@ -3577,7 +3499,7 @@
       </p:sp>
       <p:sp>
         <p:nvSpPr>
-          <p:cNvPr id="19" name="Text 17"/>
+          <p:cNvPr id="18" name="Text 16"/>
           <p:cNvSpPr txBox="1"/>
           <p:nvPr/>
         </p:nvSpPr>
@@ -3616,7 +3538,7 @@
       </p:sp>
       <p:sp>
         <p:nvSpPr>
-          <p:cNvPr id="20" name="Shape 18"/>
+          <p:cNvPr id="19" name="Shape 17"/>
           <p:cNvSpPr/>
           <p:nvPr/>
         </p:nvSpPr>
@@ -3641,7 +3563,7 @@
       </p:sp>
       <p:sp>
         <p:nvSpPr>
-          <p:cNvPr id="21" name="Text 19"/>
+          <p:cNvPr id="20" name="Text 18"/>
           <p:cNvSpPr txBox="1"/>
           <p:nvPr/>
         </p:nvSpPr>
@@ -3680,7 +3602,7 @@
       </p:sp>
       <p:sp>
         <p:nvSpPr>
-          <p:cNvPr id="22" name="Text 20"/>
+          <p:cNvPr id="21" name="Text 19"/>
           <p:cNvSpPr txBox="1"/>
           <p:nvPr/>
         </p:nvSpPr>
@@ -3719,7 +3641,7 @@
       </p:sp>
       <p:sp>
         <p:nvSpPr>
-          <p:cNvPr id="23" name="Shape 21"/>
+          <p:cNvPr id="22" name="Shape 20"/>
           <p:cNvSpPr/>
           <p:nvPr/>
         </p:nvSpPr>
@@ -3744,7 +3666,7 @@
       </p:sp>
       <p:sp>
         <p:nvSpPr>
-          <p:cNvPr id="24" name="Text 22"/>
+          <p:cNvPr id="23" name="Text 21"/>
           <p:cNvSpPr txBox="1"/>
           <p:nvPr/>
         </p:nvSpPr>
@@ -3783,7 +3705,7 @@
       </p:sp>
       <p:sp>
         <p:nvSpPr>
-          <p:cNvPr id="25" name="Text 23"/>
+          <p:cNvPr id="24" name="Text 22"/>
           <p:cNvSpPr txBox="1"/>
           <p:nvPr/>
         </p:nvSpPr>
@@ -3822,7 +3744,7 @@
       </p:sp>
       <p:sp>
         <p:nvSpPr>
-          <p:cNvPr id="26" name="Shape 24"/>
+          <p:cNvPr id="25" name="Shape 23"/>
           <p:cNvSpPr/>
           <p:nvPr/>
         </p:nvSpPr>
@@ -3847,7 +3769,7 @@
       </p:sp>
       <p:sp>
         <p:nvSpPr>
-          <p:cNvPr id="27" name="Text 25"/>
+          <p:cNvPr id="26" name="Text 24"/>
           <p:cNvSpPr txBox="1"/>
           <p:nvPr/>
         </p:nvSpPr>
@@ -3886,7 +3808,7 @@
       </p:sp>
       <p:sp>
         <p:nvSpPr>
-          <p:cNvPr id="28" name="Text 26"/>
+          <p:cNvPr id="27" name="Text 25"/>
           <p:cNvSpPr txBox="1"/>
           <p:nvPr/>
         </p:nvSpPr>
@@ -3925,7 +3847,7 @@
       </p:sp>
       <p:sp>
         <p:nvSpPr>
-          <p:cNvPr id="29" name="Shape 27"/>
+          <p:cNvPr id="28" name="Shape 26"/>
           <p:cNvSpPr/>
           <p:nvPr/>
         </p:nvSpPr>
@@ -3950,7 +3872,7 @@
       </p:sp>
       <p:sp>
         <p:nvSpPr>
-          <p:cNvPr id="30" name="Text 28"/>
+          <p:cNvPr id="29" name="Text 27"/>
           <p:cNvSpPr txBox="1"/>
           <p:nvPr/>
         </p:nvSpPr>
@@ -3989,7 +3911,7 @@
       </p:sp>
       <p:sp>
         <p:nvSpPr>
-          <p:cNvPr id="31" name="Text 29"/>
+          <p:cNvPr id="30" name="Text 28"/>
           <p:cNvSpPr txBox="1"/>
           <p:nvPr/>
         </p:nvSpPr>
@@ -4028,7 +3950,7 @@
       </p:sp>
       <p:sp>
         <p:nvSpPr>
-          <p:cNvPr id="32" name="Text 30"/>
+          <p:cNvPr id="31" name="Text 29"/>
           <p:cNvSpPr txBox="1"/>
           <p:nvPr/>
         </p:nvSpPr>
@@ -4067,7 +3989,7 @@
       </p:sp>
       <p:sp>
         <p:nvSpPr>
-          <p:cNvPr id="33" name="Shape 31"/>
+          <p:cNvPr id="32" name="Shape 30"/>
           <p:cNvSpPr/>
           <p:nvPr/>
         </p:nvSpPr>
@@ -4101,7 +4023,7 @@
       </p:sp>
       <p:sp>
         <p:nvSpPr>
-          <p:cNvPr id="34" name="Text 32"/>
+          <p:cNvPr id="33" name="Text 31"/>
           <p:cNvSpPr txBox="1"/>
           <p:nvPr/>
         </p:nvSpPr>
@@ -4148,7 +4070,7 @@
       </p:sp>
       <p:sp>
         <p:nvSpPr>
-          <p:cNvPr id="35" name="Text 33"/>
+          <p:cNvPr id="34" name="Text 32"/>
           <p:cNvSpPr txBox="1"/>
           <p:nvPr/>
         </p:nvSpPr>
@@ -4187,7 +4109,7 @@
       </p:sp>
       <p:sp>
         <p:nvSpPr>
-          <p:cNvPr id="36" name="Text 34"/>
+          <p:cNvPr id="35" name="Text 33"/>
           <p:cNvSpPr txBox="1"/>
           <p:nvPr/>
         </p:nvSpPr>
@@ -4226,7 +4148,7 @@
       </p:sp>
       <p:sp>
         <p:nvSpPr>
-          <p:cNvPr id="37" name="Text 35"/>
+          <p:cNvPr id="36" name="Text 34"/>
           <p:cNvSpPr txBox="1"/>
           <p:nvPr/>
         </p:nvSpPr>
@@ -4265,7 +4187,7 @@
       </p:sp>
       <p:sp>
         <p:nvSpPr>
-          <p:cNvPr id="38" name="Shape 36"/>
+          <p:cNvPr id="37" name="Shape 35"/>
           <p:cNvSpPr/>
           <p:nvPr/>
         </p:nvSpPr>
@@ -4290,7 +4212,7 @@
       </p:sp>
       <p:sp>
         <p:nvSpPr>
-          <p:cNvPr id="39" name="Text 37"/>
+          <p:cNvPr id="38" name="Text 36"/>
           <p:cNvSpPr txBox="1"/>
           <p:nvPr/>
         </p:nvSpPr>
@@ -4329,7 +4251,7 @@
       </p:sp>
       <p:sp>
         <p:nvSpPr>
-          <p:cNvPr id="40" name="Text 38"/>
+          <p:cNvPr id="39" name="Text 37"/>
           <p:cNvSpPr txBox="1"/>
           <p:nvPr/>
         </p:nvSpPr>
@@ -4368,7 +4290,7 @@
       </p:sp>
       <p:sp>
         <p:nvSpPr>
-          <p:cNvPr id="41" name="Text 39"/>
+          <p:cNvPr id="40" name="Text 38"/>
           <p:cNvSpPr txBox="1"/>
           <p:nvPr/>
         </p:nvSpPr>
@@ -4407,7 +4329,7 @@
       </p:sp>
       <p:sp>
         <p:nvSpPr>
-          <p:cNvPr id="42" name="Shape 40"/>
+          <p:cNvPr id="41" name="Shape 39"/>
           <p:cNvSpPr/>
           <p:nvPr/>
         </p:nvSpPr>
@@ -4432,7 +4354,7 @@
       </p:sp>
       <p:sp>
         <p:nvSpPr>
-          <p:cNvPr id="43" name="Text 41"/>
+          <p:cNvPr id="42" name="Text 40"/>
           <p:cNvSpPr txBox="1"/>
           <p:nvPr/>
         </p:nvSpPr>
@@ -4471,7 +4393,7 @@
       </p:sp>
       <p:sp>
         <p:nvSpPr>
-          <p:cNvPr id="44" name="Text 42"/>
+          <p:cNvPr id="43" name="Text 41"/>
           <p:cNvSpPr txBox="1"/>
           <p:nvPr/>
         </p:nvSpPr>
@@ -4510,7 +4432,7 @@
       </p:sp>
       <p:sp>
         <p:nvSpPr>
-          <p:cNvPr id="45" name="Text 43"/>
+          <p:cNvPr id="44" name="Text 42"/>
           <p:cNvSpPr txBox="1"/>
           <p:nvPr/>
         </p:nvSpPr>
@@ -4549,7 +4471,7 @@
       </p:sp>
       <p:sp>
         <p:nvSpPr>
-          <p:cNvPr id="46" name="Shape 44"/>
+          <p:cNvPr id="45" name="Shape 43"/>
           <p:cNvSpPr/>
           <p:nvPr/>
         </p:nvSpPr>
@@ -4574,7 +4496,7 @@
       </p:sp>
       <p:sp>
         <p:nvSpPr>
-          <p:cNvPr id="47" name="Text 45"/>
+          <p:cNvPr id="46" name="Text 44"/>
           <p:cNvSpPr txBox="1"/>
           <p:nvPr/>
         </p:nvSpPr>
@@ -4613,7 +4535,7 @@
       </p:sp>
       <p:sp>
         <p:nvSpPr>
-          <p:cNvPr id="48" name="Text 46"/>
+          <p:cNvPr id="47" name="Text 45"/>
           <p:cNvSpPr txBox="1"/>
           <p:nvPr/>
         </p:nvSpPr>
@@ -4652,7 +4574,7 @@
       </p:sp>
       <p:sp>
         <p:nvSpPr>
-          <p:cNvPr id="49" name="Text 47"/>
+          <p:cNvPr id="48" name="Text 46"/>
           <p:cNvSpPr txBox="1"/>
           <p:nvPr/>
         </p:nvSpPr>
@@ -4691,7 +4613,7 @@
       </p:sp>
       <p:sp>
         <p:nvSpPr>
-          <p:cNvPr id="50" name="Shape 48"/>
+          <p:cNvPr id="49" name="Shape 47"/>
           <p:cNvSpPr/>
           <p:nvPr/>
         </p:nvSpPr>
@@ -4716,7 +4638,7 @@
       </p:sp>
       <p:sp>
         <p:nvSpPr>
-          <p:cNvPr id="51" name="Text 49"/>
+          <p:cNvPr id="50" name="Text 48"/>
           <p:cNvSpPr txBox="1"/>
           <p:nvPr/>
         </p:nvSpPr>
@@ -4755,7 +4677,7 @@
       </p:sp>
       <p:sp>
         <p:nvSpPr>
-          <p:cNvPr id="52" name="Text 50"/>
+          <p:cNvPr id="51" name="Text 49"/>
           <p:cNvSpPr txBox="1"/>
           <p:nvPr/>
         </p:nvSpPr>
@@ -4794,7 +4716,7 @@
       </p:sp>
       <p:sp>
         <p:nvSpPr>
-          <p:cNvPr id="53" name="Text 51"/>
+          <p:cNvPr id="52" name="Text 50"/>
           <p:cNvSpPr txBox="1"/>
           <p:nvPr/>
         </p:nvSpPr>
@@ -4833,7 +4755,7 @@
       </p:sp>
       <p:sp>
         <p:nvSpPr>
-          <p:cNvPr id="54" name="Shape 52"/>
+          <p:cNvPr id="53" name="Shape 51"/>
           <p:cNvSpPr/>
           <p:nvPr/>
         </p:nvSpPr>
@@ -4858,7 +4780,7 @@
       </p:sp>
       <p:sp>
         <p:nvSpPr>
-          <p:cNvPr id="55" name="Text 53"/>
+          <p:cNvPr id="54" name="Text 52"/>
           <p:cNvSpPr txBox="1"/>
           <p:nvPr/>
         </p:nvSpPr>
@@ -4897,7 +4819,7 @@
       </p:sp>
       <p:sp>
         <p:nvSpPr>
-          <p:cNvPr id="56" name="Text 54"/>
+          <p:cNvPr id="55" name="Text 53"/>
           <p:cNvSpPr txBox="1"/>
           <p:nvPr/>
         </p:nvSpPr>
@@ -4936,7 +4858,7 @@
       </p:sp>
       <p:sp>
         <p:nvSpPr>
-          <p:cNvPr id="57" name="Text 55"/>
+          <p:cNvPr id="56" name="Text 54"/>
           <p:cNvSpPr txBox="1"/>
           <p:nvPr/>
         </p:nvSpPr>
@@ -4975,7 +4897,7 @@
       </p:sp>
       <p:sp>
         <p:nvSpPr>
-          <p:cNvPr id="58" name="Shape 56"/>
+          <p:cNvPr id="57" name="Shape 55"/>
           <p:cNvSpPr/>
           <p:nvPr/>
         </p:nvSpPr>
@@ -5000,7 +4922,7 @@
       </p:sp>
       <p:sp>
         <p:nvSpPr>
-          <p:cNvPr id="59" name="Text 57"/>
+          <p:cNvPr id="58" name="Text 56"/>
           <p:cNvSpPr txBox="1"/>
           <p:nvPr/>
         </p:nvSpPr>
@@ -5039,7 +4961,7 @@
       </p:sp>
       <p:sp>
         <p:nvSpPr>
-          <p:cNvPr id="60" name="Text 58"/>
+          <p:cNvPr id="59" name="Text 57"/>
           <p:cNvSpPr txBox="1"/>
           <p:nvPr/>
         </p:nvSpPr>
@@ -5078,7 +5000,7 @@
       </p:sp>
       <p:sp>
         <p:nvSpPr>
-          <p:cNvPr id="61" name="Text 59"/>
+          <p:cNvPr id="60" name="Text 58"/>
           <p:cNvSpPr txBox="1"/>
           <p:nvPr/>
         </p:nvSpPr>
@@ -5117,7 +5039,7 @@
       </p:sp>
       <p:sp>
         <p:nvSpPr>
-          <p:cNvPr id="62" name="Shape 60"/>
+          <p:cNvPr id="61" name="Shape 59"/>
           <p:cNvSpPr/>
           <p:nvPr/>
         </p:nvSpPr>
@@ -5142,7 +5064,7 @@
       </p:sp>
       <p:sp>
         <p:nvSpPr>
-          <p:cNvPr id="63" name="Text 61"/>
+          <p:cNvPr id="62" name="Text 60"/>
           <p:cNvSpPr txBox="1"/>
           <p:nvPr/>
         </p:nvSpPr>
@@ -5181,7 +5103,7 @@
       </p:sp>
       <p:sp>
         <p:nvSpPr>
-          <p:cNvPr id="64" name="Text 62"/>
+          <p:cNvPr id="63" name="Text 61"/>
           <p:cNvSpPr txBox="1"/>
           <p:nvPr/>
         </p:nvSpPr>
@@ -5220,7 +5142,7 @@
       </p:sp>
       <p:sp>
         <p:nvSpPr>
-          <p:cNvPr id="65" name="Text 63"/>
+          <p:cNvPr id="64" name="Text 62"/>
           <p:cNvSpPr txBox="1"/>
           <p:nvPr/>
         </p:nvSpPr>
@@ -5259,7 +5181,7 @@
       </p:sp>
       <p:sp>
         <p:nvSpPr>
-          <p:cNvPr id="66" name="Text 64"/>
+          <p:cNvPr id="65" name="Text 63"/>
           <p:cNvSpPr txBox="1"/>
           <p:nvPr/>
         </p:nvSpPr>
@@ -5298,7 +5220,7 @@
       </p:sp>
       <p:sp>
         <p:nvSpPr>
-          <p:cNvPr id="67" name="Shape 65"/>
+          <p:cNvPr id="66" name="Shape 64"/>
           <p:cNvSpPr/>
           <p:nvPr/>
         </p:nvSpPr>
@@ -5332,7 +5254,7 @@
       </p:sp>
       <p:sp>
         <p:nvSpPr>
-          <p:cNvPr id="68" name="Text 66"/>
+          <p:cNvPr id="67" name="Text 65"/>
           <p:cNvSpPr txBox="1"/>
           <p:nvPr/>
         </p:nvSpPr>
@@ -5379,7 +5301,7 @@
       </p:sp>
       <p:sp>
         <p:nvSpPr>
-          <p:cNvPr id="69" name="Text 67"/>
+          <p:cNvPr id="68" name="Text 66"/>
           <p:cNvSpPr txBox="1"/>
           <p:nvPr/>
         </p:nvSpPr>
@@ -5418,7 +5340,7 @@
       </p:sp>
       <p:sp>
         <p:nvSpPr>
-          <p:cNvPr id="70" name="Text 68"/>
+          <p:cNvPr id="69" name="Text 67"/>
           <p:cNvSpPr txBox="1"/>
           <p:nvPr/>
         </p:nvSpPr>
@@ -5474,7 +5396,7 @@
       </p:sp>
       <p:sp>
         <p:nvSpPr>
-          <p:cNvPr id="71" name="Text 69"/>
+          <p:cNvPr id="70" name="Text 68"/>
           <p:cNvSpPr txBox="1"/>
           <p:nvPr/>
         </p:nvSpPr>
@@ -5530,7 +5452,7 @@
       </p:sp>
       <p:sp>
         <p:nvSpPr>
-          <p:cNvPr id="72" name="Text 70"/>
+          <p:cNvPr id="71" name="Text 69"/>
           <p:cNvSpPr txBox="1"/>
           <p:nvPr/>
         </p:nvSpPr>
@@ -5586,7 +5508,7 @@
       </p:sp>
       <p:sp>
         <p:nvSpPr>
-          <p:cNvPr id="73" name="Text 71"/>
+          <p:cNvPr id="72" name="Text 70"/>
           <p:cNvSpPr txBox="1"/>
           <p:nvPr/>
         </p:nvSpPr>
@@ -5642,7 +5564,7 @@
       </p:sp>
       <p:sp>
         <p:nvSpPr>
-          <p:cNvPr id="74" name="Text 72"/>
+          <p:cNvPr id="73" name="Text 71"/>
           <p:cNvSpPr txBox="1"/>
           <p:nvPr/>
         </p:nvSpPr>
@@ -5681,7 +5603,7 @@
       </p:sp>
       <p:sp>
         <p:nvSpPr>
-          <p:cNvPr id="75" name="Text 73"/>
+          <p:cNvPr id="74" name="Text 72"/>
           <p:cNvSpPr txBox="1"/>
           <p:nvPr/>
         </p:nvSpPr>
@@ -5766,7 +5688,7 @@
       </p:sp>
       <p:sp>
         <p:nvSpPr>
-          <p:cNvPr id="76" name="Shape 74"/>
+          <p:cNvPr id="75" name="Shape 73"/>
           <p:cNvSpPr/>
           <p:nvPr/>
         </p:nvSpPr>
@@ -5800,14 +5722,53 @@
       </p:sp>
       <p:sp>
         <p:nvSpPr>
+          <p:cNvPr id="76" name="Text 74"/>
+          <p:cNvSpPr txBox="1"/>
+          <p:nvPr/>
+        </p:nvSpPr>
+        <p:spPr>
+          <a:xfrm>
+            <a:off x="777240" y="5175504"/>
+            <a:ext cx="4572000" cy="237744"/>
+          </a:xfrm>
+          <a:prstGeom prst="rect">
+            <a:avLst/>
+          </a:prstGeom>
+          <a:noFill/>
+          <a:ln/>
+        </p:spPr>
+        <p:txBody>
+          <a:bodyPr wrap="square" lIns="0" tIns="0" rIns="0" bIns="0" rtlCol="0" anchor="t"/>
+          <a:lstStyle/>
+          <a:p>
+            <a:pPr indent="0" marL="0">
+              <a:buNone/>
+            </a:pPr>
+            <a:r>
+              <a:rPr lang="en-US" sz="1050" b="1" spc="100" kern="0" dirty="0">
+                <a:solidFill>
+                  <a:srgbClr val="F4A300"/>
+                </a:solidFill>
+                <a:latin typeface="Calibri" pitchFamily="34" charset="0"/>
+                <a:ea typeface="Calibri" pitchFamily="34" charset="-122"/>
+                <a:cs typeface="Calibri" pitchFamily="34" charset="-120"/>
+              </a:rPr>
+              <a:t>WHO GAINS WHAT IN YEAR 1</a:t>
+            </a:r>
+            <a:endParaRPr lang="en-US" sz="1050" dirty="0"/>
+          </a:p>
+        </p:txBody>
+      </p:sp>
+      <p:sp>
+        <p:nvSpPr>
           <p:cNvPr id="77" name="Text 75"/>
           <p:cNvSpPr txBox="1"/>
           <p:nvPr/>
         </p:nvSpPr>
         <p:spPr>
           <a:xfrm>
-            <a:off x="777240" y="5148072"/>
-            <a:ext cx="2743200" cy="237744"/>
+            <a:off x="4754880" y="5175504"/>
+            <a:ext cx="6675120" cy="237744"/>
           </a:xfrm>
           <a:prstGeom prst="rect">
             <a:avLst/>
@@ -5819,34 +5780,61 @@
           <a:bodyPr wrap="square" lIns="0" tIns="0" rIns="0" bIns="0" rtlCol="0" anchor="t"/>
           <a:lstStyle/>
           <a:p>
-            <a:pPr indent="0" marL="0">
-              <a:buNone/>
-            </a:pPr>
-            <a:r>
-              <a:rPr lang="en-US" sz="1050" b="1" spc="100" kern="0" dirty="0">
-                <a:solidFill>
-                  <a:srgbClr val="F4A300"/>
-                </a:solidFill>
-                <a:latin typeface="Calibri" pitchFamily="34" charset="0"/>
-                <a:ea typeface="Calibri" pitchFamily="34" charset="-122"/>
-                <a:cs typeface="Calibri" pitchFamily="34" charset="-120"/>
-              </a:rPr>
-              <a:t>RETURN ON INVESTMENT</a:t>
-            </a:r>
-            <a:endParaRPr lang="en-US" sz="1050" dirty="0"/>
-          </a:p>
-        </p:txBody>
-      </p:sp>
-      <p:sp>
-        <p:nvSpPr>
-          <p:cNvPr id="78" name="Text 76"/>
-          <p:cNvSpPr txBox="1"/>
-          <p:nvPr/>
-        </p:nvSpPr>
-        <p:spPr>
-          <a:xfrm>
-            <a:off x="3291840" y="5148072"/>
-            <a:ext cx="8138160" cy="237744"/>
+            <a:pPr algn="r" indent="0" marL="0">
+              <a:buNone/>
+            </a:pPr>
+            <a:r>
+              <a:rPr lang="en-US" sz="850" i="1" dirty="0">
+                <a:solidFill>
+                  <a:srgbClr val="8FA0BF"/>
+                </a:solidFill>
+                <a:latin typeface="Calibri" pitchFamily="34" charset="0"/>
+                <a:ea typeface="Calibri" pitchFamily="34" charset="-122"/>
+                <a:cs typeface="Calibri" pitchFamily="34" charset="-120"/>
+              </a:rPr>
+              <a:t>illustrative · 48% misfire rate measured, volumes assumed · details in speaker notes</a:t>
+            </a:r>
+            <a:endParaRPr lang="en-US" sz="850" dirty="0"/>
+          </a:p>
+        </p:txBody>
+      </p:sp>
+      <p:sp>
+        <p:nvSpPr>
+          <p:cNvPr id="78" name="Shape 76"/>
+          <p:cNvSpPr/>
+          <p:nvPr/>
+        </p:nvSpPr>
+        <p:spPr>
+          <a:xfrm>
+            <a:off x="777240" y="5468112"/>
+            <a:ext cx="3246120" cy="822960"/>
+          </a:xfrm>
+          <a:prstGeom prst="roundRect">
+            <a:avLst>
+              <a:gd name="adj" fmla="val 8889"/>
+            </a:avLst>
+          </a:prstGeom>
+          <a:solidFill>
+            <a:srgbClr val="1F3057"/>
+          </a:solidFill>
+          <a:ln w="15875">
+            <a:solidFill>
+              <a:srgbClr val="1F8A63"/>
+            </a:solidFill>
+            <a:prstDash val="solid"/>
+          </a:ln>
+        </p:spPr>
+      </p:sp>
+      <p:sp>
+        <p:nvSpPr>
+          <p:cNvPr id="79" name="Text 77"/>
+          <p:cNvSpPr txBox="1"/>
+          <p:nvPr/>
+        </p:nvSpPr>
+        <p:spPr>
+          <a:xfrm>
+            <a:off x="914400" y="5504688"/>
+            <a:ext cx="3017520" cy="237744"/>
           </a:xfrm>
           <a:prstGeom prst="rect">
             <a:avLst/>
@@ -5858,19 +5846,19 @@
           <a:bodyPr wrap="square" lIns="0" tIns="0" rIns="0" bIns="0" rtlCol="0" anchor="t"/>
           <a:lstStyle/>
           <a:p>
-            <a:pPr algn="r" indent="0" marL="0">
-              <a:buNone/>
-            </a:pPr>
-            <a:r>
-              <a:rPr lang="en-US" sz="900" i="1" dirty="0">
-                <a:solidFill>
-                  <a:srgbClr val="8FA0BF"/>
-                </a:solidFill>
-                <a:latin typeface="Calibri" pitchFamily="34" charset="0"/>
-                <a:ea typeface="Calibri" pitchFamily="34" charset="-122"/>
-                <a:cs typeface="Calibri" pitchFamily="34" charset="-120"/>
-              </a:rPr>
-              <a:t>illustrative · full assumptions in speaker notes · validated in the pilot</a:t>
+            <a:pPr indent="0" marL="0">
+              <a:buNone/>
+            </a:pPr>
+            <a:r>
+              <a:rPr lang="en-US" sz="900" b="1" spc="100" kern="0" dirty="0">
+                <a:solidFill>
+                  <a:srgbClr val="1F8A63"/>
+                </a:solidFill>
+                <a:latin typeface="Calibri" pitchFamily="34" charset="0"/>
+                <a:ea typeface="Calibri" pitchFamily="34" charset="-122"/>
+                <a:cs typeface="Calibri" pitchFamily="34" charset="-120"/>
+              </a:rPr>
+              <a:t>BRANDS SAVE</a:t>
             </a:r>
             <a:endParaRPr lang="en-US" sz="900" dirty="0"/>
           </a:p>
@@ -5878,14 +5866,14 @@
       </p:sp>
       <p:sp>
         <p:nvSpPr>
-          <p:cNvPr id="79" name="Text 77"/>
-          <p:cNvSpPr txBox="1"/>
-          <p:nvPr/>
-        </p:nvSpPr>
-        <p:spPr>
-          <a:xfrm>
-            <a:off x="777240" y="5376672"/>
-            <a:ext cx="1234440" cy="566928"/>
+          <p:cNvPr id="80" name="Text 78"/>
+          <p:cNvSpPr txBox="1"/>
+          <p:nvPr/>
+        </p:nvSpPr>
+        <p:spPr>
+          <a:xfrm>
+            <a:off x="914400" y="5733288"/>
+            <a:ext cx="1325880" cy="502920"/>
           </a:xfrm>
           <a:prstGeom prst="rect">
             <a:avLst/>
@@ -5903,13 +5891,13 @@
             <a:r>
               <a:rPr lang="en-US" sz="2200" b="1" dirty="0">
                 <a:solidFill>
-                  <a:srgbClr val="F4A300"/>
+                  <a:srgbClr val="FFFFFF"/>
                 </a:solidFill>
                 <a:latin typeface="Cambria" pitchFamily="34" charset="0"/>
                 <a:ea typeface="Cambria" pitchFamily="34" charset="-122"/>
                 <a:cs typeface="Cambria" pitchFamily="34" charset="-120"/>
               </a:rPr>
-              <a:t>~3.8×</a:t>
+              <a:t>≈ ₹6 Cr</a:t>
             </a:r>
             <a:endParaRPr lang="en-US" sz="2200" dirty="0"/>
           </a:p>
@@ -5917,14 +5905,14 @@
       </p:sp>
       <p:sp>
         <p:nvSpPr>
-          <p:cNvPr id="80" name="Text 78"/>
-          <p:cNvSpPr txBox="1"/>
-          <p:nvPr/>
-        </p:nvSpPr>
-        <p:spPr>
-          <a:xfrm>
-            <a:off x="2039112" y="5376672"/>
-            <a:ext cx="1417320" cy="566928"/>
+          <p:cNvPr id="81" name="Text 79"/>
+          <p:cNvSpPr txBox="1"/>
+          <p:nvPr/>
+        </p:nvSpPr>
+        <p:spPr>
+          <a:xfrm>
+            <a:off x="2240280" y="5715000"/>
+            <a:ext cx="1719072" cy="548640"/>
           </a:xfrm>
           <a:prstGeom prst="rect">
             <a:avLst/>
@@ -5940,71 +5928,144 @@
               <a:buNone/>
             </a:pPr>
             <a:r>
-              <a:rPr lang="en-US" sz="950" b="1" dirty="0">
+              <a:rPr lang="en-US" sz="900" dirty="0">
+                <a:solidFill>
+                  <a:srgbClr val="CADCFC"/>
+                </a:solidFill>
+                <a:latin typeface="Calibri" pitchFamily="34" charset="0"/>
+                <a:ea typeface="Calibri" pitchFamily="34" charset="-122"/>
+                <a:cs typeface="Calibri" pitchFamily="34" charset="-120"/>
+              </a:rPr>
+              <a:t>wrong refunds &amp; cancellations avoided · ₹3.8 saved for every ₹1 paid</a:t>
+            </a:r>
+            <a:endParaRPr lang="en-US" sz="900" dirty="0"/>
+          </a:p>
+        </p:txBody>
+      </p:sp>
+      <p:sp>
+        <p:nvSpPr>
+          <p:cNvPr id="82" name="Shape 80"/>
+          <p:cNvSpPr/>
+          <p:nvPr/>
+        </p:nvSpPr>
+        <p:spPr>
+          <a:xfrm>
+            <a:off x="4023360" y="5879592"/>
+            <a:ext cx="411480" cy="914"/>
+          </a:xfrm>
+          <a:prstGeom prst="line">
+            <a:avLst/>
+          </a:prstGeom>
+          <a:noFill/>
+          <a:ln w="31750">
+            <a:solidFill>
+              <a:srgbClr val="1F8A63"/>
+            </a:solidFill>
+            <a:prstDash val="solid"/>
+            <a:tailEnd type="triangle"/>
+          </a:ln>
+        </p:spPr>
+      </p:sp>
+      <p:sp>
+        <p:nvSpPr>
+          <p:cNvPr id="83" name="Shape 81"/>
+          <p:cNvSpPr/>
+          <p:nvPr/>
+        </p:nvSpPr>
+        <p:spPr>
+          <a:xfrm>
+            <a:off x="4434840" y="5468112"/>
+            <a:ext cx="3246120" cy="822960"/>
+          </a:xfrm>
+          <a:prstGeom prst="roundRect">
+            <a:avLst>
+              <a:gd name="adj" fmla="val 8889"/>
+            </a:avLst>
+          </a:prstGeom>
+          <a:solidFill>
+            <a:srgbClr val="1F3057"/>
+          </a:solidFill>
+          <a:ln w="15875">
+            <a:solidFill>
+              <a:srgbClr val="F4A300"/>
+            </a:solidFill>
+            <a:prstDash val="solid"/>
+          </a:ln>
+        </p:spPr>
+      </p:sp>
+      <p:sp>
+        <p:nvSpPr>
+          <p:cNvPr id="84" name="Text 82"/>
+          <p:cNvSpPr txBox="1"/>
+          <p:nvPr/>
+        </p:nvSpPr>
+        <p:spPr>
+          <a:xfrm>
+            <a:off x="4572000" y="5504688"/>
+            <a:ext cx="3017520" cy="237744"/>
+          </a:xfrm>
+          <a:prstGeom prst="rect">
+            <a:avLst/>
+          </a:prstGeom>
+          <a:noFill/>
+          <a:ln/>
+        </p:spPr>
+        <p:txBody>
+          <a:bodyPr wrap="square" lIns="0" tIns="0" rIns="0" bIns="0" rtlCol="0" anchor="t"/>
+          <a:lstStyle/>
+          <a:p>
+            <a:pPr indent="0" marL="0">
+              <a:buNone/>
+            </a:pPr>
+            <a:r>
+              <a:rPr lang="en-US" sz="900" b="1" spc="100" kern="0" dirty="0">
+                <a:solidFill>
+                  <a:srgbClr val="F4A300"/>
+                </a:solidFill>
+                <a:latin typeface="Calibri" pitchFamily="34" charset="0"/>
+                <a:ea typeface="Calibri" pitchFamily="34" charset="-122"/>
+                <a:cs typeface="Calibri" pitchFamily="34" charset="-120"/>
+              </a:rPr>
+              <a:t>FRESHWORKS EARNS</a:t>
+            </a:r>
+            <a:endParaRPr lang="en-US" sz="900" dirty="0"/>
+          </a:p>
+        </p:txBody>
+      </p:sp>
+      <p:sp>
+        <p:nvSpPr>
+          <p:cNvPr id="85" name="Text 83"/>
+          <p:cNvSpPr txBox="1"/>
+          <p:nvPr/>
+        </p:nvSpPr>
+        <p:spPr>
+          <a:xfrm>
+            <a:off x="4572000" y="5733288"/>
+            <a:ext cx="1325880" cy="502920"/>
+          </a:xfrm>
+          <a:prstGeom prst="rect">
+            <a:avLst/>
+          </a:prstGeom>
+          <a:noFill/>
+          <a:ln/>
+        </p:spPr>
+        <p:txBody>
+          <a:bodyPr wrap="square" lIns="0" tIns="0" rIns="0" bIns="0" rtlCol="0" anchor="ctr"/>
+          <a:lstStyle/>
+          <a:p>
+            <a:pPr indent="0" marL="0">
+              <a:buNone/>
+            </a:pPr>
+            <a:r>
+              <a:rPr lang="en-US" sz="2200" b="1" dirty="0">
                 <a:solidFill>
                   <a:srgbClr val="FFFFFF"/>
-                </a:solidFill>
-                <a:latin typeface="Calibri" pitchFamily="34" charset="0"/>
-                <a:ea typeface="Calibri" pitchFamily="34" charset="-122"/>
-                <a:cs typeface="Calibri" pitchFamily="34" charset="-120"/>
-              </a:rPr>
-              <a:t>Customer ROI</a:t>
-            </a:r>
-            <a:endParaRPr lang="en-US" sz="950" dirty="0"/>
-          </a:p>
-          <a:p>
-            <a:pPr indent="0" marL="0">
-              <a:buNone/>
-            </a:pPr>
-            <a:r>
-              <a:rPr lang="en-US" sz="950" dirty="0">
-                <a:solidFill>
-                  <a:srgbClr val="CADCFC"/>
-                </a:solidFill>
-                <a:latin typeface="Calibri" pitchFamily="34" charset="0"/>
-                <a:ea typeface="Calibri" pitchFamily="34" charset="-122"/>
-                <a:cs typeface="Calibri" pitchFamily="34" charset="-120"/>
-              </a:rPr>
-              <a:t>₹1.9L saved vs ₹51K fee / month</a:t>
-            </a:r>
-            <a:endParaRPr lang="en-US" sz="950" dirty="0"/>
-          </a:p>
-        </p:txBody>
-      </p:sp>
-      <p:sp>
-        <p:nvSpPr>
-          <p:cNvPr id="81" name="Text 79"/>
-          <p:cNvSpPr txBox="1"/>
-          <p:nvPr/>
-        </p:nvSpPr>
-        <p:spPr>
-          <a:xfrm>
-            <a:off x="3520440" y="5376672"/>
-            <a:ext cx="1234440" cy="566928"/>
-          </a:xfrm>
-          <a:prstGeom prst="rect">
-            <a:avLst/>
-          </a:prstGeom>
-          <a:noFill/>
-          <a:ln/>
-        </p:spPr>
-        <p:txBody>
-          <a:bodyPr wrap="square" lIns="0" tIns="0" rIns="0" bIns="0" rtlCol="0" anchor="ctr"/>
-          <a:lstStyle/>
-          <a:p>
-            <a:pPr indent="0" marL="0">
-              <a:buNone/>
-            </a:pPr>
-            <a:r>
-              <a:rPr lang="en-US" sz="2200" b="1" dirty="0">
-                <a:solidFill>
-                  <a:srgbClr val="F4A300"/>
                 </a:solidFill>
                 <a:latin typeface="Cambria" pitchFamily="34" charset="0"/>
                 <a:ea typeface="Cambria" pitchFamily="34" charset="-122"/>
                 <a:cs typeface="Cambria" pitchFamily="34" charset="-120"/>
               </a:rPr>
-              <a:t>0.26%</a:t>
+              <a:t>$349K</a:t>
             </a:r>
             <a:endParaRPr lang="en-US" sz="2200" dirty="0"/>
           </a:p>
@@ -6012,14 +6073,14 @@
       </p:sp>
       <p:sp>
         <p:nvSpPr>
-          <p:cNvPr id="82" name="Text 80"/>
-          <p:cNvSpPr txBox="1"/>
-          <p:nvPr/>
-        </p:nvSpPr>
-        <p:spPr>
-          <a:xfrm>
-            <a:off x="4782312" y="5376672"/>
-            <a:ext cx="1417320" cy="566928"/>
+          <p:cNvPr id="86" name="Text 84"/>
+          <p:cNvSpPr txBox="1"/>
+          <p:nvPr/>
+        </p:nvSpPr>
+        <p:spPr>
+          <a:xfrm>
+            <a:off x="5897880" y="5715000"/>
+            <a:ext cx="1719072" cy="548640"/>
           </a:xfrm>
           <a:prstGeom prst="rect">
             <a:avLst/>
@@ -6035,71 +6096,144 @@
               <a:buNone/>
             </a:pPr>
             <a:r>
-              <a:rPr lang="en-US" sz="950" b="1" dirty="0">
+              <a:rPr lang="en-US" sz="900" dirty="0">
+                <a:solidFill>
+                  <a:srgbClr val="CADCFC"/>
+                </a:solidFill>
+                <a:latin typeface="Calibri" pitchFamily="34" charset="0"/>
+                <a:ea typeface="Calibri" pitchFamily="34" charset="-122"/>
+                <a:cs typeface="Calibri" pitchFamily="34" charset="-120"/>
+              </a:rPr>
+              <a:t>Plug-in $180K + Voice agent $169K</a:t>
+            </a:r>
+            <a:endParaRPr lang="en-US" sz="900" dirty="0"/>
+          </a:p>
+        </p:txBody>
+      </p:sp>
+      <p:sp>
+        <p:nvSpPr>
+          <p:cNvPr id="87" name="Shape 85"/>
+          <p:cNvSpPr/>
+          <p:nvPr/>
+        </p:nvSpPr>
+        <p:spPr>
+          <a:xfrm>
+            <a:off x="7680960" y="5879592"/>
+            <a:ext cx="411480" cy="914"/>
+          </a:xfrm>
+          <a:prstGeom prst="line">
+            <a:avLst/>
+          </a:prstGeom>
+          <a:noFill/>
+          <a:ln w="31750">
+            <a:solidFill>
+              <a:srgbClr val="F4A300"/>
+            </a:solidFill>
+            <a:prstDash val="solid"/>
+            <a:tailEnd type="triangle"/>
+          </a:ln>
+        </p:spPr>
+      </p:sp>
+      <p:sp>
+        <p:nvSpPr>
+          <p:cNvPr id="88" name="Shape 86"/>
+          <p:cNvSpPr/>
+          <p:nvPr/>
+        </p:nvSpPr>
+        <p:spPr>
+          <a:xfrm>
+            <a:off x="8092440" y="5468112"/>
+            <a:ext cx="3246120" cy="822960"/>
+          </a:xfrm>
+          <a:prstGeom prst="roundRect">
+            <a:avLst>
+              <a:gd name="adj" fmla="val 8889"/>
+            </a:avLst>
+          </a:prstGeom>
+          <a:solidFill>
+            <a:srgbClr val="1F3057"/>
+          </a:solidFill>
+          <a:ln w="15875">
+            <a:solidFill>
+              <a:srgbClr val="12AF97"/>
+            </a:solidFill>
+            <a:prstDash val="solid"/>
+          </a:ln>
+        </p:spPr>
+      </p:sp>
+      <p:sp>
+        <p:nvSpPr>
+          <p:cNvPr id="89" name="Text 87"/>
+          <p:cNvSpPr txBox="1"/>
+          <p:nvPr/>
+        </p:nvSpPr>
+        <p:spPr>
+          <a:xfrm>
+            <a:off x="8229600" y="5504688"/>
+            <a:ext cx="3017520" cy="237744"/>
+          </a:xfrm>
+          <a:prstGeom prst="rect">
+            <a:avLst/>
+          </a:prstGeom>
+          <a:noFill/>
+          <a:ln/>
+        </p:spPr>
+        <p:txBody>
+          <a:bodyPr wrap="square" lIns="0" tIns="0" rIns="0" bIns="0" rtlCol="0" anchor="t"/>
+          <a:lstStyle/>
+          <a:p>
+            <a:pPr indent="0" marL="0">
+              <a:buNone/>
+            </a:pPr>
+            <a:r>
+              <a:rPr lang="en-US" sz="900" b="1" spc="100" kern="0" dirty="0">
+                <a:solidFill>
+                  <a:srgbClr val="12AF97"/>
+                </a:solidFill>
+                <a:latin typeface="Calibri" pitchFamily="34" charset="0"/>
+                <a:ea typeface="Calibri" pitchFamily="34" charset="-122"/>
+                <a:cs typeface="Calibri" pitchFamily="34" charset="-120"/>
+              </a:rPr>
+              <a:t>GROSS PROFIT</a:t>
+            </a:r>
+            <a:endParaRPr lang="en-US" sz="900" dirty="0"/>
+          </a:p>
+        </p:txBody>
+      </p:sp>
+      <p:sp>
+        <p:nvSpPr>
+          <p:cNvPr id="90" name="Text 88"/>
+          <p:cNvSpPr txBox="1"/>
+          <p:nvPr/>
+        </p:nvSpPr>
+        <p:spPr>
+          <a:xfrm>
+            <a:off x="8229600" y="5733288"/>
+            <a:ext cx="1325880" cy="502920"/>
+          </a:xfrm>
+          <a:prstGeom prst="rect">
+            <a:avLst/>
+          </a:prstGeom>
+          <a:noFill/>
+          <a:ln/>
+        </p:spPr>
+        <p:txBody>
+          <a:bodyPr wrap="square" lIns="0" tIns="0" rIns="0" bIns="0" rtlCol="0" anchor="ctr"/>
+          <a:lstStyle/>
+          <a:p>
+            <a:pPr indent="0" marL="0">
+              <a:buNone/>
+            </a:pPr>
+            <a:r>
+              <a:rPr lang="en-US" sz="2200" b="1" dirty="0">
                 <a:solidFill>
                   <a:srgbClr val="FFFFFF"/>
-                </a:solidFill>
-                <a:latin typeface="Calibri" pitchFamily="34" charset="0"/>
-                <a:ea typeface="Calibri" pitchFamily="34" charset="-122"/>
-                <a:cs typeface="Calibri" pitchFamily="34" charset="-120"/>
-              </a:rPr>
-              <a:t>Break-even</a:t>
-            </a:r>
-            <a:endParaRPr lang="en-US" sz="950" dirty="0"/>
-          </a:p>
-          <a:p>
-            <a:pPr indent="0" marL="0">
-              <a:buNone/>
-            </a:pPr>
-            <a:r>
-              <a:rPr lang="en-US" sz="950" dirty="0">
-                <a:solidFill>
-                  <a:srgbClr val="CADCFC"/>
-                </a:solidFill>
-                <a:latin typeface="Calibri" pitchFamily="34" charset="0"/>
-                <a:ea typeface="Calibri" pitchFamily="34" charset="-122"/>
-                <a:cs typeface="Calibri" pitchFamily="34" charset="-120"/>
-              </a:rPr>
-              <a:t>of guarded actions going wrong</a:t>
-            </a:r>
-            <a:endParaRPr lang="en-US" sz="950" dirty="0"/>
-          </a:p>
-        </p:txBody>
-      </p:sp>
-      <p:sp>
-        <p:nvSpPr>
-          <p:cNvPr id="83" name="Text 81"/>
-          <p:cNvSpPr txBox="1"/>
-          <p:nvPr/>
-        </p:nvSpPr>
-        <p:spPr>
-          <a:xfrm>
-            <a:off x="6263640" y="5376672"/>
-            <a:ext cx="1234440" cy="566928"/>
-          </a:xfrm>
-          <a:prstGeom prst="rect">
-            <a:avLst/>
-          </a:prstGeom>
-          <a:noFill/>
-          <a:ln/>
-        </p:spPr>
-        <p:txBody>
-          <a:bodyPr wrap="square" lIns="0" tIns="0" rIns="0" bIns="0" rtlCol="0" anchor="ctr"/>
-          <a:lstStyle/>
-          <a:p>
-            <a:pPr indent="0" marL="0">
-              <a:buNone/>
-            </a:pPr>
-            <a:r>
-              <a:rPr lang="en-US" sz="2200" b="1" dirty="0">
-                <a:solidFill>
-                  <a:srgbClr val="F4A300"/>
                 </a:solidFill>
                 <a:latin typeface="Cambria" pitchFamily="34" charset="0"/>
                 <a:ea typeface="Cambria" pitchFamily="34" charset="-122"/>
                 <a:cs typeface="Cambria" pitchFamily="34" charset="-120"/>
               </a:rPr>
-              <a:t>$349K</a:t>
+              <a:t>~$195K</a:t>
             </a:r>
             <a:endParaRPr lang="en-US" sz="2200" dirty="0"/>
           </a:p>
@@ -6107,14 +6241,14 @@
       </p:sp>
       <p:sp>
         <p:nvSpPr>
-          <p:cNvPr id="84" name="Text 82"/>
-          <p:cNvSpPr txBox="1"/>
-          <p:nvPr/>
-        </p:nvSpPr>
-        <p:spPr>
-          <a:xfrm>
-            <a:off x="7525512" y="5376672"/>
-            <a:ext cx="1417320" cy="566928"/>
+          <p:cNvPr id="91" name="Text 89"/>
+          <p:cNvSpPr txBox="1"/>
+          <p:nvPr/>
+        </p:nvSpPr>
+        <p:spPr>
+          <a:xfrm>
+            <a:off x="9555480" y="5715000"/>
+            <a:ext cx="1719072" cy="548640"/>
           </a:xfrm>
           <a:prstGeom prst="rect">
             <a:avLst/>
@@ -6130,24 +6264,7 @@
               <a:buNone/>
             </a:pPr>
             <a:r>
-              <a:rPr lang="en-US" sz="950" b="1" dirty="0">
-                <a:solidFill>
-                  <a:srgbClr val="FFFFFF"/>
-                </a:solidFill>
-                <a:latin typeface="Calibri" pitchFamily="34" charset="0"/>
-                <a:ea typeface="Calibri" pitchFamily="34" charset="-122"/>
-                <a:cs typeface="Calibri" pitchFamily="34" charset="-120"/>
-              </a:rPr>
-              <a:t>Year-1 revenue</a:t>
-            </a:r>
-            <a:endParaRPr lang="en-US" sz="950" dirty="0"/>
-          </a:p>
-          <a:p>
-            <a:pPr indent="0" marL="0">
-              <a:buNone/>
-            </a:pPr>
-            <a:r>
-              <a:rPr lang="en-US" sz="950" dirty="0">
+              <a:rPr lang="en-US" sz="900" dirty="0">
                 <a:solidFill>
                   <a:srgbClr val="CADCFC"/>
                 </a:solidFill>
@@ -6155,228 +6272,15 @@
                 <a:ea typeface="Calibri" pitchFamily="34" charset="-122"/>
                 <a:cs typeface="Calibri" pitchFamily="34" charset="-120"/>
               </a:rPr>
-              <a:t>vs $90K build · ~$195K gross profit</a:t>
-            </a:r>
-            <a:endParaRPr lang="en-US" sz="950" dirty="0"/>
-          </a:p>
-        </p:txBody>
-      </p:sp>
-      <p:sp>
-        <p:nvSpPr>
-          <p:cNvPr id="85" name="Text 83"/>
-          <p:cNvSpPr txBox="1"/>
-          <p:nvPr/>
-        </p:nvSpPr>
-        <p:spPr>
-          <a:xfrm>
-            <a:off x="9006840" y="5376672"/>
-            <a:ext cx="1234440" cy="566928"/>
-          </a:xfrm>
-          <a:prstGeom prst="rect">
-            <a:avLst/>
-          </a:prstGeom>
-          <a:noFill/>
-          <a:ln/>
-        </p:spPr>
-        <p:txBody>
-          <a:bodyPr wrap="square" lIns="0" tIns="0" rIns="0" bIns="0" rtlCol="0" anchor="ctr"/>
-          <a:lstStyle/>
-          <a:p>
-            <a:pPr indent="0" marL="0">
-              <a:buNone/>
-            </a:pPr>
-            <a:r>
-              <a:rPr lang="en-US" sz="2200" b="1" dirty="0">
-                <a:solidFill>
-                  <a:srgbClr val="F4A300"/>
-                </a:solidFill>
-                <a:latin typeface="Cambria" pitchFamily="34" charset="0"/>
-                <a:ea typeface="Cambria" pitchFamily="34" charset="-122"/>
-                <a:cs typeface="Cambria" pitchFamily="34" charset="-120"/>
-              </a:rPr>
-              <a:t>~8 mo</a:t>
-            </a:r>
-            <a:endParaRPr lang="en-US" sz="2200" dirty="0"/>
-          </a:p>
-        </p:txBody>
-      </p:sp>
-      <p:sp>
-        <p:nvSpPr>
-          <p:cNvPr id="86" name="Text 84"/>
-          <p:cNvSpPr txBox="1"/>
-          <p:nvPr/>
-        </p:nvSpPr>
-        <p:spPr>
-          <a:xfrm>
-            <a:off x="10268712" y="5376672"/>
-            <a:ext cx="1417320" cy="566928"/>
-          </a:xfrm>
-          <a:prstGeom prst="rect">
-            <a:avLst/>
-          </a:prstGeom>
-          <a:noFill/>
-          <a:ln/>
-        </p:spPr>
-        <p:txBody>
-          <a:bodyPr wrap="square" lIns="0" tIns="0" rIns="0" bIns="0" rtlCol="0" anchor="ctr"/>
-          <a:lstStyle/>
-          <a:p>
-            <a:pPr indent="0" marL="0">
-              <a:buNone/>
-            </a:pPr>
-            <a:r>
-              <a:rPr lang="en-US" sz="950" b="1" dirty="0">
-                <a:solidFill>
-                  <a:srgbClr val="FFFFFF"/>
-                </a:solidFill>
-                <a:latin typeface="Calibri" pitchFamily="34" charset="0"/>
-                <a:ea typeface="Calibri" pitchFamily="34" charset="-122"/>
-                <a:cs typeface="Calibri" pitchFamily="34" charset="-120"/>
-              </a:rPr>
-              <a:t>Payback</a:t>
-            </a:r>
-            <a:endParaRPr lang="en-US" sz="950" dirty="0"/>
-          </a:p>
-          <a:p>
-            <a:pPr indent="0" marL="0">
-              <a:buNone/>
-            </a:pPr>
-            <a:r>
-              <a:rPr lang="en-US" sz="950" dirty="0">
-                <a:solidFill>
-                  <a:srgbClr val="CADCFC"/>
-                </a:solidFill>
-                <a:latin typeface="Calibri" pitchFamily="34" charset="0"/>
-                <a:ea typeface="Calibri" pitchFamily="34" charset="-122"/>
-                <a:cs typeface="Calibri" pitchFamily="34" charset="-120"/>
-              </a:rPr>
-              <a:t>after launch, on gross profit</a:t>
-            </a:r>
-            <a:endParaRPr lang="en-US" sz="950" dirty="0"/>
-          </a:p>
-        </p:txBody>
-      </p:sp>
-      <p:sp>
-        <p:nvSpPr>
-          <p:cNvPr id="87" name="Shape 85"/>
-          <p:cNvSpPr/>
-          <p:nvPr/>
-        </p:nvSpPr>
-        <p:spPr>
-          <a:xfrm>
-            <a:off x="777240" y="5989320"/>
-            <a:ext cx="10652760" cy="0"/>
-          </a:xfrm>
-          <a:prstGeom prst="line">
-            <a:avLst/>
-          </a:prstGeom>
-          <a:noFill/>
-          <a:ln w="12700">
-            <a:solidFill>
-              <a:srgbClr val="1F3057"/>
-            </a:solidFill>
-            <a:prstDash val="solid"/>
-          </a:ln>
-        </p:spPr>
-      </p:sp>
-      <p:sp>
-        <p:nvSpPr>
-          <p:cNvPr id="88" name="Text 86"/>
-          <p:cNvSpPr txBox="1"/>
-          <p:nvPr/>
-        </p:nvSpPr>
-        <p:spPr>
-          <a:xfrm>
-            <a:off x="777240" y="6035040"/>
-            <a:ext cx="10744200" cy="301752"/>
-          </a:xfrm>
-          <a:prstGeom prst="rect">
-            <a:avLst/>
-          </a:prstGeom>
-          <a:noFill/>
-          <a:ln/>
-        </p:spPr>
-        <p:txBody>
-          <a:bodyPr wrap="square" lIns="0" tIns="0" rIns="0" bIns="0" rtlCol="0" anchor="ctr"/>
-          <a:lstStyle/>
-          <a:p>
-            <a:pPr indent="0" marL="0">
-              <a:buNone/>
-            </a:pPr>
-            <a:r>
-              <a:rPr lang="en-US" sz="950" b="1" dirty="0">
-                <a:solidFill>
-                  <a:srgbClr val="F4A300"/>
-                </a:solidFill>
-                <a:latin typeface="Calibri" pitchFamily="34" charset="0"/>
-                <a:ea typeface="Calibri" pitchFamily="34" charset="-122"/>
-                <a:cs typeface="Calibri" pitchFamily="34" charset="-120"/>
-              </a:rPr>
-              <a:t>REVENUE SPLIT  </a:t>
-            </a:r>
-            <a:pPr indent="0" marL="0">
-              <a:buNone/>
-            </a:pPr>
-            <a:r>
-              <a:rPr lang="en-US" sz="1050" b="1" dirty="0">
-                <a:solidFill>
-                  <a:srgbClr val="FFFFFF"/>
-                </a:solidFill>
-                <a:latin typeface="Calibri" pitchFamily="34" charset="0"/>
-                <a:ea typeface="Calibri" pitchFamily="34" charset="-122"/>
-                <a:cs typeface="Calibri" pitchFamily="34" charset="-120"/>
-              </a:rPr>
-              <a:t>Plug-in: </a:t>
-            </a:r>
-            <a:pPr indent="0" marL="0">
-              <a:buNone/>
-            </a:pPr>
-            <a:r>
-              <a:rPr lang="en-US" sz="1050" dirty="0">
-                <a:solidFill>
-                  <a:srgbClr val="CADCFC"/>
-                </a:solidFill>
-                <a:latin typeface="Calibri" pitchFamily="34" charset="0"/>
-                <a:ea typeface="Calibri" pitchFamily="34" charset="-122"/>
-                <a:cs typeface="Calibri" pitchFamily="34" charset="-120"/>
-              </a:rPr>
-              <a:t>25 avg customers × $600/mo = $180K → $99K profit</a:t>
-            </a:r>
-            <a:pPr indent="0" marL="0">
-              <a:buNone/>
-            </a:pPr>
-            <a:r>
-              <a:rPr lang="en-US" sz="1050" b="1" dirty="0">
-                <a:solidFill>
-                  <a:srgbClr val="FFFFFF"/>
-                </a:solidFill>
-                <a:latin typeface="Calibri" pitchFamily="34" charset="0"/>
-                <a:ea typeface="Calibri" pitchFamily="34" charset="-122"/>
-                <a:cs typeface="Calibri" pitchFamily="34" charset="-120"/>
-              </a:rPr>
-              <a:t>   ·   Voice agent: </a:t>
-            </a:r>
-            <a:pPr indent="0" marL="0">
-              <a:buNone/>
-            </a:pPr>
-            <a:r>
-              <a:rPr lang="en-US" sz="1050" dirty="0">
-                <a:solidFill>
-                  <a:srgbClr val="CADCFC"/>
-                </a:solidFill>
-                <a:latin typeface="Calibri" pitchFamily="34" charset="0"/>
-                <a:ea typeface="Calibri" pitchFamily="34" charset="-122"/>
-                <a:cs typeface="Calibri" pitchFamily="34" charset="-120"/>
-              </a:rPr>
-              <a:t>5 avg brands × $2,824/mo = $169K → $96K profit</a:t>
-            </a:r>
-            <a:endParaRPr lang="en-US" sz="1050" dirty="0"/>
-          </a:p>
-        </p:txBody>
-      </p:sp>
-      <p:sp>
-        <p:nvSpPr>
-          <p:cNvPr id="89" name="Text 87"/>
+              <a:t>after $154K run costs · pays back the $90K build in ~8 months</a:t>
+            </a:r>
+            <a:endParaRPr lang="en-US" sz="900" dirty="0"/>
+          </a:p>
+        </p:txBody>
+      </p:sp>
+      <p:sp>
+        <p:nvSpPr>
+          <p:cNvPr id="92" name="Text 90"/>
           <p:cNvSpPr txBox="1"/>
           <p:nvPr/>
         </p:nvSpPr>
@@ -6447,46 +6351,7 @@
       </p:grpSpPr>
       <p:sp>
         <p:nvSpPr>
-          <p:cNvPr id="2" name="Text 0"/>
-          <p:cNvSpPr txBox="1"/>
-          <p:nvPr/>
-        </p:nvSpPr>
-        <p:spPr>
-          <a:xfrm>
-            <a:off x="5760720" y="109728"/>
-            <a:ext cx="5897880" cy="256032"/>
-          </a:xfrm>
-          <a:prstGeom prst="rect">
-            <a:avLst/>
-          </a:prstGeom>
-          <a:noFill/>
-          <a:ln/>
-        </p:spPr>
-        <p:txBody>
-          <a:bodyPr wrap="square" lIns="0" tIns="0" rIns="0" bIns="0" rtlCol="0" anchor="t"/>
-          <a:lstStyle/>
-          <a:p>
-            <a:pPr algn="r" indent="0" marL="0">
-              <a:buNone/>
-            </a:pPr>
-            <a:r>
-              <a:rPr lang="en-US" sz="900" b="1" spc="100" kern="0" dirty="0">
-                <a:solidFill>
-                  <a:srgbClr val="8A93A3"/>
-                </a:solidFill>
-                <a:latin typeface="Calibri" pitchFamily="34" charset="0"/>
-                <a:ea typeface="Calibri" pitchFamily="34" charset="-122"/>
-                <a:cs typeface="Calibri" pitchFamily="34" charset="-120"/>
-              </a:rPr>
-              <a:t>SECTION 2 OF 12  ·  PROBLEM STATEMENT</a:t>
-            </a:r>
-            <a:endParaRPr lang="en-US" sz="900" dirty="0"/>
-          </a:p>
-        </p:txBody>
-      </p:sp>
-      <p:sp>
-        <p:nvSpPr>
-          <p:cNvPr id="3" name="Shape 1"/>
+          <p:cNvPr id="2" name="Shape 0"/>
           <p:cNvSpPr/>
           <p:nvPr/>
         </p:nvSpPr>
@@ -6511,7 +6376,7 @@
       </p:sp>
       <p:sp>
         <p:nvSpPr>
-          <p:cNvPr id="4" name="Text 2"/>
+          <p:cNvPr id="3" name="Text 1"/>
           <p:cNvSpPr txBox="1"/>
           <p:nvPr/>
         </p:nvSpPr>
@@ -6550,7 +6415,7 @@
       </p:sp>
       <p:sp>
         <p:nvSpPr>
-          <p:cNvPr id="5" name="Text 3"/>
+          <p:cNvPr id="4" name="Text 2"/>
           <p:cNvSpPr txBox="1"/>
           <p:nvPr/>
         </p:nvSpPr>
@@ -6589,7 +6454,7 @@
       </p:sp>
       <p:sp>
         <p:nvSpPr>
-          <p:cNvPr id="6" name="Text 4"/>
+          <p:cNvPr id="5" name="Text 3"/>
           <p:cNvSpPr txBox="1"/>
           <p:nvPr/>
         </p:nvSpPr>
@@ -6628,7 +6493,7 @@
       </p:sp>
       <p:sp>
         <p:nvSpPr>
-          <p:cNvPr id="7" name="Shape 5"/>
+          <p:cNvPr id="6" name="Shape 4"/>
           <p:cNvSpPr/>
           <p:nvPr/>
         </p:nvSpPr>
@@ -6662,7 +6527,7 @@
       </p:sp>
       <p:sp>
         <p:nvSpPr>
-          <p:cNvPr id="8" name="Text 6"/>
+          <p:cNvPr id="7" name="Text 5"/>
           <p:cNvSpPr txBox="1"/>
           <p:nvPr/>
         </p:nvSpPr>
@@ -6701,7 +6566,7 @@
       </p:sp>
       <p:sp>
         <p:nvSpPr>
-          <p:cNvPr id="9" name="Text 7"/>
+          <p:cNvPr id="8" name="Text 6"/>
           <p:cNvSpPr txBox="1"/>
           <p:nvPr/>
         </p:nvSpPr>
@@ -6768,7 +6633,7 @@
       </p:sp>
       <p:sp>
         <p:nvSpPr>
-          <p:cNvPr id="10" name="Text 8"/>
+          <p:cNvPr id="9" name="Text 7"/>
           <p:cNvSpPr txBox="1"/>
           <p:nvPr/>
         </p:nvSpPr>
@@ -6807,7 +6672,7 @@
       </p:sp>
       <p:sp>
         <p:nvSpPr>
-          <p:cNvPr id="11" name="Shape 9"/>
+          <p:cNvPr id="10" name="Shape 8"/>
           <p:cNvSpPr/>
           <p:nvPr/>
         </p:nvSpPr>
@@ -6841,7 +6706,7 @@
       </p:sp>
       <p:sp>
         <p:nvSpPr>
-          <p:cNvPr id="12" name="Text 10"/>
+          <p:cNvPr id="11" name="Text 9"/>
           <p:cNvSpPr txBox="1"/>
           <p:nvPr/>
         </p:nvSpPr>
@@ -6880,7 +6745,7 @@
       </p:sp>
       <p:sp>
         <p:nvSpPr>
-          <p:cNvPr id="13" name="Text 11"/>
+          <p:cNvPr id="12" name="Text 10"/>
           <p:cNvSpPr txBox="1"/>
           <p:nvPr/>
         </p:nvSpPr>
@@ -6947,7 +6812,7 @@
       </p:sp>
       <p:sp>
         <p:nvSpPr>
-          <p:cNvPr id="14" name="Text 12"/>
+          <p:cNvPr id="13" name="Text 11"/>
           <p:cNvSpPr txBox="1"/>
           <p:nvPr/>
         </p:nvSpPr>
@@ -6986,7 +6851,7 @@
       </p:sp>
       <p:sp>
         <p:nvSpPr>
-          <p:cNvPr id="15" name="Text 13"/>
+          <p:cNvPr id="14" name="Text 12"/>
           <p:cNvSpPr txBox="1"/>
           <p:nvPr/>
         </p:nvSpPr>
@@ -7025,7 +6890,7 @@
       </p:sp>
       <p:sp>
         <p:nvSpPr>
-          <p:cNvPr id="16" name="Text 14"/>
+          <p:cNvPr id="15" name="Text 13"/>
           <p:cNvSpPr txBox="1"/>
           <p:nvPr/>
         </p:nvSpPr>
@@ -7072,7 +6937,7 @@
       </p:sp>
       <p:sp>
         <p:nvSpPr>
-          <p:cNvPr id="17" name="Shape 15"/>
+          <p:cNvPr id="16" name="Shape 14"/>
           <p:cNvSpPr/>
           <p:nvPr/>
         </p:nvSpPr>
@@ -7096,7 +6961,7 @@
       </p:sp>
       <p:sp>
         <p:nvSpPr>
-          <p:cNvPr id="18" name="Text 16"/>
+          <p:cNvPr id="17" name="Text 15"/>
           <p:cNvSpPr txBox="1"/>
           <p:nvPr/>
         </p:nvSpPr>
@@ -7143,7 +7008,7 @@
       </p:sp>
       <p:sp>
         <p:nvSpPr>
-          <p:cNvPr id="19" name="Shape 17"/>
+          <p:cNvPr id="18" name="Shape 16"/>
           <p:cNvSpPr/>
           <p:nvPr/>
         </p:nvSpPr>
@@ -7167,7 +7032,7 @@
       </p:sp>
       <p:sp>
         <p:nvSpPr>
-          <p:cNvPr id="20" name="Text 18"/>
+          <p:cNvPr id="19" name="Text 17"/>
           <p:cNvSpPr txBox="1"/>
           <p:nvPr/>
         </p:nvSpPr>
@@ -7214,7 +7079,7 @@
       </p:sp>
       <p:sp>
         <p:nvSpPr>
-          <p:cNvPr id="21" name="Shape 19"/>
+          <p:cNvPr id="20" name="Shape 18"/>
           <p:cNvSpPr/>
           <p:nvPr/>
         </p:nvSpPr>
@@ -7238,7 +7103,7 @@
       </p:sp>
       <p:sp>
         <p:nvSpPr>
-          <p:cNvPr id="22" name="Text 20"/>
+          <p:cNvPr id="21" name="Text 19"/>
           <p:cNvSpPr txBox="1"/>
           <p:nvPr/>
         </p:nvSpPr>
@@ -7285,7 +7150,7 @@
       </p:sp>
       <p:sp>
         <p:nvSpPr>
-          <p:cNvPr id="23" name="Shape 21"/>
+          <p:cNvPr id="22" name="Shape 20"/>
           <p:cNvSpPr/>
           <p:nvPr/>
         </p:nvSpPr>
@@ -7319,7 +7184,7 @@
       </p:sp>
       <p:sp>
         <p:nvSpPr>
-          <p:cNvPr id="24" name="Text 22"/>
+          <p:cNvPr id="23" name="Text 21"/>
           <p:cNvSpPr txBox="1"/>
           <p:nvPr/>
         </p:nvSpPr>
@@ -7358,7 +7223,7 @@
       </p:sp>
       <p:sp>
         <p:nvSpPr>
-          <p:cNvPr id="25" name="Text 23"/>
+          <p:cNvPr id="24" name="Text 22"/>
           <p:cNvSpPr txBox="1"/>
           <p:nvPr/>
         </p:nvSpPr>
@@ -7397,7 +7262,7 @@
       </p:sp>
       <p:sp>
         <p:nvSpPr>
-          <p:cNvPr id="26" name="Text 24"/>
+          <p:cNvPr id="25" name="Text 23"/>
           <p:cNvSpPr txBox="1"/>
           <p:nvPr/>
         </p:nvSpPr>
@@ -7436,7 +7301,7 @@
       </p:sp>
       <p:sp>
         <p:nvSpPr>
-          <p:cNvPr id="27" name="Shape 25"/>
+          <p:cNvPr id="26" name="Shape 24"/>
           <p:cNvSpPr/>
           <p:nvPr/>
         </p:nvSpPr>
@@ -7470,7 +7335,7 @@
       </p:sp>
       <p:sp>
         <p:nvSpPr>
-          <p:cNvPr id="28" name="Text 26"/>
+          <p:cNvPr id="27" name="Text 25"/>
           <p:cNvSpPr txBox="1"/>
           <p:nvPr/>
         </p:nvSpPr>
@@ -7509,7 +7374,7 @@
       </p:sp>
       <p:sp>
         <p:nvSpPr>
-          <p:cNvPr id="29" name="Text 27"/>
+          <p:cNvPr id="28" name="Text 26"/>
           <p:cNvSpPr txBox="1"/>
           <p:nvPr/>
         </p:nvSpPr>
@@ -7548,7 +7413,7 @@
       </p:sp>
       <p:sp>
         <p:nvSpPr>
-          <p:cNvPr id="30" name="Text 28"/>
+          <p:cNvPr id="29" name="Text 27"/>
           <p:cNvSpPr txBox="1"/>
           <p:nvPr/>
         </p:nvSpPr>
@@ -7587,7 +7452,7 @@
       </p:sp>
       <p:sp>
         <p:nvSpPr>
-          <p:cNvPr id="31" name="Text 29"/>
+          <p:cNvPr id="30" name="Text 28"/>
           <p:cNvSpPr txBox="1"/>
           <p:nvPr/>
         </p:nvSpPr>
@@ -7658,46 +7523,7 @@
       </p:grpSpPr>
       <p:sp>
         <p:nvSpPr>
-          <p:cNvPr id="2" name="Text 0"/>
-          <p:cNvSpPr txBox="1"/>
-          <p:nvPr/>
-        </p:nvSpPr>
-        <p:spPr>
-          <a:xfrm>
-            <a:off x="5760720" y="109728"/>
-            <a:ext cx="5897880" cy="256032"/>
-          </a:xfrm>
-          <a:prstGeom prst="rect">
-            <a:avLst/>
-          </a:prstGeom>
-          <a:noFill/>
-          <a:ln/>
-        </p:spPr>
-        <p:txBody>
-          <a:bodyPr wrap="square" lIns="0" tIns="0" rIns="0" bIns="0" rtlCol="0" anchor="t"/>
-          <a:lstStyle/>
-          <a:p>
-            <a:pPr algn="r" indent="0" marL="0">
-              <a:buNone/>
-            </a:pPr>
-            <a:r>
-              <a:rPr lang="en-US" sz="900" b="1" spc="100" kern="0" dirty="0">
-                <a:solidFill>
-                  <a:srgbClr val="8A93A3"/>
-                </a:solidFill>
-                <a:latin typeface="Calibri" pitchFamily="34" charset="0"/>
-                <a:ea typeface="Calibri" pitchFamily="34" charset="-122"/>
-                <a:cs typeface="Calibri" pitchFamily="34" charset="-120"/>
-              </a:rPr>
-              <a:t>SECTIONS 3 &amp; 4 OF 12  ·  WHY NOW  ·  COMPETITIVE LANDSCAPE</a:t>
-            </a:r>
-            <a:endParaRPr lang="en-US" sz="900" dirty="0"/>
-          </a:p>
-        </p:txBody>
-      </p:sp>
-      <p:sp>
-        <p:nvSpPr>
-          <p:cNvPr id="3" name="Shape 1"/>
+          <p:cNvPr id="2" name="Shape 0"/>
           <p:cNvSpPr/>
           <p:nvPr/>
         </p:nvSpPr>
@@ -7722,7 +7548,7 @@
       </p:sp>
       <p:sp>
         <p:nvSpPr>
-          <p:cNvPr id="4" name="Text 2"/>
+          <p:cNvPr id="3" name="Text 1"/>
           <p:cNvSpPr txBox="1"/>
           <p:nvPr/>
         </p:nvSpPr>
@@ -7761,7 +7587,7 @@
       </p:sp>
       <p:sp>
         <p:nvSpPr>
-          <p:cNvPr id="5" name="Text 3"/>
+          <p:cNvPr id="4" name="Text 2"/>
           <p:cNvSpPr txBox="1"/>
           <p:nvPr/>
         </p:nvSpPr>
@@ -7800,7 +7626,7 @@
       </p:sp>
       <p:sp>
         <p:nvSpPr>
-          <p:cNvPr id="6" name="Text 4"/>
+          <p:cNvPr id="5" name="Text 3"/>
           <p:cNvSpPr txBox="1"/>
           <p:nvPr/>
         </p:nvSpPr>
@@ -7839,7 +7665,7 @@
       </p:sp>
       <p:sp>
         <p:nvSpPr>
-          <p:cNvPr id="7" name="Text 5"/>
+          <p:cNvPr id="6" name="Text 4"/>
           <p:cNvSpPr txBox="1"/>
           <p:nvPr/>
         </p:nvSpPr>
@@ -7878,7 +7704,7 @@
       </p:sp>
       <p:sp>
         <p:nvSpPr>
-          <p:cNvPr id="8" name="Shape 6"/>
+          <p:cNvPr id="7" name="Shape 5"/>
           <p:cNvSpPr/>
           <p:nvPr/>
         </p:nvSpPr>
@@ -7903,7 +7729,7 @@
       </p:sp>
       <p:pic>
         <p:nvPicPr>
-          <p:cNvPr id="9" name="Image 0" descr="preencoded.png">    </p:cNvPr>
+          <p:cNvPr id="8" name="Image 0" descr="preencoded.png">    </p:cNvPr>
           <p:cNvPicPr>
             <a:picLocks noChangeAspect="1"/>
           </p:cNvPicPr>
@@ -7927,7 +7753,7 @@
       </p:pic>
       <p:sp>
         <p:nvSpPr>
-          <p:cNvPr id="10" name="Text 7"/>
+          <p:cNvPr id="9" name="Text 6"/>
           <p:cNvSpPr txBox="1"/>
           <p:nvPr/>
         </p:nvSpPr>
@@ -7966,7 +7792,7 @@
       </p:sp>
       <p:sp>
         <p:nvSpPr>
-          <p:cNvPr id="11" name="Text 8"/>
+          <p:cNvPr id="10" name="Text 7"/>
           <p:cNvSpPr txBox="1"/>
           <p:nvPr/>
         </p:nvSpPr>
@@ -8005,7 +7831,7 @@
       </p:sp>
       <p:sp>
         <p:nvSpPr>
-          <p:cNvPr id="12" name="Shape 9"/>
+          <p:cNvPr id="11" name="Shape 8"/>
           <p:cNvSpPr/>
           <p:nvPr/>
         </p:nvSpPr>
@@ -8030,7 +7856,7 @@
       </p:sp>
       <p:pic>
         <p:nvPicPr>
-          <p:cNvPr id="13" name="Image 1" descr="preencoded.png">    </p:cNvPr>
+          <p:cNvPr id="12" name="Image 1" descr="preencoded.png">    </p:cNvPr>
           <p:cNvPicPr>
             <a:picLocks noChangeAspect="1"/>
           </p:cNvPicPr>
@@ -8054,7 +7880,7 @@
       </p:pic>
       <p:sp>
         <p:nvSpPr>
-          <p:cNvPr id="14" name="Text 10"/>
+          <p:cNvPr id="13" name="Text 9"/>
           <p:cNvSpPr txBox="1"/>
           <p:nvPr/>
         </p:nvSpPr>
@@ -8093,7 +7919,7 @@
       </p:sp>
       <p:sp>
         <p:nvSpPr>
-          <p:cNvPr id="15" name="Text 11"/>
+          <p:cNvPr id="14" name="Text 10"/>
           <p:cNvSpPr txBox="1"/>
           <p:nvPr/>
         </p:nvSpPr>
@@ -8132,7 +7958,7 @@
       </p:sp>
       <p:sp>
         <p:nvSpPr>
-          <p:cNvPr id="16" name="Shape 12"/>
+          <p:cNvPr id="15" name="Shape 11"/>
           <p:cNvSpPr/>
           <p:nvPr/>
         </p:nvSpPr>
@@ -8157,7 +7983,7 @@
       </p:sp>
       <p:pic>
         <p:nvPicPr>
-          <p:cNvPr id="17" name="Image 2" descr="preencoded.png">    </p:cNvPr>
+          <p:cNvPr id="16" name="Image 2" descr="preencoded.png">    </p:cNvPr>
           <p:cNvPicPr>
             <a:picLocks noChangeAspect="1"/>
           </p:cNvPicPr>
@@ -8181,7 +8007,7 @@
       </p:pic>
       <p:sp>
         <p:nvSpPr>
-          <p:cNvPr id="18" name="Text 13"/>
+          <p:cNvPr id="17" name="Text 12"/>
           <p:cNvSpPr txBox="1"/>
           <p:nvPr/>
         </p:nvSpPr>
@@ -8220,7 +8046,7 @@
       </p:sp>
       <p:sp>
         <p:nvSpPr>
-          <p:cNvPr id="19" name="Text 14"/>
+          <p:cNvPr id="18" name="Text 13"/>
           <p:cNvSpPr txBox="1"/>
           <p:nvPr/>
         </p:nvSpPr>
@@ -8259,7 +8085,7 @@
       </p:sp>
       <p:sp>
         <p:nvSpPr>
-          <p:cNvPr id="20" name="Shape 15"/>
+          <p:cNvPr id="19" name="Shape 14"/>
           <p:cNvSpPr/>
           <p:nvPr/>
         </p:nvSpPr>
@@ -8293,7 +8119,7 @@
       </p:sp>
       <p:sp>
         <p:nvSpPr>
-          <p:cNvPr id="21" name="Text 16"/>
+          <p:cNvPr id="20" name="Text 15"/>
           <p:cNvSpPr txBox="1"/>
           <p:nvPr/>
         </p:nvSpPr>
@@ -8332,7 +8158,7 @@
       </p:sp>
       <p:sp>
         <p:nvSpPr>
-          <p:cNvPr id="22" name="Text 17"/>
+          <p:cNvPr id="21" name="Text 16"/>
           <p:cNvSpPr txBox="1"/>
           <p:nvPr/>
         </p:nvSpPr>
@@ -8399,7 +8225,7 @@
       </p:sp>
       <p:sp>
         <p:nvSpPr>
-          <p:cNvPr id="23" name="Text 18"/>
+          <p:cNvPr id="22" name="Text 17"/>
           <p:cNvSpPr txBox="1"/>
           <p:nvPr/>
         </p:nvSpPr>
@@ -8438,7 +8264,7 @@
       </p:sp>
       <p:sp>
         <p:nvSpPr>
-          <p:cNvPr id="24" name="Text 19"/>
+          <p:cNvPr id="23" name="Text 18"/>
           <p:cNvSpPr txBox="1"/>
           <p:nvPr/>
         </p:nvSpPr>
@@ -8477,7 +8303,7 @@
       </p:sp>
       <p:sp>
         <p:nvSpPr>
-          <p:cNvPr id="25" name="Text 20"/>
+          <p:cNvPr id="24" name="Text 19"/>
           <p:cNvSpPr txBox="1"/>
           <p:nvPr/>
         </p:nvSpPr>
@@ -8516,7 +8342,7 @@
       </p:sp>
       <p:sp>
         <p:nvSpPr>
-          <p:cNvPr id="26" name="Text 21"/>
+          <p:cNvPr id="25" name="Text 20"/>
           <p:cNvSpPr txBox="1"/>
           <p:nvPr/>
         </p:nvSpPr>
@@ -8555,7 +8381,7 @@
       </p:sp>
       <p:sp>
         <p:nvSpPr>
-          <p:cNvPr id="27" name="Shape 22"/>
+          <p:cNvPr id="26" name="Shape 21"/>
           <p:cNvSpPr/>
           <p:nvPr/>
         </p:nvSpPr>
@@ -8582,7 +8408,7 @@
       </p:sp>
       <p:sp>
         <p:nvSpPr>
-          <p:cNvPr id="28" name="Text 23"/>
+          <p:cNvPr id="27" name="Text 22"/>
           <p:cNvSpPr txBox="1"/>
           <p:nvPr/>
         </p:nvSpPr>
@@ -8621,7 +8447,7 @@
       </p:sp>
       <p:sp>
         <p:nvSpPr>
-          <p:cNvPr id="29" name="Text 24"/>
+          <p:cNvPr id="28" name="Text 23"/>
           <p:cNvSpPr txBox="1"/>
           <p:nvPr/>
         </p:nvSpPr>
@@ -8660,7 +8486,7 @@
       </p:sp>
       <p:sp>
         <p:nvSpPr>
-          <p:cNvPr id="30" name="Text 25"/>
+          <p:cNvPr id="29" name="Text 24"/>
           <p:cNvSpPr txBox="1"/>
           <p:nvPr/>
         </p:nvSpPr>
@@ -8699,7 +8525,7 @@
       </p:sp>
       <p:sp>
         <p:nvSpPr>
-          <p:cNvPr id="31" name="Shape 26"/>
+          <p:cNvPr id="30" name="Shape 25"/>
           <p:cNvSpPr/>
           <p:nvPr/>
         </p:nvSpPr>
@@ -8726,7 +8552,7 @@
       </p:sp>
       <p:sp>
         <p:nvSpPr>
-          <p:cNvPr id="32" name="Text 27"/>
+          <p:cNvPr id="31" name="Text 26"/>
           <p:cNvSpPr txBox="1"/>
           <p:nvPr/>
         </p:nvSpPr>
@@ -8765,7 +8591,7 @@
       </p:sp>
       <p:sp>
         <p:nvSpPr>
-          <p:cNvPr id="33" name="Text 28"/>
+          <p:cNvPr id="32" name="Text 27"/>
           <p:cNvSpPr txBox="1"/>
           <p:nvPr/>
         </p:nvSpPr>
@@ -8804,7 +8630,7 @@
       </p:sp>
       <p:sp>
         <p:nvSpPr>
-          <p:cNvPr id="34" name="Text 29"/>
+          <p:cNvPr id="33" name="Text 28"/>
           <p:cNvSpPr txBox="1"/>
           <p:nvPr/>
         </p:nvSpPr>
@@ -8843,7 +8669,7 @@
       </p:sp>
       <p:sp>
         <p:nvSpPr>
-          <p:cNvPr id="35" name="Shape 30"/>
+          <p:cNvPr id="34" name="Shape 29"/>
           <p:cNvSpPr/>
           <p:nvPr/>
         </p:nvSpPr>
@@ -8870,7 +8696,7 @@
       </p:sp>
       <p:sp>
         <p:nvSpPr>
-          <p:cNvPr id="36" name="Text 31"/>
+          <p:cNvPr id="35" name="Text 30"/>
           <p:cNvSpPr txBox="1"/>
           <p:nvPr/>
         </p:nvSpPr>
@@ -8909,7 +8735,7 @@
       </p:sp>
       <p:sp>
         <p:nvSpPr>
-          <p:cNvPr id="37" name="Text 32"/>
+          <p:cNvPr id="36" name="Text 31"/>
           <p:cNvSpPr txBox="1"/>
           <p:nvPr/>
         </p:nvSpPr>
@@ -8948,7 +8774,7 @@
       </p:sp>
       <p:sp>
         <p:nvSpPr>
-          <p:cNvPr id="38" name="Text 33"/>
+          <p:cNvPr id="37" name="Text 32"/>
           <p:cNvSpPr txBox="1"/>
           <p:nvPr/>
         </p:nvSpPr>
@@ -8987,7 +8813,7 @@
       </p:sp>
       <p:sp>
         <p:nvSpPr>
-          <p:cNvPr id="39" name="Shape 34"/>
+          <p:cNvPr id="38" name="Shape 33"/>
           <p:cNvSpPr/>
           <p:nvPr/>
         </p:nvSpPr>
@@ -9014,7 +8840,7 @@
       </p:sp>
       <p:sp>
         <p:nvSpPr>
-          <p:cNvPr id="40" name="Text 35"/>
+          <p:cNvPr id="39" name="Text 34"/>
           <p:cNvSpPr txBox="1"/>
           <p:nvPr/>
         </p:nvSpPr>
@@ -9053,7 +8879,7 @@
       </p:sp>
       <p:sp>
         <p:nvSpPr>
-          <p:cNvPr id="41" name="Text 36"/>
+          <p:cNvPr id="40" name="Text 35"/>
           <p:cNvSpPr txBox="1"/>
           <p:nvPr/>
         </p:nvSpPr>
@@ -9092,7 +8918,7 @@
       </p:sp>
       <p:sp>
         <p:nvSpPr>
-          <p:cNvPr id="42" name="Text 37"/>
+          <p:cNvPr id="41" name="Text 36"/>
           <p:cNvSpPr txBox="1"/>
           <p:nvPr/>
         </p:nvSpPr>
@@ -9131,7 +8957,7 @@
       </p:sp>
       <p:sp>
         <p:nvSpPr>
-          <p:cNvPr id="43" name="Shape 38"/>
+          <p:cNvPr id="42" name="Shape 37"/>
           <p:cNvSpPr/>
           <p:nvPr/>
         </p:nvSpPr>
@@ -9165,7 +8991,7 @@
       </p:sp>
       <p:sp>
         <p:nvSpPr>
-          <p:cNvPr id="44" name="Text 39"/>
+          <p:cNvPr id="43" name="Text 38"/>
           <p:cNvSpPr txBox="1"/>
           <p:nvPr/>
         </p:nvSpPr>
@@ -9218,7 +9044,7 @@
       </p:sp>
       <p:sp>
         <p:nvSpPr>
-          <p:cNvPr id="45" name="Shape 40"/>
+          <p:cNvPr id="44" name="Shape 39"/>
           <p:cNvSpPr/>
           <p:nvPr/>
         </p:nvSpPr>
@@ -9252,7 +9078,7 @@
       </p:sp>
       <p:sp>
         <p:nvSpPr>
-          <p:cNvPr id="46" name="Text 41"/>
+          <p:cNvPr id="45" name="Text 40"/>
           <p:cNvSpPr txBox="1"/>
           <p:nvPr/>
         </p:nvSpPr>
@@ -9305,7 +9131,7 @@
       </p:sp>
       <p:sp>
         <p:nvSpPr>
-          <p:cNvPr id="47" name="Text 42"/>
+          <p:cNvPr id="46" name="Text 41"/>
           <p:cNvSpPr txBox="1"/>
           <p:nvPr/>
         </p:nvSpPr>
@@ -9376,46 +9202,7 @@
       </p:grpSpPr>
       <p:sp>
         <p:nvSpPr>
-          <p:cNvPr id="2" name="Text 0"/>
-          <p:cNvSpPr txBox="1"/>
-          <p:nvPr/>
-        </p:nvSpPr>
-        <p:spPr>
-          <a:xfrm>
-            <a:off x="5760720" y="109728"/>
-            <a:ext cx="5897880" cy="256032"/>
-          </a:xfrm>
-          <a:prstGeom prst="rect">
-            <a:avLst/>
-          </a:prstGeom>
-          <a:noFill/>
-          <a:ln/>
-        </p:spPr>
-        <p:txBody>
-          <a:bodyPr wrap="square" lIns="0" tIns="0" rIns="0" bIns="0" rtlCol="0" anchor="t"/>
-          <a:lstStyle/>
-          <a:p>
-            <a:pPr algn="r" indent="0" marL="0">
-              <a:buNone/>
-            </a:pPr>
-            <a:r>
-              <a:rPr lang="en-US" sz="900" b="1" spc="100" kern="0" dirty="0">
-                <a:solidFill>
-                  <a:srgbClr val="8A93A3"/>
-                </a:solidFill>
-                <a:latin typeface="Calibri" pitchFamily="34" charset="0"/>
-                <a:ea typeface="Calibri" pitchFamily="34" charset="-122"/>
-                <a:cs typeface="Calibri" pitchFamily="34" charset="-120"/>
-              </a:rPr>
-              <a:t>SECTION 5 OF 12  ·  PROPOSED SOLUTION</a:t>
-            </a:r>
-            <a:endParaRPr lang="en-US" sz="900" dirty="0"/>
-          </a:p>
-        </p:txBody>
-      </p:sp>
-      <p:sp>
-        <p:nvSpPr>
-          <p:cNvPr id="3" name="Shape 1"/>
+          <p:cNvPr id="2" name="Shape 0"/>
           <p:cNvSpPr/>
           <p:nvPr/>
         </p:nvSpPr>
@@ -9440,7 +9227,7 @@
       </p:sp>
       <p:sp>
         <p:nvSpPr>
-          <p:cNvPr id="4" name="Text 2"/>
+          <p:cNvPr id="3" name="Text 1"/>
           <p:cNvSpPr txBox="1"/>
           <p:nvPr/>
         </p:nvSpPr>
@@ -9479,7 +9266,7 @@
       </p:sp>
       <p:sp>
         <p:nvSpPr>
-          <p:cNvPr id="5" name="Text 3"/>
+          <p:cNvPr id="4" name="Text 2"/>
           <p:cNvSpPr txBox="1"/>
           <p:nvPr/>
         </p:nvSpPr>
@@ -9518,7 +9305,7 @@
       </p:sp>
       <p:sp>
         <p:nvSpPr>
-          <p:cNvPr id="6" name="Text 4"/>
+          <p:cNvPr id="5" name="Text 3"/>
           <p:cNvSpPr txBox="1"/>
           <p:nvPr/>
         </p:nvSpPr>
@@ -9557,7 +9344,7 @@
       </p:sp>
       <p:sp>
         <p:nvSpPr>
-          <p:cNvPr id="7" name="Text 5"/>
+          <p:cNvPr id="6" name="Text 4"/>
           <p:cNvSpPr txBox="1"/>
           <p:nvPr/>
         </p:nvSpPr>
@@ -9621,7 +9408,7 @@
       </p:sp>
       <p:sp>
         <p:nvSpPr>
-          <p:cNvPr id="8" name="Shape 6"/>
+          <p:cNvPr id="7" name="Shape 5"/>
           <p:cNvSpPr/>
           <p:nvPr/>
         </p:nvSpPr>
@@ -9645,7 +9432,7 @@
       </p:sp>
       <p:sp>
         <p:nvSpPr>
-          <p:cNvPr id="9" name="Text 7"/>
+          <p:cNvPr id="8" name="Text 6"/>
           <p:cNvSpPr txBox="1"/>
           <p:nvPr/>
         </p:nvSpPr>
@@ -9709,7 +9496,7 @@
       </p:sp>
       <p:sp>
         <p:nvSpPr>
-          <p:cNvPr id="10" name="Shape 8"/>
+          <p:cNvPr id="9" name="Shape 7"/>
           <p:cNvSpPr/>
           <p:nvPr/>
         </p:nvSpPr>
@@ -9733,7 +9520,7 @@
       </p:sp>
       <p:sp>
         <p:nvSpPr>
-          <p:cNvPr id="11" name="Text 9"/>
+          <p:cNvPr id="10" name="Text 8"/>
           <p:cNvSpPr txBox="1"/>
           <p:nvPr/>
         </p:nvSpPr>
@@ -9797,7 +9584,7 @@
       </p:sp>
       <p:sp>
         <p:nvSpPr>
-          <p:cNvPr id="12" name="Shape 10"/>
+          <p:cNvPr id="11" name="Shape 9"/>
           <p:cNvSpPr/>
           <p:nvPr/>
         </p:nvSpPr>
@@ -9821,7 +9608,7 @@
       </p:sp>
       <p:sp>
         <p:nvSpPr>
-          <p:cNvPr id="13" name="Text 11"/>
+          <p:cNvPr id="12" name="Text 10"/>
           <p:cNvSpPr txBox="1"/>
           <p:nvPr/>
         </p:nvSpPr>
@@ -9885,7 +9672,7 @@
       </p:sp>
       <p:sp>
         <p:nvSpPr>
-          <p:cNvPr id="14" name="Shape 12"/>
+          <p:cNvPr id="13" name="Shape 11"/>
           <p:cNvSpPr/>
           <p:nvPr/>
         </p:nvSpPr>
@@ -9909,7 +9696,7 @@
       </p:sp>
       <p:sp>
         <p:nvSpPr>
-          <p:cNvPr id="15" name="Text 13"/>
+          <p:cNvPr id="14" name="Text 12"/>
           <p:cNvSpPr txBox="1"/>
           <p:nvPr/>
         </p:nvSpPr>
@@ -9971,7 +9758,7 @@
       </p:sp>
       <p:sp>
         <p:nvSpPr>
-          <p:cNvPr id="16" name="Shape 14"/>
+          <p:cNvPr id="15" name="Shape 13"/>
           <p:cNvSpPr/>
           <p:nvPr/>
         </p:nvSpPr>
@@ -9995,7 +9782,7 @@
       </p:sp>
       <p:sp>
         <p:nvSpPr>
-          <p:cNvPr id="17" name="Text 15"/>
+          <p:cNvPr id="16" name="Text 14"/>
           <p:cNvSpPr txBox="1"/>
           <p:nvPr/>
         </p:nvSpPr>
@@ -10042,7 +9829,7 @@
       </p:sp>
       <p:sp>
         <p:nvSpPr>
-          <p:cNvPr id="18" name="Text 16"/>
+          <p:cNvPr id="17" name="Text 15"/>
           <p:cNvSpPr txBox="1"/>
           <p:nvPr/>
         </p:nvSpPr>
@@ -10081,7 +9868,7 @@
       </p:sp>
       <p:sp>
         <p:nvSpPr>
-          <p:cNvPr id="19" name="Shape 17"/>
+          <p:cNvPr id="18" name="Shape 16"/>
           <p:cNvSpPr/>
           <p:nvPr/>
         </p:nvSpPr>
@@ -10105,7 +9892,7 @@
       </p:sp>
       <p:sp>
         <p:nvSpPr>
-          <p:cNvPr id="20" name="Shape 18"/>
+          <p:cNvPr id="19" name="Shape 17"/>
           <p:cNvSpPr/>
           <p:nvPr/>
         </p:nvSpPr>
@@ -10129,7 +9916,7 @@
       </p:sp>
       <p:sp>
         <p:nvSpPr>
-          <p:cNvPr id="21" name="Text 19"/>
+          <p:cNvPr id="20" name="Text 18"/>
           <p:cNvSpPr txBox="1"/>
           <p:nvPr/>
         </p:nvSpPr>
@@ -10176,7 +9963,7 @@
       </p:sp>
       <p:sp>
         <p:nvSpPr>
-          <p:cNvPr id="22" name="Text 20"/>
+          <p:cNvPr id="21" name="Text 19"/>
           <p:cNvSpPr txBox="1"/>
           <p:nvPr/>
         </p:nvSpPr>
@@ -10215,7 +10002,7 @@
       </p:sp>
       <p:sp>
         <p:nvSpPr>
-          <p:cNvPr id="23" name="Shape 21"/>
+          <p:cNvPr id="22" name="Shape 20"/>
           <p:cNvSpPr/>
           <p:nvPr/>
         </p:nvSpPr>
@@ -10239,7 +10026,7 @@
       </p:sp>
       <p:sp>
         <p:nvSpPr>
-          <p:cNvPr id="24" name="Shape 22"/>
+          <p:cNvPr id="23" name="Shape 21"/>
           <p:cNvSpPr/>
           <p:nvPr/>
         </p:nvSpPr>
@@ -10263,7 +10050,7 @@
       </p:sp>
       <p:sp>
         <p:nvSpPr>
-          <p:cNvPr id="25" name="Text 23"/>
+          <p:cNvPr id="24" name="Text 22"/>
           <p:cNvSpPr txBox="1"/>
           <p:nvPr/>
         </p:nvSpPr>
@@ -10310,7 +10097,7 @@
       </p:sp>
       <p:sp>
         <p:nvSpPr>
-          <p:cNvPr id="26" name="Text 24"/>
+          <p:cNvPr id="25" name="Text 23"/>
           <p:cNvSpPr txBox="1"/>
           <p:nvPr/>
         </p:nvSpPr>
@@ -10349,7 +10136,7 @@
       </p:sp>
       <p:sp>
         <p:nvSpPr>
-          <p:cNvPr id="27" name="Shape 25"/>
+          <p:cNvPr id="26" name="Shape 24"/>
           <p:cNvSpPr/>
           <p:nvPr/>
         </p:nvSpPr>
@@ -10373,7 +10160,7 @@
       </p:sp>
       <p:sp>
         <p:nvSpPr>
-          <p:cNvPr id="28" name="Text 26"/>
+          <p:cNvPr id="27" name="Text 25"/>
           <p:cNvSpPr txBox="1"/>
           <p:nvPr/>
         </p:nvSpPr>
@@ -10420,7 +10207,7 @@
       </p:sp>
       <p:sp>
         <p:nvSpPr>
-          <p:cNvPr id="29" name="Text 27"/>
+          <p:cNvPr id="28" name="Text 26"/>
           <p:cNvSpPr txBox="1"/>
           <p:nvPr/>
         </p:nvSpPr>
@@ -10459,7 +10246,7 @@
       </p:sp>
       <p:sp>
         <p:nvSpPr>
-          <p:cNvPr id="30" name="Shape 28"/>
+          <p:cNvPr id="29" name="Shape 27"/>
           <p:cNvSpPr/>
           <p:nvPr/>
         </p:nvSpPr>
@@ -10493,7 +10280,7 @@
       </p:sp>
       <p:sp>
         <p:nvSpPr>
-          <p:cNvPr id="31" name="Shape 29"/>
+          <p:cNvPr id="30" name="Shape 28"/>
           <p:cNvSpPr/>
           <p:nvPr/>
         </p:nvSpPr>
@@ -10518,7 +10305,7 @@
       </p:sp>
       <p:sp>
         <p:nvSpPr>
-          <p:cNvPr id="32" name="Text 30"/>
+          <p:cNvPr id="31" name="Text 29"/>
           <p:cNvSpPr txBox="1"/>
           <p:nvPr/>
         </p:nvSpPr>
@@ -10557,7 +10344,7 @@
       </p:sp>
       <p:sp>
         <p:nvSpPr>
-          <p:cNvPr id="33" name="Text 31"/>
+          <p:cNvPr id="32" name="Text 30"/>
           <p:cNvSpPr txBox="1"/>
           <p:nvPr/>
         </p:nvSpPr>
@@ -10596,7 +10383,7 @@
       </p:sp>
       <p:sp>
         <p:nvSpPr>
-          <p:cNvPr id="34" name="Text 32"/>
+          <p:cNvPr id="33" name="Text 31"/>
           <p:cNvSpPr txBox="1"/>
           <p:nvPr/>
         </p:nvSpPr>
@@ -10635,7 +10422,7 @@
       </p:sp>
       <p:sp>
         <p:nvSpPr>
-          <p:cNvPr id="35" name="Shape 33"/>
+          <p:cNvPr id="34" name="Shape 32"/>
           <p:cNvSpPr/>
           <p:nvPr/>
         </p:nvSpPr>
@@ -10669,7 +10456,7 @@
       </p:sp>
       <p:sp>
         <p:nvSpPr>
-          <p:cNvPr id="36" name="Shape 34"/>
+          <p:cNvPr id="35" name="Shape 33"/>
           <p:cNvSpPr/>
           <p:nvPr/>
         </p:nvSpPr>
@@ -10694,7 +10481,7 @@
       </p:sp>
       <p:sp>
         <p:nvSpPr>
-          <p:cNvPr id="37" name="Text 35"/>
+          <p:cNvPr id="36" name="Text 34"/>
           <p:cNvSpPr txBox="1"/>
           <p:nvPr/>
         </p:nvSpPr>
@@ -10733,7 +10520,7 @@
       </p:sp>
       <p:sp>
         <p:nvSpPr>
-          <p:cNvPr id="38" name="Text 36"/>
+          <p:cNvPr id="37" name="Text 35"/>
           <p:cNvSpPr txBox="1"/>
           <p:nvPr/>
         </p:nvSpPr>
@@ -10772,7 +10559,7 @@
       </p:sp>
       <p:sp>
         <p:nvSpPr>
-          <p:cNvPr id="39" name="Text 37"/>
+          <p:cNvPr id="38" name="Text 36"/>
           <p:cNvSpPr txBox="1"/>
           <p:nvPr/>
         </p:nvSpPr>
@@ -10811,7 +10598,7 @@
       </p:sp>
       <p:sp>
         <p:nvSpPr>
-          <p:cNvPr id="40" name="Shape 38"/>
+          <p:cNvPr id="39" name="Shape 37"/>
           <p:cNvSpPr/>
           <p:nvPr/>
         </p:nvSpPr>
@@ -10845,7 +10632,7 @@
       </p:sp>
       <p:sp>
         <p:nvSpPr>
-          <p:cNvPr id="41" name="Shape 39"/>
+          <p:cNvPr id="40" name="Shape 38"/>
           <p:cNvSpPr/>
           <p:nvPr/>
         </p:nvSpPr>
@@ -10870,7 +10657,7 @@
       </p:sp>
       <p:sp>
         <p:nvSpPr>
-          <p:cNvPr id="42" name="Text 40"/>
+          <p:cNvPr id="41" name="Text 39"/>
           <p:cNvSpPr txBox="1"/>
           <p:nvPr/>
         </p:nvSpPr>
@@ -10909,7 +10696,7 @@
       </p:sp>
       <p:sp>
         <p:nvSpPr>
-          <p:cNvPr id="43" name="Text 41"/>
+          <p:cNvPr id="42" name="Text 40"/>
           <p:cNvSpPr txBox="1"/>
           <p:nvPr/>
         </p:nvSpPr>
@@ -10948,7 +10735,7 @@
       </p:sp>
       <p:sp>
         <p:nvSpPr>
-          <p:cNvPr id="44" name="Text 42"/>
+          <p:cNvPr id="43" name="Text 41"/>
           <p:cNvSpPr txBox="1"/>
           <p:nvPr/>
         </p:nvSpPr>
@@ -10987,7 +10774,7 @@
       </p:sp>
       <p:sp>
         <p:nvSpPr>
-          <p:cNvPr id="45" name="Shape 43"/>
+          <p:cNvPr id="44" name="Shape 42"/>
           <p:cNvSpPr/>
           <p:nvPr/>
         </p:nvSpPr>
@@ -11021,7 +10808,7 @@
       </p:sp>
       <p:sp>
         <p:nvSpPr>
-          <p:cNvPr id="46" name="Shape 44"/>
+          <p:cNvPr id="45" name="Shape 43"/>
           <p:cNvSpPr/>
           <p:nvPr/>
         </p:nvSpPr>
@@ -11046,7 +10833,7 @@
       </p:sp>
       <p:sp>
         <p:nvSpPr>
-          <p:cNvPr id="47" name="Text 45"/>
+          <p:cNvPr id="46" name="Text 44"/>
           <p:cNvSpPr txBox="1"/>
           <p:nvPr/>
         </p:nvSpPr>
@@ -11085,7 +10872,7 @@
       </p:sp>
       <p:sp>
         <p:nvSpPr>
-          <p:cNvPr id="48" name="Text 46"/>
+          <p:cNvPr id="47" name="Text 45"/>
           <p:cNvSpPr txBox="1"/>
           <p:nvPr/>
         </p:nvSpPr>
@@ -11124,7 +10911,7 @@
       </p:sp>
       <p:sp>
         <p:nvSpPr>
-          <p:cNvPr id="49" name="Text 47"/>
+          <p:cNvPr id="48" name="Text 46"/>
           <p:cNvSpPr txBox="1"/>
           <p:nvPr/>
         </p:nvSpPr>
@@ -11163,7 +10950,7 @@
       </p:sp>
       <p:sp>
         <p:nvSpPr>
-          <p:cNvPr id="50" name="Shape 48"/>
+          <p:cNvPr id="49" name="Shape 47"/>
           <p:cNvSpPr/>
           <p:nvPr/>
         </p:nvSpPr>
@@ -11197,7 +10984,7 @@
       </p:sp>
       <p:sp>
         <p:nvSpPr>
-          <p:cNvPr id="51" name="Shape 49"/>
+          <p:cNvPr id="50" name="Shape 48"/>
           <p:cNvSpPr/>
           <p:nvPr/>
         </p:nvSpPr>
@@ -11222,7 +11009,7 @@
       </p:sp>
       <p:sp>
         <p:nvSpPr>
-          <p:cNvPr id="52" name="Text 50"/>
+          <p:cNvPr id="51" name="Text 49"/>
           <p:cNvSpPr txBox="1"/>
           <p:nvPr/>
         </p:nvSpPr>
@@ -11261,7 +11048,7 @@
       </p:sp>
       <p:sp>
         <p:nvSpPr>
-          <p:cNvPr id="53" name="Text 51"/>
+          <p:cNvPr id="52" name="Text 50"/>
           <p:cNvSpPr txBox="1"/>
           <p:nvPr/>
         </p:nvSpPr>
@@ -11300,7 +11087,7 @@
       </p:sp>
       <p:sp>
         <p:nvSpPr>
-          <p:cNvPr id="54" name="Text 52"/>
+          <p:cNvPr id="53" name="Text 51"/>
           <p:cNvSpPr txBox="1"/>
           <p:nvPr/>
         </p:nvSpPr>
@@ -11339,7 +11126,7 @@
       </p:sp>
       <p:sp>
         <p:nvSpPr>
-          <p:cNvPr id="55" name="Shape 53"/>
+          <p:cNvPr id="54" name="Shape 52"/>
           <p:cNvSpPr/>
           <p:nvPr/>
         </p:nvSpPr>
@@ -11373,7 +11160,7 @@
       </p:sp>
       <p:sp>
         <p:nvSpPr>
-          <p:cNvPr id="56" name="Shape 54"/>
+          <p:cNvPr id="55" name="Shape 53"/>
           <p:cNvSpPr/>
           <p:nvPr/>
         </p:nvSpPr>
@@ -11398,7 +11185,7 @@
       </p:sp>
       <p:sp>
         <p:nvSpPr>
-          <p:cNvPr id="57" name="Text 55"/>
+          <p:cNvPr id="56" name="Text 54"/>
           <p:cNvSpPr txBox="1"/>
           <p:nvPr/>
         </p:nvSpPr>
@@ -11437,7 +11224,7 @@
       </p:sp>
       <p:sp>
         <p:nvSpPr>
-          <p:cNvPr id="58" name="Text 56"/>
+          <p:cNvPr id="57" name="Text 55"/>
           <p:cNvSpPr txBox="1"/>
           <p:nvPr/>
         </p:nvSpPr>
@@ -11476,7 +11263,7 @@
       </p:sp>
       <p:sp>
         <p:nvSpPr>
-          <p:cNvPr id="59" name="Text 57"/>
+          <p:cNvPr id="58" name="Text 56"/>
           <p:cNvSpPr txBox="1"/>
           <p:nvPr/>
         </p:nvSpPr>
@@ -11515,7 +11302,7 @@
       </p:sp>
       <p:sp>
         <p:nvSpPr>
-          <p:cNvPr id="60" name="Text 58"/>
+          <p:cNvPr id="59" name="Text 57"/>
           <p:cNvSpPr txBox="1"/>
           <p:nvPr/>
         </p:nvSpPr>
@@ -11586,46 +11373,7 @@
       </p:grpSpPr>
       <p:sp>
         <p:nvSpPr>
-          <p:cNvPr id="2" name="Text 0"/>
-          <p:cNvSpPr txBox="1"/>
-          <p:nvPr/>
-        </p:nvSpPr>
-        <p:spPr>
-          <a:xfrm>
-            <a:off x="5760720" y="109728"/>
-            <a:ext cx="5897880" cy="256032"/>
-          </a:xfrm>
-          <a:prstGeom prst="rect">
-            <a:avLst/>
-          </a:prstGeom>
-          <a:noFill/>
-          <a:ln/>
-        </p:spPr>
-        <p:txBody>
-          <a:bodyPr wrap="square" lIns="0" tIns="0" rIns="0" bIns="0" rtlCol="0" anchor="t"/>
-          <a:lstStyle/>
-          <a:p>
-            <a:pPr algn="r" indent="0" marL="0">
-              <a:buNone/>
-            </a:pPr>
-            <a:r>
-              <a:rPr lang="en-US" sz="900" b="1" spc="100" kern="0" dirty="0">
-                <a:solidFill>
-                  <a:srgbClr val="8A93A3"/>
-                </a:solidFill>
-                <a:latin typeface="Calibri" pitchFamily="34" charset="0"/>
-                <a:ea typeface="Calibri" pitchFamily="34" charset="-122"/>
-                <a:cs typeface="Calibri" pitchFamily="34" charset="-120"/>
-              </a:rPr>
-              <a:t>SECTION 5 OF 12  ·  PROPOSED SOLUTION</a:t>
-            </a:r>
-            <a:endParaRPr lang="en-US" sz="900" dirty="0"/>
-          </a:p>
-        </p:txBody>
-      </p:sp>
-      <p:sp>
-        <p:nvSpPr>
-          <p:cNvPr id="3" name="Shape 1"/>
+          <p:cNvPr id="2" name="Shape 0"/>
           <p:cNvSpPr/>
           <p:nvPr/>
         </p:nvSpPr>
@@ -11650,7 +11398,7 @@
       </p:sp>
       <p:sp>
         <p:nvSpPr>
-          <p:cNvPr id="4" name="Text 2"/>
+          <p:cNvPr id="3" name="Text 1"/>
           <p:cNvSpPr txBox="1"/>
           <p:nvPr/>
         </p:nvSpPr>
@@ -11689,7 +11437,7 @@
       </p:sp>
       <p:sp>
         <p:nvSpPr>
-          <p:cNvPr id="5" name="Text 3"/>
+          <p:cNvPr id="4" name="Text 2"/>
           <p:cNvSpPr txBox="1"/>
           <p:nvPr/>
         </p:nvSpPr>
@@ -11728,7 +11476,7 @@
       </p:sp>
       <p:sp>
         <p:nvSpPr>
-          <p:cNvPr id="6" name="Text 4"/>
+          <p:cNvPr id="5" name="Text 3"/>
           <p:cNvSpPr txBox="1"/>
           <p:nvPr/>
         </p:nvSpPr>
@@ -11767,7 +11515,7 @@
       </p:sp>
       <p:sp>
         <p:nvSpPr>
-          <p:cNvPr id="7" name="Shape 5"/>
+          <p:cNvPr id="6" name="Shape 4"/>
           <p:cNvSpPr/>
           <p:nvPr/>
         </p:nvSpPr>
@@ -11801,7 +11549,7 @@
       </p:sp>
       <p:sp>
         <p:nvSpPr>
-          <p:cNvPr id="8" name="Shape 6"/>
+          <p:cNvPr id="7" name="Shape 5"/>
           <p:cNvSpPr/>
           <p:nvPr/>
         </p:nvSpPr>
@@ -11826,7 +11574,7 @@
       </p:sp>
       <p:sp>
         <p:nvSpPr>
-          <p:cNvPr id="9" name="Text 7"/>
+          <p:cNvPr id="8" name="Text 6"/>
           <p:cNvSpPr txBox="1"/>
           <p:nvPr/>
         </p:nvSpPr>
@@ -11865,7 +11613,7 @@
       </p:sp>
       <p:sp>
         <p:nvSpPr>
-          <p:cNvPr id="10" name="Text 8"/>
+          <p:cNvPr id="9" name="Text 7"/>
           <p:cNvSpPr txBox="1"/>
           <p:nvPr/>
         </p:nvSpPr>
@@ -11904,7 +11652,7 @@
       </p:sp>
       <p:sp>
         <p:nvSpPr>
-          <p:cNvPr id="11" name="Text 9"/>
+          <p:cNvPr id="10" name="Text 8"/>
           <p:cNvSpPr txBox="1"/>
           <p:nvPr/>
         </p:nvSpPr>
@@ -11943,7 +11691,7 @@
       </p:sp>
       <p:sp>
         <p:nvSpPr>
-          <p:cNvPr id="12" name="Text 10"/>
+          <p:cNvPr id="11" name="Text 9"/>
           <p:cNvSpPr txBox="1"/>
           <p:nvPr/>
         </p:nvSpPr>
@@ -11990,7 +11738,7 @@
       </p:sp>
       <p:sp>
         <p:nvSpPr>
-          <p:cNvPr id="13" name="Shape 11"/>
+          <p:cNvPr id="12" name="Shape 10"/>
           <p:cNvSpPr/>
           <p:nvPr/>
         </p:nvSpPr>
@@ -12014,7 +11762,7 @@
       </p:sp>
       <p:sp>
         <p:nvSpPr>
-          <p:cNvPr id="14" name="Shape 12"/>
+          <p:cNvPr id="13" name="Shape 11"/>
           <p:cNvSpPr/>
           <p:nvPr/>
         </p:nvSpPr>
@@ -12048,7 +11796,7 @@
       </p:sp>
       <p:sp>
         <p:nvSpPr>
-          <p:cNvPr id="15" name="Shape 13"/>
+          <p:cNvPr id="14" name="Shape 12"/>
           <p:cNvSpPr/>
           <p:nvPr/>
         </p:nvSpPr>
@@ -12073,7 +11821,7 @@
       </p:sp>
       <p:sp>
         <p:nvSpPr>
-          <p:cNvPr id="16" name="Text 14"/>
+          <p:cNvPr id="15" name="Text 13"/>
           <p:cNvSpPr txBox="1"/>
           <p:nvPr/>
         </p:nvSpPr>
@@ -12112,7 +11860,7 @@
       </p:sp>
       <p:sp>
         <p:nvSpPr>
-          <p:cNvPr id="17" name="Text 15"/>
+          <p:cNvPr id="16" name="Text 14"/>
           <p:cNvSpPr txBox="1"/>
           <p:nvPr/>
         </p:nvSpPr>
@@ -12151,7 +11899,7 @@
       </p:sp>
       <p:sp>
         <p:nvSpPr>
-          <p:cNvPr id="18" name="Text 16"/>
+          <p:cNvPr id="17" name="Text 15"/>
           <p:cNvSpPr txBox="1"/>
           <p:nvPr/>
         </p:nvSpPr>
@@ -12190,7 +11938,7 @@
       </p:sp>
       <p:sp>
         <p:nvSpPr>
-          <p:cNvPr id="19" name="Text 17"/>
+          <p:cNvPr id="18" name="Text 16"/>
           <p:cNvSpPr txBox="1"/>
           <p:nvPr/>
         </p:nvSpPr>
@@ -12237,7 +11985,7 @@
       </p:sp>
       <p:sp>
         <p:nvSpPr>
-          <p:cNvPr id="20" name="Shape 18"/>
+          <p:cNvPr id="19" name="Shape 17"/>
           <p:cNvSpPr/>
           <p:nvPr/>
         </p:nvSpPr>
@@ -12261,7 +12009,7 @@
       </p:sp>
       <p:sp>
         <p:nvSpPr>
-          <p:cNvPr id="21" name="Shape 19"/>
+          <p:cNvPr id="20" name="Shape 18"/>
           <p:cNvSpPr/>
           <p:nvPr/>
         </p:nvSpPr>
@@ -12295,7 +12043,7 @@
       </p:sp>
       <p:sp>
         <p:nvSpPr>
-          <p:cNvPr id="22" name="Shape 20"/>
+          <p:cNvPr id="21" name="Shape 19"/>
           <p:cNvSpPr/>
           <p:nvPr/>
         </p:nvSpPr>
@@ -12320,7 +12068,7 @@
       </p:sp>
       <p:sp>
         <p:nvSpPr>
-          <p:cNvPr id="23" name="Text 21"/>
+          <p:cNvPr id="22" name="Text 20"/>
           <p:cNvSpPr txBox="1"/>
           <p:nvPr/>
         </p:nvSpPr>
@@ -12359,7 +12107,7 @@
       </p:sp>
       <p:sp>
         <p:nvSpPr>
-          <p:cNvPr id="24" name="Text 22"/>
+          <p:cNvPr id="23" name="Text 21"/>
           <p:cNvSpPr txBox="1"/>
           <p:nvPr/>
         </p:nvSpPr>
@@ -12398,7 +12146,7 @@
       </p:sp>
       <p:sp>
         <p:nvSpPr>
-          <p:cNvPr id="25" name="Text 23"/>
+          <p:cNvPr id="24" name="Text 22"/>
           <p:cNvSpPr txBox="1"/>
           <p:nvPr/>
         </p:nvSpPr>
@@ -12437,7 +12185,7 @@
       </p:sp>
       <p:sp>
         <p:nvSpPr>
-          <p:cNvPr id="26" name="Text 24"/>
+          <p:cNvPr id="25" name="Text 23"/>
           <p:cNvSpPr txBox="1"/>
           <p:nvPr/>
         </p:nvSpPr>
@@ -12484,7 +12232,7 @@
       </p:sp>
       <p:sp>
         <p:nvSpPr>
-          <p:cNvPr id="27" name="Text 25"/>
+          <p:cNvPr id="26" name="Text 24"/>
           <p:cNvSpPr txBox="1"/>
           <p:nvPr/>
         </p:nvSpPr>
@@ -12531,7 +12279,7 @@
       </p:sp>
       <p:sp>
         <p:nvSpPr>
-          <p:cNvPr id="28" name="Shape 26"/>
+          <p:cNvPr id="27" name="Shape 25"/>
           <p:cNvSpPr/>
           <p:nvPr/>
         </p:nvSpPr>
@@ -12555,7 +12303,7 @@
       </p:sp>
       <p:sp>
         <p:nvSpPr>
-          <p:cNvPr id="29" name="Shape 27"/>
+          <p:cNvPr id="28" name="Shape 26"/>
           <p:cNvSpPr/>
           <p:nvPr/>
         </p:nvSpPr>
@@ -12589,7 +12337,7 @@
       </p:sp>
       <p:sp>
         <p:nvSpPr>
-          <p:cNvPr id="30" name="Shape 28"/>
+          <p:cNvPr id="29" name="Shape 27"/>
           <p:cNvSpPr/>
           <p:nvPr/>
         </p:nvSpPr>
@@ -12614,7 +12362,7 @@
       </p:sp>
       <p:sp>
         <p:nvSpPr>
-          <p:cNvPr id="31" name="Text 29"/>
+          <p:cNvPr id="30" name="Text 28"/>
           <p:cNvSpPr txBox="1"/>
           <p:nvPr/>
         </p:nvSpPr>
@@ -12653,7 +12401,7 @@
       </p:sp>
       <p:sp>
         <p:nvSpPr>
-          <p:cNvPr id="32" name="Text 30"/>
+          <p:cNvPr id="31" name="Text 29"/>
           <p:cNvSpPr txBox="1"/>
           <p:nvPr/>
         </p:nvSpPr>
@@ -12692,7 +12440,7 @@
       </p:sp>
       <p:sp>
         <p:nvSpPr>
-          <p:cNvPr id="33" name="Text 31"/>
+          <p:cNvPr id="32" name="Text 30"/>
           <p:cNvSpPr txBox="1"/>
           <p:nvPr/>
         </p:nvSpPr>
@@ -12731,7 +12479,7 @@
       </p:sp>
       <p:sp>
         <p:nvSpPr>
-          <p:cNvPr id="34" name="Text 32"/>
+          <p:cNvPr id="33" name="Text 31"/>
           <p:cNvSpPr txBox="1"/>
           <p:nvPr/>
         </p:nvSpPr>
@@ -12778,7 +12526,7 @@
       </p:sp>
       <p:sp>
         <p:nvSpPr>
-          <p:cNvPr id="35" name="Shape 33"/>
+          <p:cNvPr id="34" name="Shape 32"/>
           <p:cNvSpPr/>
           <p:nvPr/>
         </p:nvSpPr>
@@ -12802,7 +12550,7 @@
       </p:sp>
       <p:sp>
         <p:nvSpPr>
-          <p:cNvPr id="36" name="Shape 34"/>
+          <p:cNvPr id="35" name="Shape 33"/>
           <p:cNvSpPr/>
           <p:nvPr/>
         </p:nvSpPr>
@@ -12836,7 +12584,7 @@
       </p:sp>
       <p:sp>
         <p:nvSpPr>
-          <p:cNvPr id="37" name="Shape 35"/>
+          <p:cNvPr id="36" name="Shape 34"/>
           <p:cNvSpPr/>
           <p:nvPr/>
         </p:nvSpPr>
@@ -12861,7 +12609,7 @@
       </p:sp>
       <p:sp>
         <p:nvSpPr>
-          <p:cNvPr id="38" name="Text 36"/>
+          <p:cNvPr id="37" name="Text 35"/>
           <p:cNvSpPr txBox="1"/>
           <p:nvPr/>
         </p:nvSpPr>
@@ -12900,7 +12648,7 @@
       </p:sp>
       <p:sp>
         <p:nvSpPr>
-          <p:cNvPr id="39" name="Text 37"/>
+          <p:cNvPr id="38" name="Text 36"/>
           <p:cNvSpPr txBox="1"/>
           <p:nvPr/>
         </p:nvSpPr>
@@ -12939,7 +12687,7 @@
       </p:sp>
       <p:sp>
         <p:nvSpPr>
-          <p:cNvPr id="40" name="Text 38"/>
+          <p:cNvPr id="39" name="Text 37"/>
           <p:cNvSpPr txBox="1"/>
           <p:nvPr/>
         </p:nvSpPr>
@@ -12978,7 +12726,7 @@
       </p:sp>
       <p:sp>
         <p:nvSpPr>
-          <p:cNvPr id="41" name="Text 39"/>
+          <p:cNvPr id="40" name="Text 38"/>
           <p:cNvSpPr txBox="1"/>
           <p:nvPr/>
         </p:nvSpPr>
@@ -13025,7 +12773,7 @@
       </p:sp>
       <p:sp>
         <p:nvSpPr>
-          <p:cNvPr id="42" name="Shape 40"/>
+          <p:cNvPr id="41" name="Shape 39"/>
           <p:cNvSpPr/>
           <p:nvPr/>
         </p:nvSpPr>
@@ -13049,7 +12797,7 @@
       </p:sp>
       <p:sp>
         <p:nvSpPr>
-          <p:cNvPr id="43" name="Shape 41"/>
+          <p:cNvPr id="42" name="Shape 40"/>
           <p:cNvSpPr/>
           <p:nvPr/>
         </p:nvSpPr>
@@ -13083,7 +12831,7 @@
       </p:sp>
       <p:sp>
         <p:nvSpPr>
-          <p:cNvPr id="44" name="Shape 42"/>
+          <p:cNvPr id="43" name="Shape 41"/>
           <p:cNvSpPr/>
           <p:nvPr/>
         </p:nvSpPr>
@@ -13108,7 +12856,7 @@
       </p:sp>
       <p:sp>
         <p:nvSpPr>
-          <p:cNvPr id="45" name="Text 43"/>
+          <p:cNvPr id="44" name="Text 42"/>
           <p:cNvSpPr txBox="1"/>
           <p:nvPr/>
         </p:nvSpPr>
@@ -13147,7 +12895,7 @@
       </p:sp>
       <p:sp>
         <p:nvSpPr>
-          <p:cNvPr id="46" name="Text 44"/>
+          <p:cNvPr id="45" name="Text 43"/>
           <p:cNvSpPr txBox="1"/>
           <p:nvPr/>
         </p:nvSpPr>
@@ -13186,7 +12934,7 @@
       </p:sp>
       <p:sp>
         <p:nvSpPr>
-          <p:cNvPr id="47" name="Text 45"/>
+          <p:cNvPr id="46" name="Text 44"/>
           <p:cNvSpPr txBox="1"/>
           <p:nvPr/>
         </p:nvSpPr>
@@ -13225,7 +12973,7 @@
       </p:sp>
       <p:sp>
         <p:nvSpPr>
-          <p:cNvPr id="48" name="Text 46"/>
+          <p:cNvPr id="47" name="Text 45"/>
           <p:cNvSpPr txBox="1"/>
           <p:nvPr/>
         </p:nvSpPr>
@@ -13272,7 +13020,7 @@
       </p:sp>
       <p:sp>
         <p:nvSpPr>
-          <p:cNvPr id="49" name="Shape 47"/>
+          <p:cNvPr id="48" name="Shape 46"/>
           <p:cNvSpPr/>
           <p:nvPr/>
         </p:nvSpPr>
@@ -13296,7 +13044,7 @@
       </p:sp>
       <p:sp>
         <p:nvSpPr>
-          <p:cNvPr id="50" name="Shape 48"/>
+          <p:cNvPr id="49" name="Shape 47"/>
           <p:cNvSpPr/>
           <p:nvPr/>
         </p:nvSpPr>
@@ -13330,7 +13078,7 @@
       </p:sp>
       <p:sp>
         <p:nvSpPr>
-          <p:cNvPr id="51" name="Shape 49"/>
+          <p:cNvPr id="50" name="Shape 48"/>
           <p:cNvSpPr/>
           <p:nvPr/>
         </p:nvSpPr>
@@ -13355,7 +13103,7 @@
       </p:sp>
       <p:sp>
         <p:nvSpPr>
-          <p:cNvPr id="52" name="Text 50"/>
+          <p:cNvPr id="51" name="Text 49"/>
           <p:cNvSpPr txBox="1"/>
           <p:nvPr/>
         </p:nvSpPr>
@@ -13394,7 +13142,7 @@
       </p:sp>
       <p:sp>
         <p:nvSpPr>
-          <p:cNvPr id="53" name="Text 51"/>
+          <p:cNvPr id="52" name="Text 50"/>
           <p:cNvSpPr txBox="1"/>
           <p:nvPr/>
         </p:nvSpPr>
@@ -13433,7 +13181,7 @@
       </p:sp>
       <p:sp>
         <p:nvSpPr>
-          <p:cNvPr id="54" name="Text 52"/>
+          <p:cNvPr id="53" name="Text 51"/>
           <p:cNvSpPr txBox="1"/>
           <p:nvPr/>
         </p:nvSpPr>
@@ -13472,7 +13220,7 @@
       </p:sp>
       <p:sp>
         <p:nvSpPr>
-          <p:cNvPr id="55" name="Text 53"/>
+          <p:cNvPr id="54" name="Text 52"/>
           <p:cNvSpPr txBox="1"/>
           <p:nvPr/>
         </p:nvSpPr>
@@ -13519,7 +13267,7 @@
       </p:sp>
       <p:sp>
         <p:nvSpPr>
-          <p:cNvPr id="56" name="Text 54"/>
+          <p:cNvPr id="55" name="Text 53"/>
           <p:cNvSpPr txBox="1"/>
           <p:nvPr/>
         </p:nvSpPr>
@@ -13566,7 +13314,7 @@
       </p:sp>
       <p:sp>
         <p:nvSpPr>
-          <p:cNvPr id="57" name="Shape 55"/>
+          <p:cNvPr id="56" name="Shape 54"/>
           <p:cNvSpPr/>
           <p:nvPr/>
         </p:nvSpPr>
@@ -13590,7 +13338,7 @@
       </p:sp>
       <p:sp>
         <p:nvSpPr>
-          <p:cNvPr id="58" name="Shape 56"/>
+          <p:cNvPr id="57" name="Shape 55"/>
           <p:cNvSpPr/>
           <p:nvPr/>
         </p:nvSpPr>
@@ -13624,7 +13372,7 @@
       </p:sp>
       <p:sp>
         <p:nvSpPr>
-          <p:cNvPr id="59" name="Shape 57"/>
+          <p:cNvPr id="58" name="Shape 56"/>
           <p:cNvSpPr/>
           <p:nvPr/>
         </p:nvSpPr>
@@ -13649,7 +13397,7 @@
       </p:sp>
       <p:sp>
         <p:nvSpPr>
-          <p:cNvPr id="60" name="Text 58"/>
+          <p:cNvPr id="59" name="Text 57"/>
           <p:cNvSpPr txBox="1"/>
           <p:nvPr/>
         </p:nvSpPr>
@@ -13688,7 +13436,7 @@
       </p:sp>
       <p:sp>
         <p:nvSpPr>
-          <p:cNvPr id="61" name="Text 59"/>
+          <p:cNvPr id="60" name="Text 58"/>
           <p:cNvSpPr txBox="1"/>
           <p:nvPr/>
         </p:nvSpPr>
@@ -13727,7 +13475,7 @@
       </p:sp>
       <p:sp>
         <p:nvSpPr>
-          <p:cNvPr id="62" name="Text 60"/>
+          <p:cNvPr id="61" name="Text 59"/>
           <p:cNvSpPr txBox="1"/>
           <p:nvPr/>
         </p:nvSpPr>
@@ -13766,7 +13514,7 @@
       </p:sp>
       <p:sp>
         <p:nvSpPr>
-          <p:cNvPr id="63" name="Shape 61"/>
+          <p:cNvPr id="62" name="Shape 60"/>
           <p:cNvSpPr/>
           <p:nvPr/>
         </p:nvSpPr>
@@ -13790,7 +13538,7 @@
       </p:sp>
       <p:sp>
         <p:nvSpPr>
-          <p:cNvPr id="64" name="Shape 62"/>
+          <p:cNvPr id="63" name="Shape 61"/>
           <p:cNvSpPr/>
           <p:nvPr/>
         </p:nvSpPr>
@@ -13824,7 +13572,7 @@
       </p:sp>
       <p:sp>
         <p:nvSpPr>
-          <p:cNvPr id="65" name="Shape 63"/>
+          <p:cNvPr id="64" name="Shape 62"/>
           <p:cNvSpPr/>
           <p:nvPr/>
         </p:nvSpPr>
@@ -13849,7 +13597,7 @@
       </p:sp>
       <p:sp>
         <p:nvSpPr>
-          <p:cNvPr id="66" name="Text 64"/>
+          <p:cNvPr id="65" name="Text 63"/>
           <p:cNvSpPr txBox="1"/>
           <p:nvPr/>
         </p:nvSpPr>
@@ -13888,7 +13636,7 @@
       </p:sp>
       <p:sp>
         <p:nvSpPr>
-          <p:cNvPr id="67" name="Text 65"/>
+          <p:cNvPr id="66" name="Text 64"/>
           <p:cNvSpPr txBox="1"/>
           <p:nvPr/>
         </p:nvSpPr>
@@ -13927,7 +13675,7 @@
       </p:sp>
       <p:sp>
         <p:nvSpPr>
-          <p:cNvPr id="68" name="Text 66"/>
+          <p:cNvPr id="67" name="Text 65"/>
           <p:cNvSpPr txBox="1"/>
           <p:nvPr/>
         </p:nvSpPr>
@@ -13966,7 +13714,7 @@
       </p:sp>
       <p:sp>
         <p:nvSpPr>
-          <p:cNvPr id="69" name="Text 67"/>
+          <p:cNvPr id="68" name="Text 66"/>
           <p:cNvSpPr txBox="1"/>
           <p:nvPr/>
         </p:nvSpPr>
@@ -14013,7 +13761,7 @@
       </p:sp>
       <p:sp>
         <p:nvSpPr>
-          <p:cNvPr id="70" name="Shape 68"/>
+          <p:cNvPr id="69" name="Shape 67"/>
           <p:cNvSpPr/>
           <p:nvPr/>
         </p:nvSpPr>
@@ -14037,7 +13785,7 @@
       </p:sp>
       <p:sp>
         <p:nvSpPr>
-          <p:cNvPr id="71" name="Shape 69"/>
+          <p:cNvPr id="70" name="Shape 68"/>
           <p:cNvSpPr/>
           <p:nvPr/>
         </p:nvSpPr>
@@ -14071,7 +13819,7 @@
       </p:sp>
       <p:sp>
         <p:nvSpPr>
-          <p:cNvPr id="72" name="Shape 70"/>
+          <p:cNvPr id="71" name="Shape 69"/>
           <p:cNvSpPr/>
           <p:nvPr/>
         </p:nvSpPr>
@@ -14096,7 +13844,7 @@
       </p:sp>
       <p:sp>
         <p:nvSpPr>
-          <p:cNvPr id="73" name="Text 71"/>
+          <p:cNvPr id="72" name="Text 70"/>
           <p:cNvSpPr txBox="1"/>
           <p:nvPr/>
         </p:nvSpPr>
@@ -14135,7 +13883,7 @@
       </p:sp>
       <p:sp>
         <p:nvSpPr>
-          <p:cNvPr id="74" name="Text 72"/>
+          <p:cNvPr id="73" name="Text 71"/>
           <p:cNvSpPr txBox="1"/>
           <p:nvPr/>
         </p:nvSpPr>
@@ -14174,7 +13922,7 @@
       </p:sp>
       <p:sp>
         <p:nvSpPr>
-          <p:cNvPr id="75" name="Text 73"/>
+          <p:cNvPr id="74" name="Text 72"/>
           <p:cNvSpPr txBox="1"/>
           <p:nvPr/>
         </p:nvSpPr>
@@ -14213,7 +13961,7 @@
       </p:sp>
       <p:sp>
         <p:nvSpPr>
-          <p:cNvPr id="76" name="Text 74"/>
+          <p:cNvPr id="75" name="Text 73"/>
           <p:cNvSpPr txBox="1"/>
           <p:nvPr/>
         </p:nvSpPr>
@@ -14260,7 +14008,7 @@
       </p:sp>
       <p:sp>
         <p:nvSpPr>
-          <p:cNvPr id="77" name="Text 75"/>
+          <p:cNvPr id="76" name="Text 74"/>
           <p:cNvSpPr txBox="1"/>
           <p:nvPr/>
         </p:nvSpPr>
@@ -14375,7 +14123,7 @@
       </p:sp>
       <p:sp>
         <p:nvSpPr>
-          <p:cNvPr id="78" name="Text 76"/>
+          <p:cNvPr id="77" name="Text 75"/>
           <p:cNvSpPr txBox="1"/>
           <p:nvPr/>
         </p:nvSpPr>
@@ -14446,46 +14194,7 @@
       </p:grpSpPr>
       <p:sp>
         <p:nvSpPr>
-          <p:cNvPr id="2" name="Text 0"/>
-          <p:cNvSpPr txBox="1"/>
-          <p:nvPr/>
-        </p:nvSpPr>
-        <p:spPr>
-          <a:xfrm>
-            <a:off x="5760720" y="109728"/>
-            <a:ext cx="5897880" cy="256032"/>
-          </a:xfrm>
-          <a:prstGeom prst="rect">
-            <a:avLst/>
-          </a:prstGeom>
-          <a:noFill/>
-          <a:ln/>
-        </p:spPr>
-        <p:txBody>
-          <a:bodyPr wrap="square" lIns="0" tIns="0" rIns="0" bIns="0" rtlCol="0" anchor="t"/>
-          <a:lstStyle/>
-          <a:p>
-            <a:pPr algn="r" indent="0" marL="0">
-              <a:buNone/>
-            </a:pPr>
-            <a:r>
-              <a:rPr lang="en-US" sz="900" b="1" spc="100" kern="0" dirty="0">
-                <a:solidFill>
-                  <a:srgbClr val="8A93A3"/>
-                </a:solidFill>
-                <a:latin typeface="Calibri" pitchFamily="34" charset="0"/>
-                <a:ea typeface="Calibri" pitchFamily="34" charset="-122"/>
-                <a:cs typeface="Calibri" pitchFamily="34" charset="-120"/>
-              </a:rPr>
-              <a:t>SECTION 5 OF 12  ·  PROPOSED SOLUTION</a:t>
-            </a:r>
-            <a:endParaRPr lang="en-US" sz="900" dirty="0"/>
-          </a:p>
-        </p:txBody>
-      </p:sp>
-      <p:sp>
-        <p:nvSpPr>
-          <p:cNvPr id="3" name="Shape 1"/>
+          <p:cNvPr id="2" name="Shape 0"/>
           <p:cNvSpPr/>
           <p:nvPr/>
         </p:nvSpPr>
@@ -14510,7 +14219,7 @@
       </p:sp>
       <p:sp>
         <p:nvSpPr>
-          <p:cNvPr id="4" name="Text 2"/>
+          <p:cNvPr id="3" name="Text 1"/>
           <p:cNvSpPr txBox="1"/>
           <p:nvPr/>
         </p:nvSpPr>
@@ -14549,7 +14258,7 @@
       </p:sp>
       <p:sp>
         <p:nvSpPr>
-          <p:cNvPr id="5" name="Text 3"/>
+          <p:cNvPr id="4" name="Text 2"/>
           <p:cNvSpPr txBox="1"/>
           <p:nvPr/>
         </p:nvSpPr>
@@ -14588,7 +14297,7 @@
       </p:sp>
       <p:sp>
         <p:nvSpPr>
-          <p:cNvPr id="6" name="Text 4"/>
+          <p:cNvPr id="5" name="Text 3"/>
           <p:cNvSpPr txBox="1"/>
           <p:nvPr/>
         </p:nvSpPr>
@@ -14627,7 +14336,7 @@
       </p:sp>
       <p:sp>
         <p:nvSpPr>
-          <p:cNvPr id="7" name="Text 5"/>
+          <p:cNvPr id="6" name="Text 4"/>
           <p:cNvSpPr txBox="1"/>
           <p:nvPr/>
         </p:nvSpPr>
@@ -14691,7 +14400,7 @@
       </p:sp>
       <p:sp>
         <p:nvSpPr>
-          <p:cNvPr id="8" name="Shape 6"/>
+          <p:cNvPr id="7" name="Shape 5"/>
           <p:cNvSpPr/>
           <p:nvPr/>
         </p:nvSpPr>
@@ -14715,7 +14424,7 @@
       </p:sp>
       <p:sp>
         <p:nvSpPr>
-          <p:cNvPr id="9" name="Text 7"/>
+          <p:cNvPr id="8" name="Text 6"/>
           <p:cNvSpPr txBox="1"/>
           <p:nvPr/>
         </p:nvSpPr>
@@ -14794,7 +14503,7 @@
       </p:sp>
       <p:sp>
         <p:nvSpPr>
-          <p:cNvPr id="10" name="Shape 8"/>
+          <p:cNvPr id="9" name="Shape 7"/>
           <p:cNvSpPr/>
           <p:nvPr/>
         </p:nvSpPr>
@@ -14818,7 +14527,7 @@
       </p:sp>
       <p:sp>
         <p:nvSpPr>
-          <p:cNvPr id="11" name="Text 9"/>
+          <p:cNvPr id="10" name="Text 8"/>
           <p:cNvSpPr txBox="1"/>
           <p:nvPr/>
         </p:nvSpPr>
@@ -14897,7 +14606,7 @@
       </p:sp>
       <p:sp>
         <p:nvSpPr>
-          <p:cNvPr id="12" name="Shape 10"/>
+          <p:cNvPr id="11" name="Shape 9"/>
           <p:cNvSpPr/>
           <p:nvPr/>
         </p:nvSpPr>
@@ -14921,7 +14630,7 @@
       </p:sp>
       <p:sp>
         <p:nvSpPr>
-          <p:cNvPr id="13" name="Text 11"/>
+          <p:cNvPr id="12" name="Text 10"/>
           <p:cNvSpPr txBox="1"/>
           <p:nvPr/>
         </p:nvSpPr>
@@ -14985,7 +14694,7 @@
       </p:sp>
       <p:sp>
         <p:nvSpPr>
-          <p:cNvPr id="14" name="Text 12"/>
+          <p:cNvPr id="13" name="Text 11"/>
           <p:cNvSpPr txBox="1"/>
           <p:nvPr/>
         </p:nvSpPr>
@@ -15049,7 +14758,7 @@
       </p:sp>
       <p:sp>
         <p:nvSpPr>
-          <p:cNvPr id="15" name="Text 13"/>
+          <p:cNvPr id="14" name="Text 12"/>
           <p:cNvSpPr txBox="1"/>
           <p:nvPr/>
         </p:nvSpPr>
@@ -15113,7 +14822,7 @@
       </p:sp>
       <p:sp>
         <p:nvSpPr>
-          <p:cNvPr id="16" name="Shape 14"/>
+          <p:cNvPr id="15" name="Shape 13"/>
           <p:cNvSpPr/>
           <p:nvPr/>
         </p:nvSpPr>
@@ -15147,7 +14856,7 @@
       </p:sp>
       <p:sp>
         <p:nvSpPr>
-          <p:cNvPr id="17" name="Text 15"/>
+          <p:cNvPr id="16" name="Text 14"/>
           <p:cNvSpPr txBox="1"/>
           <p:nvPr/>
         </p:nvSpPr>
@@ -15186,7 +14895,7 @@
       </p:sp>
       <p:sp>
         <p:nvSpPr>
-          <p:cNvPr id="18" name="Text 16"/>
+          <p:cNvPr id="17" name="Text 15"/>
           <p:cNvSpPr txBox="1"/>
           <p:nvPr/>
         </p:nvSpPr>
@@ -15225,7 +14934,7 @@
       </p:sp>
       <p:sp>
         <p:nvSpPr>
-          <p:cNvPr id="19" name="Text 17"/>
+          <p:cNvPr id="18" name="Text 16"/>
           <p:cNvSpPr txBox="1"/>
           <p:nvPr/>
         </p:nvSpPr>
@@ -15272,7 +14981,7 @@
       </p:sp>
       <p:sp>
         <p:nvSpPr>
-          <p:cNvPr id="20" name="Text 18"/>
+          <p:cNvPr id="19" name="Text 17"/>
           <p:cNvSpPr txBox="1"/>
           <p:nvPr/>
         </p:nvSpPr>
@@ -15311,7 +15020,7 @@
       </p:sp>
       <p:sp>
         <p:nvSpPr>
-          <p:cNvPr id="21" name="Text 19"/>
+          <p:cNvPr id="20" name="Text 18"/>
           <p:cNvSpPr txBox="1"/>
           <p:nvPr/>
         </p:nvSpPr>
@@ -15358,7 +15067,7 @@
       </p:sp>
       <p:sp>
         <p:nvSpPr>
-          <p:cNvPr id="22" name="Text 20"/>
+          <p:cNvPr id="21" name="Text 19"/>
           <p:cNvSpPr txBox="1"/>
           <p:nvPr/>
         </p:nvSpPr>
@@ -15397,7 +15106,7 @@
       </p:sp>
       <p:sp>
         <p:nvSpPr>
-          <p:cNvPr id="23" name="Text 21"/>
+          <p:cNvPr id="22" name="Text 20"/>
           <p:cNvSpPr txBox="1"/>
           <p:nvPr/>
         </p:nvSpPr>
@@ -15444,7 +15153,7 @@
       </p:sp>
       <p:sp>
         <p:nvSpPr>
-          <p:cNvPr id="24" name="Text 22"/>
+          <p:cNvPr id="23" name="Text 21"/>
           <p:cNvSpPr txBox="1"/>
           <p:nvPr/>
         </p:nvSpPr>
@@ -15483,7 +15192,7 @@
       </p:sp>
       <p:sp>
         <p:nvSpPr>
-          <p:cNvPr id="25" name="Shape 23"/>
+          <p:cNvPr id="24" name="Shape 22"/>
           <p:cNvSpPr/>
           <p:nvPr/>
         </p:nvSpPr>
@@ -15517,7 +15226,7 @@
       </p:sp>
       <p:sp>
         <p:nvSpPr>
-          <p:cNvPr id="26" name="Text 24"/>
+          <p:cNvPr id="25" name="Text 23"/>
           <p:cNvSpPr txBox="1"/>
           <p:nvPr/>
         </p:nvSpPr>
@@ -15599,7 +15308,7 @@
       </p:sp>
       <p:sp>
         <p:nvSpPr>
-          <p:cNvPr id="27" name="Text 25"/>
+          <p:cNvPr id="26" name="Text 24"/>
           <p:cNvSpPr txBox="1"/>
           <p:nvPr/>
         </p:nvSpPr>
@@ -15670,46 +15379,7 @@
       </p:grpSpPr>
       <p:sp>
         <p:nvSpPr>
-          <p:cNvPr id="2" name="Text 0"/>
-          <p:cNvSpPr txBox="1"/>
-          <p:nvPr/>
-        </p:nvSpPr>
-        <p:spPr>
-          <a:xfrm>
-            <a:off x="5760720" y="109728"/>
-            <a:ext cx="5897880" cy="256032"/>
-          </a:xfrm>
-          <a:prstGeom prst="rect">
-            <a:avLst/>
-          </a:prstGeom>
-          <a:noFill/>
-          <a:ln/>
-        </p:spPr>
-        <p:txBody>
-          <a:bodyPr wrap="square" lIns="0" tIns="0" rIns="0" bIns="0" rtlCol="0" anchor="t"/>
-          <a:lstStyle/>
-          <a:p>
-            <a:pPr algn="r" indent="0" marL="0">
-              <a:buNone/>
-            </a:pPr>
-            <a:r>
-              <a:rPr lang="en-US" sz="900" b="1" spc="100" kern="0" dirty="0">
-                <a:solidFill>
-                  <a:srgbClr val="8A93A3"/>
-                </a:solidFill>
-                <a:latin typeface="Calibri" pitchFamily="34" charset="0"/>
-                <a:ea typeface="Calibri" pitchFamily="34" charset="-122"/>
-                <a:cs typeface="Calibri" pitchFamily="34" charset="-120"/>
-              </a:rPr>
-              <a:t>SECTION 5 OF 12  ·  FRESHWORKS INTEGRATION</a:t>
-            </a:r>
-            <a:endParaRPr lang="en-US" sz="900" dirty="0"/>
-          </a:p>
-        </p:txBody>
-      </p:sp>
-      <p:sp>
-        <p:nvSpPr>
-          <p:cNvPr id="3" name="Shape 1"/>
+          <p:cNvPr id="2" name="Shape 0"/>
           <p:cNvSpPr/>
           <p:nvPr/>
         </p:nvSpPr>
@@ -15734,7 +15404,7 @@
       </p:sp>
       <p:sp>
         <p:nvSpPr>
-          <p:cNvPr id="4" name="Text 2"/>
+          <p:cNvPr id="3" name="Text 1"/>
           <p:cNvSpPr txBox="1"/>
           <p:nvPr/>
         </p:nvSpPr>
@@ -15773,7 +15443,7 @@
       </p:sp>
       <p:sp>
         <p:nvSpPr>
-          <p:cNvPr id="5" name="Text 3"/>
+          <p:cNvPr id="4" name="Text 2"/>
           <p:cNvSpPr txBox="1"/>
           <p:nvPr/>
         </p:nvSpPr>
@@ -15812,7 +15482,7 @@
       </p:sp>
       <p:sp>
         <p:nvSpPr>
-          <p:cNvPr id="6" name="Text 4"/>
+          <p:cNvPr id="5" name="Text 3"/>
           <p:cNvSpPr txBox="1"/>
           <p:nvPr/>
         </p:nvSpPr>
@@ -15851,7 +15521,7 @@
       </p:sp>
       <p:sp>
         <p:nvSpPr>
-          <p:cNvPr id="7" name="Text 5"/>
+          <p:cNvPr id="6" name="Text 4"/>
           <p:cNvSpPr txBox="1"/>
           <p:nvPr/>
         </p:nvSpPr>
@@ -15915,7 +15585,7 @@
       </p:sp>
       <p:sp>
         <p:nvSpPr>
-          <p:cNvPr id="8" name="Shape 6"/>
+          <p:cNvPr id="7" name="Shape 5"/>
           <p:cNvSpPr/>
           <p:nvPr/>
         </p:nvSpPr>
@@ -15939,7 +15609,7 @@
       </p:sp>
       <p:sp>
         <p:nvSpPr>
-          <p:cNvPr id="9" name="Text 7"/>
+          <p:cNvPr id="8" name="Text 6"/>
           <p:cNvSpPr txBox="1"/>
           <p:nvPr/>
         </p:nvSpPr>
@@ -16003,7 +15673,7 @@
       </p:sp>
       <p:sp>
         <p:nvSpPr>
-          <p:cNvPr id="10" name="Shape 8"/>
+          <p:cNvPr id="9" name="Shape 7"/>
           <p:cNvSpPr/>
           <p:nvPr/>
         </p:nvSpPr>
@@ -16027,7 +15697,7 @@
       </p:sp>
       <p:sp>
         <p:nvSpPr>
-          <p:cNvPr id="11" name="Text 9"/>
+          <p:cNvPr id="10" name="Text 8"/>
           <p:cNvSpPr txBox="1"/>
           <p:nvPr/>
         </p:nvSpPr>
@@ -16089,7 +15759,7 @@
       </p:sp>
       <p:sp>
         <p:nvSpPr>
-          <p:cNvPr id="12" name="Shape 10"/>
+          <p:cNvPr id="11" name="Shape 9"/>
           <p:cNvSpPr/>
           <p:nvPr/>
         </p:nvSpPr>
@@ -16113,7 +15783,7 @@
       </p:sp>
       <p:sp>
         <p:nvSpPr>
-          <p:cNvPr id="13" name="Shape 11"/>
+          <p:cNvPr id="12" name="Shape 10"/>
           <p:cNvSpPr/>
           <p:nvPr/>
         </p:nvSpPr>
@@ -16137,7 +15807,7 @@
       </p:sp>
       <p:sp>
         <p:nvSpPr>
-          <p:cNvPr id="14" name="Text 12"/>
+          <p:cNvPr id="13" name="Text 11"/>
           <p:cNvSpPr txBox="1"/>
           <p:nvPr/>
         </p:nvSpPr>
@@ -16201,7 +15871,7 @@
       </p:sp>
       <p:sp>
         <p:nvSpPr>
-          <p:cNvPr id="15" name="Text 13"/>
+          <p:cNvPr id="14" name="Text 12"/>
           <p:cNvSpPr txBox="1"/>
           <p:nvPr/>
         </p:nvSpPr>
@@ -16248,7 +15918,7 @@
       </p:sp>
       <p:sp>
         <p:nvSpPr>
-          <p:cNvPr id="16" name="Shape 14"/>
+          <p:cNvPr id="15" name="Shape 13"/>
           <p:cNvSpPr/>
           <p:nvPr/>
         </p:nvSpPr>
@@ -16282,7 +15952,7 @@
       </p:sp>
       <p:sp>
         <p:nvSpPr>
-          <p:cNvPr id="17" name="Shape 15"/>
+          <p:cNvPr id="16" name="Shape 14"/>
           <p:cNvSpPr/>
           <p:nvPr/>
         </p:nvSpPr>
@@ -16307,7 +15977,7 @@
       </p:sp>
       <p:pic>
         <p:nvPicPr>
-          <p:cNvPr id="18" name="Image 0" descr="preencoded.png">    </p:cNvPr>
+          <p:cNvPr id="17" name="Image 0" descr="preencoded.png">    </p:cNvPr>
           <p:cNvPicPr>
             <a:picLocks noChangeAspect="1"/>
           </p:cNvPicPr>
@@ -16331,7 +16001,7 @@
       </p:pic>
       <p:sp>
         <p:nvSpPr>
-          <p:cNvPr id="19" name="Text 16"/>
+          <p:cNvPr id="18" name="Text 15"/>
           <p:cNvSpPr txBox="1"/>
           <p:nvPr/>
         </p:nvSpPr>
@@ -16370,7 +16040,7 @@
       </p:sp>
       <p:sp>
         <p:nvSpPr>
-          <p:cNvPr id="20" name="Text 17"/>
+          <p:cNvPr id="19" name="Text 16"/>
           <p:cNvSpPr txBox="1"/>
           <p:nvPr/>
         </p:nvSpPr>
@@ -16476,7 +16146,7 @@
       </p:sp>
       <p:sp>
         <p:nvSpPr>
-          <p:cNvPr id="21" name="Shape 18"/>
+          <p:cNvPr id="20" name="Shape 17"/>
           <p:cNvSpPr/>
           <p:nvPr/>
         </p:nvSpPr>
@@ -16501,7 +16171,7 @@
       </p:sp>
       <p:pic>
         <p:nvPicPr>
-          <p:cNvPr id="22" name="Image 1" descr="preencoded.png">    </p:cNvPr>
+          <p:cNvPr id="21" name="Image 1" descr="preencoded.png">    </p:cNvPr>
           <p:cNvPicPr>
             <a:picLocks noChangeAspect="1"/>
           </p:cNvPicPr>
@@ -16525,7 +16195,7 @@
       </p:pic>
       <p:sp>
         <p:nvSpPr>
-          <p:cNvPr id="23" name="Text 19"/>
+          <p:cNvPr id="22" name="Text 18"/>
           <p:cNvSpPr txBox="1"/>
           <p:nvPr/>
         </p:nvSpPr>
@@ -16564,7 +16234,7 @@
       </p:sp>
       <p:sp>
         <p:nvSpPr>
-          <p:cNvPr id="24" name="Text 20"/>
+          <p:cNvPr id="23" name="Text 19"/>
           <p:cNvSpPr txBox="1"/>
           <p:nvPr/>
         </p:nvSpPr>
@@ -16603,7 +16273,7 @@
       </p:sp>
       <p:sp>
         <p:nvSpPr>
-          <p:cNvPr id="25" name="Shape 21"/>
+          <p:cNvPr id="24" name="Shape 20"/>
           <p:cNvSpPr/>
           <p:nvPr/>
         </p:nvSpPr>
@@ -16637,7 +16307,7 @@
       </p:sp>
       <p:sp>
         <p:nvSpPr>
-          <p:cNvPr id="26" name="Shape 22"/>
+          <p:cNvPr id="25" name="Shape 21"/>
           <p:cNvSpPr/>
           <p:nvPr/>
         </p:nvSpPr>
@@ -16664,7 +16334,7 @@
       </p:sp>
       <p:sp>
         <p:nvSpPr>
-          <p:cNvPr id="27" name="Text 23"/>
+          <p:cNvPr id="26" name="Text 22"/>
           <p:cNvSpPr txBox="1"/>
           <p:nvPr/>
         </p:nvSpPr>
@@ -16703,7 +16373,7 @@
       </p:sp>
       <p:sp>
         <p:nvSpPr>
-          <p:cNvPr id="28" name="Text 24"/>
+          <p:cNvPr id="27" name="Text 23"/>
           <p:cNvSpPr txBox="1"/>
           <p:nvPr/>
         </p:nvSpPr>
@@ -16742,7 +16412,7 @@
       </p:sp>
       <p:sp>
         <p:nvSpPr>
-          <p:cNvPr id="29" name="Text 25"/>
+          <p:cNvPr id="28" name="Text 24"/>
           <p:cNvSpPr txBox="1"/>
           <p:nvPr/>
         </p:nvSpPr>
@@ -16789,7 +16459,7 @@
       </p:sp>
       <p:sp>
         <p:nvSpPr>
-          <p:cNvPr id="30" name="Text 26"/>
+          <p:cNvPr id="29" name="Text 25"/>
           <p:cNvSpPr txBox="1"/>
           <p:nvPr/>
         </p:nvSpPr>
@@ -16836,7 +16506,7 @@
       </p:sp>
       <p:sp>
         <p:nvSpPr>
-          <p:cNvPr id="31" name="Text 27"/>
+          <p:cNvPr id="30" name="Text 26"/>
           <p:cNvSpPr txBox="1"/>
           <p:nvPr/>
         </p:nvSpPr>
@@ -16883,7 +16553,7 @@
       </p:sp>
       <p:sp>
         <p:nvSpPr>
-          <p:cNvPr id="32" name="Text 28"/>
+          <p:cNvPr id="31" name="Text 27"/>
           <p:cNvSpPr txBox="1"/>
           <p:nvPr/>
         </p:nvSpPr>
@@ -16930,7 +16600,7 @@
       </p:sp>
       <p:sp>
         <p:nvSpPr>
-          <p:cNvPr id="33" name="Text 29"/>
+          <p:cNvPr id="32" name="Text 28"/>
           <p:cNvSpPr txBox="1"/>
           <p:nvPr/>
         </p:nvSpPr>
@@ -16977,7 +16647,7 @@
       </p:sp>
       <p:sp>
         <p:nvSpPr>
-          <p:cNvPr id="34" name="Text 30"/>
+          <p:cNvPr id="33" name="Text 29"/>
           <p:cNvSpPr txBox="1"/>
           <p:nvPr/>
         </p:nvSpPr>
@@ -17016,7 +16686,7 @@
       </p:sp>
       <p:sp>
         <p:nvSpPr>
-          <p:cNvPr id="35" name="Text 31"/>
+          <p:cNvPr id="34" name="Text 30"/>
           <p:cNvSpPr txBox="1"/>
           <p:nvPr/>
         </p:nvSpPr>
@@ -17063,7 +16733,7 @@
       </p:sp>
       <p:sp>
         <p:nvSpPr>
-          <p:cNvPr id="36" name="Text 32"/>
+          <p:cNvPr id="35" name="Text 31"/>
           <p:cNvSpPr txBox="1"/>
           <p:nvPr/>
         </p:nvSpPr>
@@ -17110,7 +16780,7 @@
       </p:sp>
       <p:sp>
         <p:nvSpPr>
-          <p:cNvPr id="37" name="Text 33"/>
+          <p:cNvPr id="36" name="Text 32"/>
           <p:cNvSpPr txBox="1"/>
           <p:nvPr/>
         </p:nvSpPr>
@@ -17157,7 +16827,7 @@
       </p:sp>
       <p:sp>
         <p:nvSpPr>
-          <p:cNvPr id="38" name="Text 34"/>
+          <p:cNvPr id="37" name="Text 33"/>
           <p:cNvSpPr txBox="1"/>
           <p:nvPr/>
         </p:nvSpPr>
@@ -17204,7 +16874,7 @@
       </p:sp>
       <p:sp>
         <p:nvSpPr>
-          <p:cNvPr id="39" name="Text 35"/>
+          <p:cNvPr id="38" name="Text 34"/>
           <p:cNvSpPr txBox="1"/>
           <p:nvPr/>
         </p:nvSpPr>
@@ -17251,7 +16921,7 @@
       </p:sp>
       <p:sp>
         <p:nvSpPr>
-          <p:cNvPr id="40" name="Text 36"/>
+          <p:cNvPr id="39" name="Text 35"/>
           <p:cNvSpPr txBox="1"/>
           <p:nvPr/>
         </p:nvSpPr>
@@ -17290,7 +16960,7 @@
       </p:sp>
       <p:sp>
         <p:nvSpPr>
-          <p:cNvPr id="41" name="Text 37"/>
+          <p:cNvPr id="40" name="Text 36"/>
           <p:cNvSpPr txBox="1"/>
           <p:nvPr/>
         </p:nvSpPr>
@@ -17337,7 +17007,7 @@
       </p:sp>
       <p:sp>
         <p:nvSpPr>
-          <p:cNvPr id="42" name="Text 38"/>
+          <p:cNvPr id="41" name="Text 37"/>
           <p:cNvSpPr txBox="1"/>
           <p:nvPr/>
         </p:nvSpPr>
@@ -17384,7 +17054,7 @@
       </p:sp>
       <p:sp>
         <p:nvSpPr>
-          <p:cNvPr id="43" name="Text 39"/>
+          <p:cNvPr id="42" name="Text 38"/>
           <p:cNvSpPr txBox="1"/>
           <p:nvPr/>
         </p:nvSpPr>
@@ -17431,7 +17101,7 @@
       </p:sp>
       <p:sp>
         <p:nvSpPr>
-          <p:cNvPr id="44" name="Text 40"/>
+          <p:cNvPr id="43" name="Text 39"/>
           <p:cNvSpPr txBox="1"/>
           <p:nvPr/>
         </p:nvSpPr>
@@ -17478,7 +17148,7 @@
       </p:sp>
       <p:sp>
         <p:nvSpPr>
-          <p:cNvPr id="45" name="Text 41"/>
+          <p:cNvPr id="44" name="Text 40"/>
           <p:cNvSpPr txBox="1"/>
           <p:nvPr/>
         </p:nvSpPr>
@@ -17525,7 +17195,7 @@
       </p:sp>
       <p:sp>
         <p:nvSpPr>
-          <p:cNvPr id="46" name="Text 42"/>
+          <p:cNvPr id="45" name="Text 41"/>
           <p:cNvSpPr txBox="1"/>
           <p:nvPr/>
         </p:nvSpPr>
@@ -17596,46 +17266,7 @@
       </p:grpSpPr>
       <p:sp>
         <p:nvSpPr>
-          <p:cNvPr id="2" name="Text 0"/>
-          <p:cNvSpPr txBox="1"/>
-          <p:nvPr/>
-        </p:nvSpPr>
-        <p:spPr>
-          <a:xfrm>
-            <a:off x="5760720" y="109728"/>
-            <a:ext cx="5897880" cy="256032"/>
-          </a:xfrm>
-          <a:prstGeom prst="rect">
-            <a:avLst/>
-          </a:prstGeom>
-          <a:noFill/>
-          <a:ln/>
-        </p:spPr>
-        <p:txBody>
-          <a:bodyPr wrap="square" lIns="0" tIns="0" rIns="0" bIns="0" rtlCol="0" anchor="t"/>
-          <a:lstStyle/>
-          <a:p>
-            <a:pPr algn="r" indent="0" marL="0">
-              <a:buNone/>
-            </a:pPr>
-            <a:r>
-              <a:rPr lang="en-US" sz="900" b="1" spc="100" kern="0" dirty="0">
-                <a:solidFill>
-                  <a:srgbClr val="8A93A3"/>
-                </a:solidFill>
-                <a:latin typeface="Calibri" pitchFamily="34" charset="0"/>
-                <a:ea typeface="Calibri" pitchFamily="34" charset="-122"/>
-                <a:cs typeface="Calibri" pitchFamily="34" charset="-120"/>
-              </a:rPr>
-              <a:t>SECTION 5 OF 12  ·  AGENTIC / AI DESIGN  ·  MVP SCOPE</a:t>
-            </a:r>
-            <a:endParaRPr lang="en-US" sz="900" dirty="0"/>
-          </a:p>
-        </p:txBody>
-      </p:sp>
-      <p:sp>
-        <p:nvSpPr>
-          <p:cNvPr id="3" name="Shape 1"/>
+          <p:cNvPr id="2" name="Shape 0"/>
           <p:cNvSpPr/>
           <p:nvPr/>
         </p:nvSpPr>
@@ -17660,7 +17291,7 @@
       </p:sp>
       <p:sp>
         <p:nvSpPr>
-          <p:cNvPr id="4" name="Text 2"/>
+          <p:cNvPr id="3" name="Text 1"/>
           <p:cNvSpPr txBox="1"/>
           <p:nvPr/>
         </p:nvSpPr>
@@ -17699,7 +17330,7 @@
       </p:sp>
       <p:sp>
         <p:nvSpPr>
-          <p:cNvPr id="5" name="Text 3"/>
+          <p:cNvPr id="4" name="Text 2"/>
           <p:cNvSpPr txBox="1"/>
           <p:nvPr/>
         </p:nvSpPr>
@@ -17738,7 +17369,7 @@
       </p:sp>
       <p:sp>
         <p:nvSpPr>
-          <p:cNvPr id="6" name="Text 4"/>
+          <p:cNvPr id="5" name="Text 3"/>
           <p:cNvSpPr txBox="1"/>
           <p:nvPr/>
         </p:nvSpPr>
@@ -17777,7 +17408,7 @@
       </p:sp>
       <p:sp>
         <p:nvSpPr>
-          <p:cNvPr id="7" name="Text 5"/>
+          <p:cNvPr id="6" name="Text 4"/>
           <p:cNvSpPr txBox="1"/>
           <p:nvPr/>
         </p:nvSpPr>
@@ -17816,7 +17447,7 @@
       </p:sp>
       <p:sp>
         <p:nvSpPr>
-          <p:cNvPr id="8" name="Text 6"/>
+          <p:cNvPr id="7" name="Text 5"/>
           <p:cNvSpPr txBox="1"/>
           <p:nvPr/>
         </p:nvSpPr>
@@ -17861,7 +17492,7 @@
       </p:sp>
       <p:sp>
         <p:nvSpPr>
-          <p:cNvPr id="9" name="Text 7"/>
+          <p:cNvPr id="8" name="Text 6"/>
           <p:cNvSpPr txBox="1"/>
           <p:nvPr/>
         </p:nvSpPr>
@@ -17906,7 +17537,7 @@
       </p:sp>
       <p:sp>
         <p:nvSpPr>
-          <p:cNvPr id="10" name="Text 8"/>
+          <p:cNvPr id="9" name="Text 7"/>
           <p:cNvSpPr txBox="1"/>
           <p:nvPr/>
         </p:nvSpPr>
@@ -17951,7 +17582,7 @@
       </p:sp>
       <p:sp>
         <p:nvSpPr>
-          <p:cNvPr id="11" name="Text 9"/>
+          <p:cNvPr id="10" name="Text 8"/>
           <p:cNvSpPr txBox="1"/>
           <p:nvPr/>
         </p:nvSpPr>
@@ -17996,7 +17627,7 @@
       </p:sp>
       <p:sp>
         <p:nvSpPr>
-          <p:cNvPr id="12" name="Text 10"/>
+          <p:cNvPr id="11" name="Text 9"/>
           <p:cNvSpPr txBox="1"/>
           <p:nvPr/>
         </p:nvSpPr>
@@ -18043,7 +17674,7 @@
       </p:sp>
       <p:sp>
         <p:nvSpPr>
-          <p:cNvPr id="13" name="Shape 11"/>
+          <p:cNvPr id="12" name="Shape 10"/>
           <p:cNvSpPr/>
           <p:nvPr/>
         </p:nvSpPr>
@@ -18077,7 +17708,7 @@
       </p:sp>
       <p:sp>
         <p:nvSpPr>
-          <p:cNvPr id="14" name="Text 12"/>
+          <p:cNvPr id="13" name="Text 11"/>
           <p:cNvSpPr txBox="1"/>
           <p:nvPr/>
         </p:nvSpPr>
@@ -18116,7 +17747,7 @@
       </p:sp>
       <p:sp>
         <p:nvSpPr>
-          <p:cNvPr id="15" name="Text 13"/>
+          <p:cNvPr id="14" name="Text 12"/>
           <p:cNvSpPr txBox="1"/>
           <p:nvPr/>
         </p:nvSpPr>
@@ -18163,7 +17794,7 @@
       </p:sp>
       <p:sp>
         <p:nvSpPr>
-          <p:cNvPr id="16" name="Shape 14"/>
+          <p:cNvPr id="15" name="Shape 13"/>
           <p:cNvSpPr/>
           <p:nvPr/>
         </p:nvSpPr>
@@ -18197,7 +17828,7 @@
       </p:sp>
       <p:sp>
         <p:nvSpPr>
-          <p:cNvPr id="17" name="Text 15"/>
+          <p:cNvPr id="16" name="Text 14"/>
           <p:cNvSpPr txBox="1"/>
           <p:nvPr/>
         </p:nvSpPr>
@@ -18236,7 +17867,7 @@
       </p:sp>
       <p:sp>
         <p:nvSpPr>
-          <p:cNvPr id="18" name="Text 16"/>
+          <p:cNvPr id="17" name="Text 15"/>
           <p:cNvSpPr txBox="1"/>
           <p:nvPr/>
         </p:nvSpPr>
@@ -18283,7 +17914,7 @@
       </p:sp>
       <p:sp>
         <p:nvSpPr>
-          <p:cNvPr id="19" name="Shape 17"/>
+          <p:cNvPr id="18" name="Shape 16"/>
           <p:cNvSpPr/>
           <p:nvPr/>
         </p:nvSpPr>
@@ -18317,7 +17948,7 @@
       </p:sp>
       <p:sp>
         <p:nvSpPr>
-          <p:cNvPr id="20" name="Text 18"/>
+          <p:cNvPr id="19" name="Text 17"/>
           <p:cNvSpPr txBox="1"/>
           <p:nvPr/>
         </p:nvSpPr>
@@ -18356,7 +17987,7 @@
       </p:sp>
       <p:sp>
         <p:nvSpPr>
-          <p:cNvPr id="21" name="Shape 19"/>
+          <p:cNvPr id="20" name="Shape 18"/>
           <p:cNvSpPr/>
           <p:nvPr/>
         </p:nvSpPr>
@@ -18390,7 +18021,7 @@
       </p:sp>
       <p:sp>
         <p:nvSpPr>
-          <p:cNvPr id="22" name="Text 20"/>
+          <p:cNvPr id="21" name="Text 19"/>
           <p:cNvSpPr txBox="1"/>
           <p:nvPr/>
         </p:nvSpPr>
@@ -18429,7 +18060,7 @@
       </p:sp>
       <p:graphicFrame>
         <p:nvGraphicFramePr>
-          <p:cNvPr id="23" name="Chart 0" descr=""/>
+          <p:cNvPr id="22" name="Chart 0" descr=""/>
           <p:cNvGraphicFramePr/>
           <p:nvPr/>
         </p:nvGraphicFramePr>
@@ -18445,7 +18076,7 @@
       </p:graphicFrame>
       <p:sp>
         <p:nvSpPr>
-          <p:cNvPr id="24" name="Text 21"/>
+          <p:cNvPr id="23" name="Text 20"/>
           <p:cNvSpPr txBox="1"/>
           <p:nvPr/>
         </p:nvSpPr>
@@ -18498,7 +18129,7 @@
       </p:sp>
       <p:sp>
         <p:nvSpPr>
-          <p:cNvPr id="25" name="Text 22"/>
+          <p:cNvPr id="24" name="Text 21"/>
           <p:cNvSpPr txBox="1"/>
           <p:nvPr/>
         </p:nvSpPr>
@@ -18569,46 +18200,7 @@
       </p:grpSpPr>
       <p:sp>
         <p:nvSpPr>
-          <p:cNvPr id="2" name="Text 0"/>
-          <p:cNvSpPr txBox="1"/>
-          <p:nvPr/>
-        </p:nvSpPr>
-        <p:spPr>
-          <a:xfrm>
-            <a:off x="5760720" y="109728"/>
-            <a:ext cx="5897880" cy="256032"/>
-          </a:xfrm>
-          <a:prstGeom prst="rect">
-            <a:avLst/>
-          </a:prstGeom>
-          <a:noFill/>
-          <a:ln/>
-        </p:spPr>
-        <p:txBody>
-          <a:bodyPr wrap="square" lIns="0" tIns="0" rIns="0" bIns="0" rtlCol="0" anchor="t"/>
-          <a:lstStyle/>
-          <a:p>
-            <a:pPr algn="r" indent="0" marL="0">
-              <a:buNone/>
-            </a:pPr>
-            <a:r>
-              <a:rPr lang="en-US" sz="900" b="1" spc="100" kern="0" dirty="0">
-                <a:solidFill>
-                  <a:srgbClr val="8A93A3"/>
-                </a:solidFill>
-                <a:latin typeface="Calibri" pitchFamily="34" charset="0"/>
-                <a:ea typeface="Calibri" pitchFamily="34" charset="-122"/>
-                <a:cs typeface="Calibri" pitchFamily="34" charset="-120"/>
-              </a:rPr>
-              <a:t>SECTIONS 6–9 OF 12  ·  CUSTOMERS  ·  VALUE  ·  PRICING  ·  GO-TO-MARKET</a:t>
-            </a:r>
-            <a:endParaRPr lang="en-US" sz="900" dirty="0"/>
-          </a:p>
-        </p:txBody>
-      </p:sp>
-      <p:sp>
-        <p:nvSpPr>
-          <p:cNvPr id="3" name="Shape 1"/>
+          <p:cNvPr id="2" name="Shape 0"/>
           <p:cNvSpPr/>
           <p:nvPr/>
         </p:nvSpPr>
@@ -18633,7 +18225,7 @@
       </p:sp>
       <p:sp>
         <p:nvSpPr>
-          <p:cNvPr id="4" name="Text 2"/>
+          <p:cNvPr id="3" name="Text 1"/>
           <p:cNvSpPr txBox="1"/>
           <p:nvPr/>
         </p:nvSpPr>
@@ -18672,7 +18264,7 @@
       </p:sp>
       <p:sp>
         <p:nvSpPr>
-          <p:cNvPr id="5" name="Text 3"/>
+          <p:cNvPr id="4" name="Text 2"/>
           <p:cNvSpPr txBox="1"/>
           <p:nvPr/>
         </p:nvSpPr>
@@ -18711,7 +18303,7 @@
       </p:sp>
       <p:sp>
         <p:nvSpPr>
-          <p:cNvPr id="6" name="Text 4"/>
+          <p:cNvPr id="5" name="Text 3"/>
           <p:cNvSpPr txBox="1"/>
           <p:nvPr/>
         </p:nvSpPr>
@@ -18750,7 +18342,7 @@
       </p:sp>
       <p:sp>
         <p:nvSpPr>
-          <p:cNvPr id="7" name="Shape 5"/>
+          <p:cNvPr id="6" name="Shape 4"/>
           <p:cNvSpPr/>
           <p:nvPr/>
         </p:nvSpPr>
@@ -18784,7 +18376,7 @@
       </p:sp>
       <p:sp>
         <p:nvSpPr>
-          <p:cNvPr id="8" name="Text 6"/>
+          <p:cNvPr id="7" name="Text 5"/>
           <p:cNvSpPr txBox="1"/>
           <p:nvPr/>
         </p:nvSpPr>
@@ -18831,7 +18423,7 @@
       </p:sp>
       <p:sp>
         <p:nvSpPr>
-          <p:cNvPr id="9" name="Text 7"/>
+          <p:cNvPr id="8" name="Text 6"/>
           <p:cNvSpPr txBox="1"/>
           <p:nvPr/>
         </p:nvSpPr>
@@ -18870,7 +18462,7 @@
       </p:sp>
       <p:sp>
         <p:nvSpPr>
-          <p:cNvPr id="10" name="Text 8"/>
+          <p:cNvPr id="9" name="Text 7"/>
           <p:cNvSpPr txBox="1"/>
           <p:nvPr/>
         </p:nvSpPr>
@@ -19023,7 +18615,7 @@
       </p:sp>
       <p:sp>
         <p:nvSpPr>
-          <p:cNvPr id="11" name="Shape 9"/>
+          <p:cNvPr id="10" name="Shape 8"/>
           <p:cNvSpPr/>
           <p:nvPr/>
         </p:nvSpPr>
@@ -19057,7 +18649,7 @@
       </p:sp>
       <p:sp>
         <p:nvSpPr>
-          <p:cNvPr id="12" name="Text 10"/>
+          <p:cNvPr id="11" name="Text 9"/>
           <p:cNvSpPr txBox="1"/>
           <p:nvPr/>
         </p:nvSpPr>
@@ -19104,7 +18696,7 @@
       </p:sp>
       <p:sp>
         <p:nvSpPr>
-          <p:cNvPr id="13" name="Text 11"/>
+          <p:cNvPr id="12" name="Text 10"/>
           <p:cNvSpPr txBox="1"/>
           <p:nvPr/>
         </p:nvSpPr>
@@ -19143,7 +18735,7 @@
       </p:sp>
       <p:sp>
         <p:nvSpPr>
-          <p:cNvPr id="14" name="Text 12"/>
+          <p:cNvPr id="13" name="Text 11"/>
           <p:cNvSpPr txBox="1"/>
           <p:nvPr/>
         </p:nvSpPr>
@@ -19182,7 +18774,7 @@
       </p:sp>
       <p:sp>
         <p:nvSpPr>
-          <p:cNvPr id="15" name="Text 13"/>
+          <p:cNvPr id="14" name="Text 12"/>
           <p:cNvSpPr txBox="1"/>
           <p:nvPr/>
         </p:nvSpPr>
@@ -19221,7 +18813,7 @@
       </p:sp>
       <p:sp>
         <p:nvSpPr>
-          <p:cNvPr id="16" name="Text 14"/>
+          <p:cNvPr id="15" name="Text 13"/>
           <p:cNvSpPr txBox="1"/>
           <p:nvPr/>
         </p:nvSpPr>
@@ -19306,7 +18898,7 @@
       </p:sp>
       <p:sp>
         <p:nvSpPr>
-          <p:cNvPr id="17" name="Text 15"/>
+          <p:cNvPr id="16" name="Text 14"/>
           <p:cNvSpPr txBox="1"/>
           <p:nvPr/>
         </p:nvSpPr>
@@ -19345,7 +18937,7 @@
       </p:sp>
       <p:sp>
         <p:nvSpPr>
-          <p:cNvPr id="18" name="Text 16"/>
+          <p:cNvPr id="17" name="Text 15"/>
           <p:cNvSpPr txBox="1"/>
           <p:nvPr/>
         </p:nvSpPr>
@@ -19430,7 +19022,7 @@
       </p:sp>
       <p:sp>
         <p:nvSpPr>
-          <p:cNvPr id="19" name="Shape 17"/>
+          <p:cNvPr id="18" name="Shape 16"/>
           <p:cNvSpPr/>
           <p:nvPr/>
         </p:nvSpPr>
@@ -19464,7 +19056,7 @@
       </p:sp>
       <p:sp>
         <p:nvSpPr>
-          <p:cNvPr id="20" name="Text 18"/>
+          <p:cNvPr id="19" name="Text 17"/>
           <p:cNvSpPr txBox="1"/>
           <p:nvPr/>
         </p:nvSpPr>
@@ -19511,7 +19103,7 @@
       </p:sp>
       <p:sp>
         <p:nvSpPr>
-          <p:cNvPr id="21" name="Text 19"/>
+          <p:cNvPr id="20" name="Text 18"/>
           <p:cNvSpPr txBox="1"/>
           <p:nvPr/>
         </p:nvSpPr>
@@ -19550,7 +19142,7 @@
       </p:sp>
       <p:sp>
         <p:nvSpPr>
-          <p:cNvPr id="22" name="Text 20"/>
+          <p:cNvPr id="21" name="Text 19"/>
           <p:cNvSpPr txBox="1"/>
           <p:nvPr/>
         </p:nvSpPr>
@@ -19589,7 +19181,7 @@
       </p:sp>
       <p:sp>
         <p:nvSpPr>
-          <p:cNvPr id="23" name="Text 21"/>
+          <p:cNvPr id="22" name="Text 20"/>
           <p:cNvSpPr txBox="1"/>
           <p:nvPr/>
         </p:nvSpPr>
@@ -19628,7 +19220,7 @@
       </p:sp>
       <p:sp>
         <p:nvSpPr>
-          <p:cNvPr id="24" name="Text 22"/>
+          <p:cNvPr id="23" name="Text 21"/>
           <p:cNvSpPr txBox="1"/>
           <p:nvPr/>
         </p:nvSpPr>
@@ -19667,7 +19259,7 @@
       </p:sp>
       <p:sp>
         <p:nvSpPr>
-          <p:cNvPr id="25" name="Text 23"/>
+          <p:cNvPr id="24" name="Text 22"/>
           <p:cNvSpPr txBox="1"/>
           <p:nvPr/>
         </p:nvSpPr>
@@ -19706,7 +19298,7 @@
       </p:sp>
       <p:sp>
         <p:nvSpPr>
-          <p:cNvPr id="26" name="Text 24"/>
+          <p:cNvPr id="25" name="Text 23"/>
           <p:cNvSpPr txBox="1"/>
           <p:nvPr/>
         </p:nvSpPr>
@@ -19745,7 +19337,7 @@
       </p:sp>
       <p:sp>
         <p:nvSpPr>
-          <p:cNvPr id="27" name="Text 25"/>
+          <p:cNvPr id="26" name="Text 24"/>
           <p:cNvSpPr txBox="1"/>
           <p:nvPr/>
         </p:nvSpPr>
@@ -19784,7 +19376,7 @@
       </p:sp>
       <p:sp>
         <p:nvSpPr>
-          <p:cNvPr id="28" name="Text 26"/>
+          <p:cNvPr id="27" name="Text 25"/>
           <p:cNvSpPr txBox="1"/>
           <p:nvPr/>
         </p:nvSpPr>
@@ -19823,7 +19415,7 @@
       </p:sp>
       <p:sp>
         <p:nvSpPr>
-          <p:cNvPr id="29" name="Text 27"/>
+          <p:cNvPr id="28" name="Text 26"/>
           <p:cNvSpPr txBox="1"/>
           <p:nvPr/>
         </p:nvSpPr>
@@ -19862,7 +19454,7 @@
       </p:sp>
       <p:sp>
         <p:nvSpPr>
-          <p:cNvPr id="30" name="Text 28"/>
+          <p:cNvPr id="29" name="Text 27"/>
           <p:cNvSpPr txBox="1"/>
           <p:nvPr/>
         </p:nvSpPr>
@@ -19901,7 +19493,7 @@
       </p:sp>
       <p:sp>
         <p:nvSpPr>
-          <p:cNvPr id="31" name="Shape 29"/>
+          <p:cNvPr id="30" name="Shape 28"/>
           <p:cNvSpPr/>
           <p:nvPr/>
         </p:nvSpPr>
@@ -19935,7 +19527,7 @@
       </p:sp>
       <p:sp>
         <p:nvSpPr>
-          <p:cNvPr id="32" name="Text 30"/>
+          <p:cNvPr id="31" name="Text 29"/>
           <p:cNvSpPr txBox="1"/>
           <p:nvPr/>
         </p:nvSpPr>
@@ -19982,7 +19574,7 @@
       </p:sp>
       <p:sp>
         <p:nvSpPr>
-          <p:cNvPr id="33" name="Text 31"/>
+          <p:cNvPr id="32" name="Text 30"/>
           <p:cNvSpPr txBox="1"/>
           <p:nvPr/>
         </p:nvSpPr>
@@ -20021,7 +19613,7 @@
       </p:sp>
       <p:sp>
         <p:nvSpPr>
-          <p:cNvPr id="34" name="Shape 32"/>
+          <p:cNvPr id="33" name="Shape 31"/>
           <p:cNvSpPr/>
           <p:nvPr/>
         </p:nvSpPr>
@@ -20046,7 +19638,7 @@
       </p:sp>
       <p:sp>
         <p:nvSpPr>
-          <p:cNvPr id="35" name="Text 33"/>
+          <p:cNvPr id="34" name="Text 32"/>
           <p:cNvSpPr txBox="1"/>
           <p:nvPr/>
         </p:nvSpPr>
@@ -20085,7 +19677,7 @@
       </p:sp>
       <p:sp>
         <p:nvSpPr>
-          <p:cNvPr id="36" name="Text 34"/>
+          <p:cNvPr id="35" name="Text 33"/>
           <p:cNvSpPr txBox="1"/>
           <p:nvPr/>
         </p:nvSpPr>
@@ -20124,7 +19716,7 @@
       </p:sp>
       <p:sp>
         <p:nvSpPr>
-          <p:cNvPr id="37" name="Shape 35"/>
+          <p:cNvPr id="36" name="Shape 34"/>
           <p:cNvSpPr/>
           <p:nvPr/>
         </p:nvSpPr>
@@ -20149,7 +19741,7 @@
       </p:sp>
       <p:sp>
         <p:nvSpPr>
-          <p:cNvPr id="38" name="Text 36"/>
+          <p:cNvPr id="37" name="Text 35"/>
           <p:cNvSpPr txBox="1"/>
           <p:nvPr/>
         </p:nvSpPr>
@@ -20188,7 +19780,7 @@
       </p:sp>
       <p:sp>
         <p:nvSpPr>
-          <p:cNvPr id="39" name="Text 37"/>
+          <p:cNvPr id="38" name="Text 36"/>
           <p:cNvSpPr txBox="1"/>
           <p:nvPr/>
         </p:nvSpPr>
@@ -20227,7 +19819,7 @@
       </p:sp>
       <p:sp>
         <p:nvSpPr>
-          <p:cNvPr id="40" name="Shape 38"/>
+          <p:cNvPr id="39" name="Shape 37"/>
           <p:cNvSpPr/>
           <p:nvPr/>
         </p:nvSpPr>
@@ -20252,7 +19844,7 @@
       </p:sp>
       <p:sp>
         <p:nvSpPr>
-          <p:cNvPr id="41" name="Text 39"/>
+          <p:cNvPr id="40" name="Text 38"/>
           <p:cNvSpPr txBox="1"/>
           <p:nvPr/>
         </p:nvSpPr>
@@ -20291,7 +19883,7 @@
       </p:sp>
       <p:sp>
         <p:nvSpPr>
-          <p:cNvPr id="42" name="Text 40"/>
+          <p:cNvPr id="41" name="Text 39"/>
           <p:cNvSpPr txBox="1"/>
           <p:nvPr/>
         </p:nvSpPr>
@@ -20330,7 +19922,7 @@
       </p:sp>
       <p:sp>
         <p:nvSpPr>
-          <p:cNvPr id="43" name="Shape 41"/>
+          <p:cNvPr id="42" name="Shape 40"/>
           <p:cNvSpPr/>
           <p:nvPr/>
         </p:nvSpPr>
@@ -20355,7 +19947,7 @@
       </p:sp>
       <p:sp>
         <p:nvSpPr>
-          <p:cNvPr id="44" name="Text 42"/>
+          <p:cNvPr id="43" name="Text 41"/>
           <p:cNvSpPr txBox="1"/>
           <p:nvPr/>
         </p:nvSpPr>
@@ -20394,7 +19986,7 @@
       </p:sp>
       <p:sp>
         <p:nvSpPr>
-          <p:cNvPr id="45" name="Text 43"/>
+          <p:cNvPr id="44" name="Text 42"/>
           <p:cNvSpPr txBox="1"/>
           <p:nvPr/>
         </p:nvSpPr>
@@ -20433,7 +20025,7 @@
       </p:sp>
       <p:sp>
         <p:nvSpPr>
-          <p:cNvPr id="46" name="Shape 44"/>
+          <p:cNvPr id="45" name="Shape 43"/>
           <p:cNvSpPr/>
           <p:nvPr/>
         </p:nvSpPr>
@@ -20458,7 +20050,7 @@
       </p:sp>
       <p:sp>
         <p:nvSpPr>
-          <p:cNvPr id="47" name="Text 45"/>
+          <p:cNvPr id="46" name="Text 44"/>
           <p:cNvSpPr txBox="1"/>
           <p:nvPr/>
         </p:nvSpPr>
@@ -20497,7 +20089,7 @@
       </p:sp>
       <p:sp>
         <p:nvSpPr>
-          <p:cNvPr id="48" name="Text 46"/>
+          <p:cNvPr id="47" name="Text 45"/>
           <p:cNvSpPr txBox="1"/>
           <p:nvPr/>
         </p:nvSpPr>
@@ -20536,7 +20128,7 @@
       </p:sp>
       <p:sp>
         <p:nvSpPr>
-          <p:cNvPr id="49" name="Text 47"/>
+          <p:cNvPr id="48" name="Text 46"/>
           <p:cNvSpPr txBox="1"/>
           <p:nvPr/>
         </p:nvSpPr>

--- a/docs/presentation/CodemixSkill-Final-10-Slides.pptx
+++ b/docs/presentation/CodemixSkill-Final-10-Slides.pptx
@@ -222,7 +222,7 @@
                 <c:formatCode>General</c:formatCode>
                 <c:ptCount val="1"/>
                 <c:pt idx="0">
-                  <c:v>47.8</c:v>
+                  <c:v>47.6</c:v>
                 </c:pt>
               </c:numCache>
             </c:numRef>
@@ -1548,7 +1548,7 @@
           <a:p>
             <a:r>
               <a:rPr lang="en-US" dirty="0"/>
-              <a:t>Reproduce: node decision-policy/negation-benchmark.mjs. The same run shows the Round-1 keyword engine recognised only 7 of 20 genuine requests, which is why the MVP uses Claude for intent.</a:t>
+              <a:t>Reproduce: node decision-policy/negation-benchmark.mjs. The same run shows the Round-1 keyword engine recognised only 6 of 18 genuine requests, which is why the MVP uses Claude for intent.</a:t>
             </a:r>
             <a:endParaRPr lang="en-US" dirty="0"/>
           </a:p>
@@ -5212,7 +5212,7 @@
                 <a:ea typeface="Calibri" pitchFamily="34" charset="-122"/>
                 <a:cs typeface="Calibri" pitchFamily="34" charset="-120"/>
               </a:rPr>
-              <a:t>* Round-1 engine, no gate, 23-sentence test set   † npm test average</a:t>
+              <a:t>* Round-1 engine, no gate, 21-sentence test set   † npm test average</a:t>
             </a:r>
             <a:endParaRPr lang="en-US" sz="850" dirty="0"/>
           </a:p>
@@ -7293,7 +7293,7 @@
                 <a:ea typeface="Calibri" pitchFamily="34" charset="-122"/>
                 <a:cs typeface="Calibri" pitchFamily="34" charset="-120"/>
               </a:rPr>
-              <a:t>Measured: 11 of 23 team-written test sentences (Hindi, Tamil, English, Telugu, Kannada, Bengali)</a:t>
+              <a:t>Measured: 10 of 21 team-written test sentences (Hindi, Tamil, English, Kannada)</a:t>
             </a:r>
             <a:endParaRPr lang="en-US" sz="900" dirty="0"/>
           </a:p>
@@ -17859,7 +17859,7 @@
                 <a:ea typeface="Calibri" pitchFamily="34" charset="-122"/>
                 <a:cs typeface="Calibri" pitchFamily="34" charset="-120"/>
               </a:rPr>
-              <a:t>VoBiz + Sarvam + ElevenLabs voice path · Claude safety gate · Dodo action path · Freshdesk escalation · Hindi + Tamil + English · audit trail</a:t>
+              <a:t>VoBiz + Sarvam + ElevenLabs voice path · Claude safety gate · Dodo action path · Freshdesk escalation · Hindi + Tamil + English + Kannada · audit trail</a:t>
             </a:r>
             <a:endParaRPr lang="en-US" sz="1100" dirty="0"/>
           </a:p>
@@ -18107,7 +18107,7 @@
                 <a:ea typeface="Calibri" pitchFamily="34" charset="-122"/>
                 <a:cs typeface="Calibri" pitchFamily="34" charset="-120"/>
               </a:rPr>
-              <a:t>11 of 23 → 0 of 23 </a:t>
+              <a:t>10 of 21 → 0 of 21 </a:t>
             </a:r>
             <a:pPr indent="0" marL="0">
               <a:buNone/>
@@ -18121,7 +18121,7 @@
                 <a:ea typeface="Calibri" pitchFamily="34" charset="-122"/>
                 <a:cs typeface="Calibri" pitchFamily="34" charset="-120"/>
               </a:rPr>
-              <a:t>wrong actions; 0 of 20 genuine requests blocked. 43 team-written sentences in 6 languages; the pilot measures real calls.</a:t>
+              <a:t>wrong actions; 0 of 18 genuine requests blocked. 39 team-written sentences in Hindi, Tamil, English and Kannada; the pilot measures real calls.</a:t>
             </a:r>
             <a:endParaRPr lang="en-US" sz="1050" dirty="0"/>
           </a:p>
